--- a/Introduction to R.pptx
+++ b/Introduction to R.pptx
@@ -5,7 +5,7 @@
     <p:sldMasterId id="2147483648" r:id="rId1"/>
   </p:sldMasterIdLst>
   <p:notesMasterIdLst>
-    <p:notesMasterId r:id="rId34"/>
+    <p:notesMasterId r:id="rId33"/>
   </p:notesMasterIdLst>
   <p:sldIdLst>
     <p:sldId id="256" r:id="rId2"/>
@@ -14,12 +14,12 @@
     <p:sldId id="2569" r:id="rId5"/>
     <p:sldId id="2564" r:id="rId6"/>
     <p:sldId id="2566" r:id="rId7"/>
-    <p:sldId id="2568" r:id="rId8"/>
-    <p:sldId id="257" r:id="rId9"/>
-    <p:sldId id="258" r:id="rId10"/>
-    <p:sldId id="260" r:id="rId11"/>
-    <p:sldId id="261" r:id="rId12"/>
-    <p:sldId id="262" r:id="rId13"/>
+    <p:sldId id="2570" r:id="rId8"/>
+    <p:sldId id="2568" r:id="rId9"/>
+    <p:sldId id="257" r:id="rId10"/>
+    <p:sldId id="258" r:id="rId11"/>
+    <p:sldId id="260" r:id="rId12"/>
+    <p:sldId id="261" r:id="rId13"/>
     <p:sldId id="263" r:id="rId14"/>
     <p:sldId id="264" r:id="rId15"/>
     <p:sldId id="266" r:id="rId16"/>
@@ -34,12 +34,11 @@
     <p:sldId id="275" r:id="rId25"/>
     <p:sldId id="276" r:id="rId26"/>
     <p:sldId id="280" r:id="rId27"/>
-    <p:sldId id="277" r:id="rId28"/>
-    <p:sldId id="278" r:id="rId29"/>
-    <p:sldId id="281" r:id="rId30"/>
-    <p:sldId id="282" r:id="rId31"/>
+    <p:sldId id="281" r:id="rId28"/>
+    <p:sldId id="282" r:id="rId29"/>
+    <p:sldId id="277" r:id="rId30"/>
+    <p:sldId id="278" r:id="rId31"/>
     <p:sldId id="279" r:id="rId32"/>
-    <p:sldId id="283" r:id="rId33"/>
   </p:sldIdLst>
   <p:sldSz cx="9144000" cy="5143500" type="screen16x9"/>
   <p:notesSz cx="6858000" cy="9144000"/>
@@ -160,7 +159,7 @@
 <file path=ppt/revisionInfo.xml><?xml version="1.0" encoding="utf-8"?>
 <p1510:revInfo xmlns:a="http://schemas.openxmlformats.org/drawingml/2006/main" xmlns:r="http://schemas.openxmlformats.org/officeDocument/2006/relationships" xmlns:p1510="http://schemas.microsoft.com/office/powerpoint/2015/10/main">
   <p1510:revLst>
-    <p1510:client id="{CF986A61-C12A-4339-945A-F92ACA14E513}" v="5" dt="2026-05-17T02:38:20.438"/>
+    <p1510:client id="{CF986A61-C12A-4339-945A-F92ACA14E513}" v="8" dt="2026-05-17T03:10:57.627"/>
   </p1510:revLst>
 </p1510:revInfo>
 </file>
@@ -169,19 +168,55 @@
 <pc:chgInfo xmlns:a="http://schemas.openxmlformats.org/drawingml/2006/main" xmlns:r="http://schemas.openxmlformats.org/officeDocument/2006/relationships" xmlns:ac="http://schemas.microsoft.com/office/drawing/2013/main/command" xmlns:pc="http://schemas.microsoft.com/office/powerpoint/2013/main/command">
   <pc:docChgLst>
     <pc:chgData name="Hutchings, Caroline" userId="3a668ad8-ca6f-4b4f-a92d-c0f71fc7d6eb" providerId="ADAL" clId="{D01C7191-9178-4CD1-9DE4-E6CF5F019065}"/>
-    <pc:docChg chg="undo custSel addSld modSld">
-      <pc:chgData name="Hutchings, Caroline" userId="3a668ad8-ca6f-4b4f-a92d-c0f71fc7d6eb" providerId="ADAL" clId="{D01C7191-9178-4CD1-9DE4-E6CF5F019065}" dt="2026-05-17T02:42:23.083" v="132" actId="26606"/>
+    <pc:docChg chg="undo custSel addSld delSld modSld sldOrd">
+      <pc:chgData name="Hutchings, Caroline" userId="3a668ad8-ca6f-4b4f-a92d-c0f71fc7d6eb" providerId="ADAL" clId="{D01C7191-9178-4CD1-9DE4-E6CF5F019065}" dt="2026-05-17T04:03:13.479" v="422" actId="47"/>
       <pc:docMkLst>
         <pc:docMk/>
       </pc:docMkLst>
+      <pc:sldChg chg="modSp del mod">
+        <pc:chgData name="Hutchings, Caroline" userId="3a668ad8-ca6f-4b4f-a92d-c0f71fc7d6eb" providerId="ADAL" clId="{D01C7191-9178-4CD1-9DE4-E6CF5F019065}" dt="2026-05-17T03:11:02.355" v="417" actId="47"/>
+        <pc:sldMkLst>
+          <pc:docMk/>
+          <pc:sldMk cId="0" sldId="262"/>
+        </pc:sldMkLst>
+        <pc:spChg chg="mod">
+          <ac:chgData name="Hutchings, Caroline" userId="3a668ad8-ca6f-4b4f-a92d-c0f71fc7d6eb" providerId="ADAL" clId="{D01C7191-9178-4CD1-9DE4-E6CF5F019065}" dt="2026-05-17T03:10:36.536" v="416" actId="21"/>
+          <ac:spMkLst>
+            <pc:docMk/>
+            <pc:sldMk cId="0" sldId="262"/>
+            <ac:spMk id="3" creationId="{00000000-0000-0000-0000-000000000000}"/>
+          </ac:spMkLst>
+        </pc:spChg>
+      </pc:sldChg>
+      <pc:sldChg chg="ord">
+        <pc:chgData name="Hutchings, Caroline" userId="3a668ad8-ca6f-4b4f-a92d-c0f71fc7d6eb" providerId="ADAL" clId="{D01C7191-9178-4CD1-9DE4-E6CF5F019065}" dt="2026-05-17T04:01:48.507" v="419"/>
+        <pc:sldMkLst>
+          <pc:docMk/>
+          <pc:sldMk cId="0" sldId="281"/>
+        </pc:sldMkLst>
+      </pc:sldChg>
+      <pc:sldChg chg="ord">
+        <pc:chgData name="Hutchings, Caroline" userId="3a668ad8-ca6f-4b4f-a92d-c0f71fc7d6eb" providerId="ADAL" clId="{D01C7191-9178-4CD1-9DE4-E6CF5F019065}" dt="2026-05-17T04:02:32.598" v="421"/>
+        <pc:sldMkLst>
+          <pc:docMk/>
+          <pc:sldMk cId="0" sldId="282"/>
+        </pc:sldMkLst>
+      </pc:sldChg>
+      <pc:sldChg chg="del">
+        <pc:chgData name="Hutchings, Caroline" userId="3a668ad8-ca6f-4b4f-a92d-c0f71fc7d6eb" providerId="ADAL" clId="{D01C7191-9178-4CD1-9DE4-E6CF5F019065}" dt="2026-05-17T04:03:13.479" v="422" actId="47"/>
+        <pc:sldMkLst>
+          <pc:docMk/>
+          <pc:sldMk cId="0" sldId="283"/>
+        </pc:sldMkLst>
+      </pc:sldChg>
       <pc:sldChg chg="addSp delSp modSp new mod setBg">
-        <pc:chgData name="Hutchings, Caroline" userId="3a668ad8-ca6f-4b4f-a92d-c0f71fc7d6eb" providerId="ADAL" clId="{D01C7191-9178-4CD1-9DE4-E6CF5F019065}" dt="2026-05-17T02:42:23.083" v="132" actId="26606"/>
+        <pc:chgData name="Hutchings, Caroline" userId="3a668ad8-ca6f-4b4f-a92d-c0f71fc7d6eb" providerId="ADAL" clId="{D01C7191-9178-4CD1-9DE4-E6CF5F019065}" dt="2026-05-17T02:49:20.139" v="158" actId="20577"/>
         <pc:sldMkLst>
           <pc:docMk/>
           <pc:sldMk cId="1544326581" sldId="2569"/>
         </pc:sldMkLst>
         <pc:spChg chg="mod">
-          <ac:chgData name="Hutchings, Caroline" userId="3a668ad8-ca6f-4b4f-a92d-c0f71fc7d6eb" providerId="ADAL" clId="{D01C7191-9178-4CD1-9DE4-E6CF5F019065}" dt="2026-05-17T02:42:23.083" v="132" actId="26606"/>
+          <ac:chgData name="Hutchings, Caroline" userId="3a668ad8-ca6f-4b4f-a92d-c0f71fc7d6eb" providerId="ADAL" clId="{D01C7191-9178-4CD1-9DE4-E6CF5F019065}" dt="2026-05-17T02:47:56.325" v="157" actId="26606"/>
           <ac:spMkLst>
             <pc:docMk/>
             <pc:sldMk cId="1544326581" sldId="2569"/>
@@ -189,7 +224,7 @@
           </ac:spMkLst>
         </pc:spChg>
         <pc:spChg chg="add del mod">
-          <ac:chgData name="Hutchings, Caroline" userId="3a668ad8-ca6f-4b4f-a92d-c0f71fc7d6eb" providerId="ADAL" clId="{D01C7191-9178-4CD1-9DE4-E6CF5F019065}" dt="2026-05-17T02:42:23.083" v="132" actId="26606"/>
+          <ac:chgData name="Hutchings, Caroline" userId="3a668ad8-ca6f-4b4f-a92d-c0f71fc7d6eb" providerId="ADAL" clId="{D01C7191-9178-4CD1-9DE4-E6CF5F019065}" dt="2026-05-17T02:49:20.139" v="158" actId="20577"/>
           <ac:spMkLst>
             <pc:docMk/>
             <pc:sldMk cId="1544326581" sldId="2569"/>
@@ -205,7 +240,7 @@
           </ac:spMkLst>
         </pc:spChg>
         <pc:spChg chg="add mod">
-          <ac:chgData name="Hutchings, Caroline" userId="3a668ad8-ca6f-4b4f-a92d-c0f71fc7d6eb" providerId="ADAL" clId="{D01C7191-9178-4CD1-9DE4-E6CF5F019065}" dt="2026-05-17T02:42:23.083" v="132" actId="26606"/>
+          <ac:chgData name="Hutchings, Caroline" userId="3a668ad8-ca6f-4b4f-a92d-c0f71fc7d6eb" providerId="ADAL" clId="{D01C7191-9178-4CD1-9DE4-E6CF5F019065}" dt="2026-05-17T02:47:56.325" v="157" actId="26606"/>
           <ac:spMkLst>
             <pc:docMk/>
             <pc:sldMk cId="1544326581" sldId="2569"/>
@@ -228,20 +263,36 @@
             <ac:spMk id="15" creationId="{650D18FE-0824-4A46-B22C-A86B52E5780A}"/>
           </ac:spMkLst>
         </pc:spChg>
-        <pc:spChg chg="add">
-          <ac:chgData name="Hutchings, Caroline" userId="3a668ad8-ca6f-4b4f-a92d-c0f71fc7d6eb" providerId="ADAL" clId="{D01C7191-9178-4CD1-9DE4-E6CF5F019065}" dt="2026-05-17T02:42:23.083" v="132" actId="26606"/>
+        <pc:spChg chg="add del">
+          <ac:chgData name="Hutchings, Caroline" userId="3a668ad8-ca6f-4b4f-a92d-c0f71fc7d6eb" providerId="ADAL" clId="{D01C7191-9178-4CD1-9DE4-E6CF5F019065}" dt="2026-05-17T02:47:56.325" v="157" actId="26606"/>
           <ac:spMkLst>
             <pc:docMk/>
             <pc:sldMk cId="1544326581" sldId="2569"/>
             <ac:spMk id="20" creationId="{69D47016-023F-44BD-981C-50E7A10A6609}"/>
           </ac:spMkLst>
         </pc:spChg>
-        <pc:spChg chg="add">
-          <ac:chgData name="Hutchings, Caroline" userId="3a668ad8-ca6f-4b4f-a92d-c0f71fc7d6eb" providerId="ADAL" clId="{D01C7191-9178-4CD1-9DE4-E6CF5F019065}" dt="2026-05-17T02:42:23.083" v="132" actId="26606"/>
+        <pc:spChg chg="add del">
+          <ac:chgData name="Hutchings, Caroline" userId="3a668ad8-ca6f-4b4f-a92d-c0f71fc7d6eb" providerId="ADAL" clId="{D01C7191-9178-4CD1-9DE4-E6CF5F019065}" dt="2026-05-17T02:47:56.325" v="157" actId="26606"/>
           <ac:spMkLst>
             <pc:docMk/>
             <pc:sldMk cId="1544326581" sldId="2569"/>
             <ac:spMk id="22" creationId="{6D8B37B0-0682-433E-BC8D-498C04ABD9A7}"/>
+          </ac:spMkLst>
+        </pc:spChg>
+        <pc:spChg chg="add">
+          <ac:chgData name="Hutchings, Caroline" userId="3a668ad8-ca6f-4b4f-a92d-c0f71fc7d6eb" providerId="ADAL" clId="{D01C7191-9178-4CD1-9DE4-E6CF5F019065}" dt="2026-05-17T02:47:56.325" v="157" actId="26606"/>
+          <ac:spMkLst>
+            <pc:docMk/>
+            <pc:sldMk cId="1544326581" sldId="2569"/>
+            <ac:spMk id="27" creationId="{743AA782-23D1-4521-8CAD-47662984AA08}"/>
+          </ac:spMkLst>
+        </pc:spChg>
+        <pc:spChg chg="add">
+          <ac:chgData name="Hutchings, Caroline" userId="3a668ad8-ca6f-4b4f-a92d-c0f71fc7d6eb" providerId="ADAL" clId="{D01C7191-9178-4CD1-9DE4-E6CF5F019065}" dt="2026-05-17T02:47:56.325" v="157" actId="26606"/>
+          <ac:spMkLst>
+            <pc:docMk/>
+            <pc:sldMk cId="1544326581" sldId="2569"/>
+            <ac:spMk id="29" creationId="{71877DBC-BB60-40F0-AC93-2ACDBAAE60CE}"/>
           </ac:spMkLst>
         </pc:spChg>
         <pc:graphicFrameChg chg="add mod">
@@ -253,21 +304,163 @@
           </ac:graphicFrameMkLst>
         </pc:graphicFrameChg>
         <pc:picChg chg="add mod">
-          <ac:chgData name="Hutchings, Caroline" userId="3a668ad8-ca6f-4b4f-a92d-c0f71fc7d6eb" providerId="ADAL" clId="{D01C7191-9178-4CD1-9DE4-E6CF5F019065}" dt="2026-05-17T02:42:23.083" v="132" actId="26606"/>
+          <ac:chgData name="Hutchings, Caroline" userId="3a668ad8-ca6f-4b4f-a92d-c0f71fc7d6eb" providerId="ADAL" clId="{D01C7191-9178-4CD1-9DE4-E6CF5F019065}" dt="2026-05-17T02:47:56.325" v="157" actId="26606"/>
           <ac:picMkLst>
             <pc:docMk/>
             <pc:sldMk cId="1544326581" sldId="2569"/>
             <ac:picMk id="7" creationId="{0F014469-ACC4-6234-E2BC-B9ACF1E42E38}"/>
           </ac:picMkLst>
         </pc:picChg>
-        <pc:picChg chg="add mod ord">
-          <ac:chgData name="Hutchings, Caroline" userId="3a668ad8-ca6f-4b4f-a92d-c0f71fc7d6eb" providerId="ADAL" clId="{D01C7191-9178-4CD1-9DE4-E6CF5F019065}" dt="2026-05-17T02:42:23.083" v="132" actId="26606"/>
+        <pc:picChg chg="add del mod ord">
+          <ac:chgData name="Hutchings, Caroline" userId="3a668ad8-ca6f-4b4f-a92d-c0f71fc7d6eb" providerId="ADAL" clId="{D01C7191-9178-4CD1-9DE4-E6CF5F019065}" dt="2026-05-17T02:47:36.173" v="133" actId="478"/>
           <ac:picMkLst>
             <pc:docMk/>
             <pc:sldMk cId="1544326581" sldId="2569"/>
             <ac:picMk id="10" creationId="{03B70DA4-25BE-898A-9EEF-D65BCE47386D}"/>
           </ac:picMkLst>
         </pc:picChg>
+      </pc:sldChg>
+      <pc:sldChg chg="addSp delSp modSp new mod setBg">
+        <pc:chgData name="Hutchings, Caroline" userId="3a668ad8-ca6f-4b4f-a92d-c0f71fc7d6eb" providerId="ADAL" clId="{D01C7191-9178-4CD1-9DE4-E6CF5F019065}" dt="2026-05-17T03:09:33.285" v="415" actId="20577"/>
+        <pc:sldMkLst>
+          <pc:docMk/>
+          <pc:sldMk cId="1516917188" sldId="2570"/>
+        </pc:sldMkLst>
+        <pc:spChg chg="mod">
+          <ac:chgData name="Hutchings, Caroline" userId="3a668ad8-ca6f-4b4f-a92d-c0f71fc7d6eb" providerId="ADAL" clId="{D01C7191-9178-4CD1-9DE4-E6CF5F019065}" dt="2026-05-17T03:09:27.692" v="414" actId="26606"/>
+          <ac:spMkLst>
+            <pc:docMk/>
+            <pc:sldMk cId="1516917188" sldId="2570"/>
+            <ac:spMk id="2" creationId="{91D8F338-53D2-BAB1-947D-28C598EC8826}"/>
+          </ac:spMkLst>
+        </pc:spChg>
+        <pc:spChg chg="mod">
+          <ac:chgData name="Hutchings, Caroline" userId="3a668ad8-ca6f-4b4f-a92d-c0f71fc7d6eb" providerId="ADAL" clId="{D01C7191-9178-4CD1-9DE4-E6CF5F019065}" dt="2026-05-17T03:09:33.285" v="415" actId="20577"/>
+          <ac:spMkLst>
+            <pc:docMk/>
+            <pc:sldMk cId="1516917188" sldId="2570"/>
+            <ac:spMk id="3" creationId="{85CABD98-B951-87C6-98E7-B02D8D3881F4}"/>
+          </ac:spMkLst>
+        </pc:spChg>
+        <pc:spChg chg="del">
+          <ac:chgData name="Hutchings, Caroline" userId="3a668ad8-ca6f-4b4f-a92d-c0f71fc7d6eb" providerId="ADAL" clId="{D01C7191-9178-4CD1-9DE4-E6CF5F019065}" dt="2026-05-17T02:52:48.771" v="198" actId="22"/>
+          <ac:spMkLst>
+            <pc:docMk/>
+            <pc:sldMk cId="1516917188" sldId="2570"/>
+            <ac:spMk id="4" creationId="{F6D2BDAD-039F-A50D-8C4D-8F8D57AE08FC}"/>
+          </ac:spMkLst>
+        </pc:spChg>
+        <pc:spChg chg="add del mod">
+          <ac:chgData name="Hutchings, Caroline" userId="3a668ad8-ca6f-4b4f-a92d-c0f71fc7d6eb" providerId="ADAL" clId="{D01C7191-9178-4CD1-9DE4-E6CF5F019065}" dt="2026-05-17T03:06:01.563" v="348" actId="931"/>
+          <ac:spMkLst>
+            <pc:docMk/>
+            <pc:sldMk cId="1516917188" sldId="2570"/>
+            <ac:spMk id="8" creationId="{639AABBE-0F52-2A6B-5107-8A395CCBFDB0}"/>
+          </ac:spMkLst>
+        </pc:spChg>
+        <pc:spChg chg="add">
+          <ac:chgData name="Hutchings, Caroline" userId="3a668ad8-ca6f-4b4f-a92d-c0f71fc7d6eb" providerId="ADAL" clId="{D01C7191-9178-4CD1-9DE4-E6CF5F019065}" dt="2026-05-17T03:09:27.692" v="414" actId="26606"/>
+          <ac:spMkLst>
+            <pc:docMk/>
+            <pc:sldMk cId="1516917188" sldId="2570"/>
+            <ac:spMk id="15" creationId="{45D37F4E-DDB4-456B-97E0-9937730A039F}"/>
+          </ac:spMkLst>
+        </pc:spChg>
+        <pc:spChg chg="add">
+          <ac:chgData name="Hutchings, Caroline" userId="3a668ad8-ca6f-4b4f-a92d-c0f71fc7d6eb" providerId="ADAL" clId="{D01C7191-9178-4CD1-9DE4-E6CF5F019065}" dt="2026-05-17T03:09:27.692" v="414" actId="26606"/>
+          <ac:spMkLst>
+            <pc:docMk/>
+            <pc:sldMk cId="1516917188" sldId="2570"/>
+            <ac:spMk id="17" creationId="{B2DD41CD-8F47-4F56-AD12-4E2FF7696987}"/>
+          </ac:spMkLst>
+        </pc:spChg>
+        <pc:picChg chg="add del mod ord">
+          <ac:chgData name="Hutchings, Caroline" userId="3a668ad8-ca6f-4b4f-a92d-c0f71fc7d6eb" providerId="ADAL" clId="{D01C7191-9178-4CD1-9DE4-E6CF5F019065}" dt="2026-05-17T03:03:28.104" v="343" actId="478"/>
+          <ac:picMkLst>
+            <pc:docMk/>
+            <pc:sldMk cId="1516917188" sldId="2570"/>
+            <ac:picMk id="6" creationId="{A4836753-6447-5B97-8AA1-E9F378DDC84D}"/>
+          </ac:picMkLst>
+        </pc:picChg>
+        <pc:picChg chg="add mod ord">
+          <ac:chgData name="Hutchings, Caroline" userId="3a668ad8-ca6f-4b4f-a92d-c0f71fc7d6eb" providerId="ADAL" clId="{D01C7191-9178-4CD1-9DE4-E6CF5F019065}" dt="2026-05-17T03:09:27.692" v="414" actId="26606"/>
+          <ac:picMkLst>
+            <pc:docMk/>
+            <pc:sldMk cId="1516917188" sldId="2570"/>
+            <ac:picMk id="10" creationId="{84065BAC-4F68-E62D-8185-D108F3842589}"/>
+          </ac:picMkLst>
+        </pc:picChg>
+      </pc:sldChg>
+      <pc:sldChg chg="addSp delSp modSp new del mod modClrScheme chgLayout">
+        <pc:chgData name="Hutchings, Caroline" userId="3a668ad8-ca6f-4b4f-a92d-c0f71fc7d6eb" providerId="ADAL" clId="{D01C7191-9178-4CD1-9DE4-E6CF5F019065}" dt="2026-05-17T02:50:40.993" v="165" actId="47"/>
+        <pc:sldMkLst>
+          <pc:docMk/>
+          <pc:sldMk cId="1924464868" sldId="2570"/>
+        </pc:sldMkLst>
+        <pc:spChg chg="del mod ord">
+          <ac:chgData name="Hutchings, Caroline" userId="3a668ad8-ca6f-4b4f-a92d-c0f71fc7d6eb" providerId="ADAL" clId="{D01C7191-9178-4CD1-9DE4-E6CF5F019065}" dt="2026-05-17T02:50:16.639" v="160" actId="700"/>
+          <ac:spMkLst>
+            <pc:docMk/>
+            <pc:sldMk cId="1924464868" sldId="2570"/>
+            <ac:spMk id="2" creationId="{BFC816D9-024C-7F8A-6300-4007E359ADA1}"/>
+          </ac:spMkLst>
+        </pc:spChg>
+        <pc:spChg chg="del mod ord">
+          <ac:chgData name="Hutchings, Caroline" userId="3a668ad8-ca6f-4b4f-a92d-c0f71fc7d6eb" providerId="ADAL" clId="{D01C7191-9178-4CD1-9DE4-E6CF5F019065}" dt="2026-05-17T02:50:16.639" v="160" actId="700"/>
+          <ac:spMkLst>
+            <pc:docMk/>
+            <pc:sldMk cId="1924464868" sldId="2570"/>
+            <ac:spMk id="3" creationId="{4679B0A9-9C2F-034C-B6ED-840EC479C56C}"/>
+          </ac:spMkLst>
+        </pc:spChg>
+        <pc:spChg chg="del mod ord">
+          <ac:chgData name="Hutchings, Caroline" userId="3a668ad8-ca6f-4b4f-a92d-c0f71fc7d6eb" providerId="ADAL" clId="{D01C7191-9178-4CD1-9DE4-E6CF5F019065}" dt="2026-05-17T02:50:16.639" v="160" actId="700"/>
+          <ac:spMkLst>
+            <pc:docMk/>
+            <pc:sldMk cId="1924464868" sldId="2570"/>
+            <ac:spMk id="4" creationId="{8F86EBED-9051-DA1D-09F0-EE607256FDC2}"/>
+          </ac:spMkLst>
+        </pc:spChg>
+        <pc:spChg chg="del">
+          <ac:chgData name="Hutchings, Caroline" userId="3a668ad8-ca6f-4b4f-a92d-c0f71fc7d6eb" providerId="ADAL" clId="{D01C7191-9178-4CD1-9DE4-E6CF5F019065}" dt="2026-05-17T02:50:16.639" v="160" actId="700"/>
+          <ac:spMkLst>
+            <pc:docMk/>
+            <pc:sldMk cId="1924464868" sldId="2570"/>
+            <ac:spMk id="5" creationId="{9BFED824-CA5C-4EC7-95C7-A413DB0E8941}"/>
+          </ac:spMkLst>
+        </pc:spChg>
+        <pc:spChg chg="del">
+          <ac:chgData name="Hutchings, Caroline" userId="3a668ad8-ca6f-4b4f-a92d-c0f71fc7d6eb" providerId="ADAL" clId="{D01C7191-9178-4CD1-9DE4-E6CF5F019065}" dt="2026-05-17T02:50:16.639" v="160" actId="700"/>
+          <ac:spMkLst>
+            <pc:docMk/>
+            <pc:sldMk cId="1924464868" sldId="2570"/>
+            <ac:spMk id="6" creationId="{A4603420-82E4-6A2C-1EAE-4866C0F52A40}"/>
+          </ac:spMkLst>
+        </pc:spChg>
+        <pc:spChg chg="add mod ord">
+          <ac:chgData name="Hutchings, Caroline" userId="3a668ad8-ca6f-4b4f-a92d-c0f71fc7d6eb" providerId="ADAL" clId="{D01C7191-9178-4CD1-9DE4-E6CF5F019065}" dt="2026-05-17T02:50:25" v="164" actId="20577"/>
+          <ac:spMkLst>
+            <pc:docMk/>
+            <pc:sldMk cId="1924464868" sldId="2570"/>
+            <ac:spMk id="7" creationId="{BB862384-3688-D87B-89B1-918C99FF5679}"/>
+          </ac:spMkLst>
+        </pc:spChg>
+        <pc:spChg chg="add mod ord">
+          <ac:chgData name="Hutchings, Caroline" userId="3a668ad8-ca6f-4b4f-a92d-c0f71fc7d6eb" providerId="ADAL" clId="{D01C7191-9178-4CD1-9DE4-E6CF5F019065}" dt="2026-05-17T02:50:16.639" v="160" actId="700"/>
+          <ac:spMkLst>
+            <pc:docMk/>
+            <pc:sldMk cId="1924464868" sldId="2570"/>
+            <ac:spMk id="8" creationId="{0340ABBC-E138-B7DF-1D3D-271DD9DA24C0}"/>
+          </ac:spMkLst>
+        </pc:spChg>
+        <pc:spChg chg="add mod ord">
+          <ac:chgData name="Hutchings, Caroline" userId="3a668ad8-ca6f-4b4f-a92d-c0f71fc7d6eb" providerId="ADAL" clId="{D01C7191-9178-4CD1-9DE4-E6CF5F019065}" dt="2026-05-17T02:50:16.639" v="160" actId="700"/>
+          <ac:spMkLst>
+            <pc:docMk/>
+            <pc:sldMk cId="1924464868" sldId="2570"/>
+            <ac:spMk id="9" creationId="{2A7FE057-08B3-8EAC-B63F-ECE823FD29F3}"/>
+          </ac:spMkLst>
+        </pc:spChg>
       </pc:sldChg>
     </pc:docChg>
   </pc:docChgLst>
@@ -6843,7 +7036,7 @@
   <dgm:whole/>
   <dgm:extLst>
     <a:ext uri="http://schemas.microsoft.com/office/drawing/2008/diagram">
-      <dsp:dataModelExt xmlns:dsp="http://schemas.microsoft.com/office/drawing/2008/diagram" relId="rId6" minVer="http://schemas.openxmlformats.org/drawingml/2006/diagram"/>
+      <dsp:dataModelExt xmlns:dsp="http://schemas.microsoft.com/office/drawing/2008/diagram" relId="rId7" minVer="http://schemas.openxmlformats.org/drawingml/2006/diagram"/>
     </a:ext>
   </dgm:extLst>
 </dgm:dataModel>
@@ -23207,6 +23400,117 @@
 </p:notes>
 </file>
 
+<file path=ppt/notesSlides/notesSlide3.xml><?xml version="1.0" encoding="utf-8"?>
+<p:notes xmlns:a="http://schemas.openxmlformats.org/drawingml/2006/main" xmlns:r="http://schemas.openxmlformats.org/officeDocument/2006/relationships" xmlns:p="http://schemas.openxmlformats.org/presentationml/2006/main">
+  <p:cSld>
+    <p:spTree>
+      <p:nvGrpSpPr>
+        <p:cNvPr id="1" name=""/>
+        <p:cNvGrpSpPr/>
+        <p:nvPr/>
+      </p:nvGrpSpPr>
+      <p:grpSpPr>
+        <a:xfrm>
+          <a:off x="0" y="0"/>
+          <a:ext cx="0" cy="0"/>
+          <a:chOff x="0" y="0"/>
+          <a:chExt cx="0" cy="0"/>
+        </a:xfrm>
+      </p:grpSpPr>
+      <p:sp>
+        <p:nvSpPr>
+          <p:cNvPr id="2" name="Slide Image Placeholder 1"/>
+          <p:cNvSpPr>
+            <a:spLocks noGrp="1" noRot="1" noChangeAspect="1"/>
+          </p:cNvSpPr>
+          <p:nvPr>
+            <p:ph type="sldImg"/>
+          </p:nvPr>
+        </p:nvSpPr>
+        <p:spPr/>
+      </p:sp>
+      <p:sp>
+        <p:nvSpPr>
+          <p:cNvPr id="3" name="Notes Placeholder 2"/>
+          <p:cNvSpPr>
+            <a:spLocks noGrp="1"/>
+          </p:cNvSpPr>
+          <p:nvPr>
+            <p:ph type="body" idx="1"/>
+          </p:nvPr>
+        </p:nvSpPr>
+        <p:spPr/>
+        <p:txBody>
+          <a:bodyPr/>
+          <a:lstStyle/>
+          <a:p>
+            <a:pPr marL="0" marR="0" lvl="0" indent="0" algn="l" defTabSz="914400" rtl="0" eaLnBrk="1" fontAlgn="auto" latinLnBrk="0" hangingPunct="1">
+              <a:lnSpc>
+                <a:spcPct val="100000"/>
+              </a:lnSpc>
+              <a:spcBef>
+                <a:spcPts val="0"/>
+              </a:spcBef>
+              <a:spcAft>
+                <a:spcPts val="0"/>
+              </a:spcAft>
+              <a:buClrTx/>
+              <a:buSzTx/>
+              <a:buFontTx/>
+              <a:buNone/>
+              <a:tabLst/>
+              <a:defRPr/>
+            </a:pPr>
+            <a:r>
+              <a:rPr lang="en-US" dirty="0" err="1"/>
+              <a:t>RMarkdown</a:t>
+            </a:r>
+            <a:r>
+              <a:rPr lang="en-US" dirty="0"/>
+              <a:t> is an authoring format that allows you to combine text, code, and output in a single document.</a:t>
+            </a:r>
+          </a:p>
+          <a:p>
+            <a:endParaRPr lang="en-US" dirty="0"/>
+          </a:p>
+        </p:txBody>
+      </p:sp>
+      <p:sp>
+        <p:nvSpPr>
+          <p:cNvPr id="4" name="Slide Number Placeholder 3"/>
+          <p:cNvSpPr>
+            <a:spLocks noGrp="1"/>
+          </p:cNvSpPr>
+          <p:nvPr>
+            <p:ph type="sldNum" sz="quarter" idx="5"/>
+          </p:nvPr>
+        </p:nvSpPr>
+        <p:spPr/>
+        <p:txBody>
+          <a:bodyPr/>
+          <a:lstStyle/>
+          <a:p>
+            <a:fld id="{514EE156-FC0E-4EE8-ABC1-FBEF1CAA73E0}" type="slidenum">
+              <a:rPr lang="en-US" smtClean="0"/>
+              <a:t>13</a:t>
+            </a:fld>
+            <a:endParaRPr lang="en-US"/>
+          </a:p>
+        </p:txBody>
+      </p:sp>
+    </p:spTree>
+    <p:extLst>
+      <p:ext uri="{BB962C8B-B14F-4D97-AF65-F5344CB8AC3E}">
+        <p14:creationId xmlns:p14="http://schemas.microsoft.com/office/powerpoint/2010/main" val="2121021830"/>
+      </p:ext>
+    </p:extLst>
+  </p:cSld>
+  <p:clrMapOvr>
+    <a:masterClrMapping/>
+  </p:clrMapOvr>
+</p:notes>
+</file>
+
 <file path=ppt/slideLayouts/slideLayout1.xml><?xml version="1.0" encoding="utf-8"?>
 <p:sldLayout xmlns:a="http://schemas.openxmlformats.org/drawingml/2006/main" xmlns:r="http://schemas.openxmlformats.org/officeDocument/2006/relationships" xmlns:p="http://schemas.openxmlformats.org/presentationml/2006/main" type="title" preserve="1">
   <p:cSld name="Title Slide">
@@ -26820,6 +27124,708 @@
           <p:cNvPr id="8" name="Rectangle 7">
             <a:extLst>
               <a:ext uri="{FF2B5EF4-FFF2-40B4-BE49-F238E27FC236}">
+                <a16:creationId xmlns:a16="http://schemas.microsoft.com/office/drawing/2014/main" id="{100EDD19-6802-4EC3-95CE-CFFAB042CFD6}"/>
+              </a:ext>
+              <a:ext uri="{C183D7F6-B498-43B3-948B-1728B52AA6E4}">
+                <adec:decorative xmlns:adec="http://schemas.microsoft.com/office/drawing/2017/decorative" val="1"/>
+              </a:ext>
+            </a:extLst>
+          </p:cNvPr>
+          <p:cNvSpPr>
+            <a:spLocks noGrp="1" noRot="1" noChangeAspect="1" noMove="1" noResize="1" noEditPoints="1" noAdjustHandles="1" noChangeArrowheads="1" noChangeShapeType="1" noTextEdit="1"/>
+          </p:cNvSpPr>
+          <p:nvPr>
+            <p:extLst>
+              <p:ext uri="{386F3935-93C4-4BCD-93E2-E3B085C9AB24}">
+                <p16:designElem xmlns:p16="http://schemas.microsoft.com/office/powerpoint/2015/main" val="1"/>
+              </p:ext>
+            </p:extLst>
+          </p:nvPr>
+        </p:nvSpPr>
+        <p:spPr>
+          <a:xfrm>
+            <a:off x="0" y="0"/>
+            <a:ext cx="9141714" cy="5143500"/>
+          </a:xfrm>
+          <a:prstGeom prst="rect">
+            <a:avLst/>
+          </a:prstGeom>
+          <a:ln>
+            <a:noFill/>
+          </a:ln>
+        </p:spPr>
+        <p:style>
+          <a:lnRef idx="2">
+            <a:schemeClr val="accent1">
+              <a:shade val="50000"/>
+            </a:schemeClr>
+          </a:lnRef>
+          <a:fillRef idx="1">
+            <a:schemeClr val="accent1"/>
+          </a:fillRef>
+          <a:effectRef idx="0">
+            <a:schemeClr val="accent1"/>
+          </a:effectRef>
+          <a:fontRef idx="minor">
+            <a:schemeClr val="lt1"/>
+          </a:fontRef>
+        </p:style>
+        <p:txBody>
+          <a:bodyPr rtlCol="0" anchor="ctr"/>
+          <a:lstStyle/>
+          <a:p>
+            <a:pPr algn="ctr"/>
+            <a:endParaRPr lang="en-US"/>
+          </a:p>
+        </p:txBody>
+      </p:sp>
+      <p:sp>
+        <p:nvSpPr>
+          <p:cNvPr id="2" name="Title 1"/>
+          <p:cNvSpPr>
+            <a:spLocks noGrp="1"/>
+          </p:cNvSpPr>
+          <p:nvPr>
+            <p:ph type="title"/>
+          </p:nvPr>
+        </p:nvSpPr>
+        <p:spPr>
+          <a:xfrm>
+            <a:off x="628650" y="273843"/>
+            <a:ext cx="7886700" cy="994173"/>
+          </a:xfrm>
+        </p:spPr>
+        <p:txBody>
+          <a:bodyPr>
+            <a:normAutofit/>
+          </a:bodyPr>
+          <a:lstStyle/>
+          <a:p>
+            <a:pPr marL="0" lvl="0" indent="0">
+              <a:buNone/>
+            </a:pPr>
+            <a:r>
+              <a:rPr lang="en-US" sz="4100"/>
+              <a:t>Key Features of R:</a:t>
+            </a:r>
+          </a:p>
+        </p:txBody>
+      </p:sp>
+      <p:sp>
+        <p:nvSpPr>
+          <p:cNvPr id="10" name="sketch line">
+            <a:extLst>
+              <a:ext uri="{FF2B5EF4-FFF2-40B4-BE49-F238E27FC236}">
+                <a16:creationId xmlns:a16="http://schemas.microsoft.com/office/drawing/2014/main" id="{DB17E863-922E-4C26-BD64-E8FD41D28661}"/>
+              </a:ext>
+              <a:ext uri="{C183D7F6-B498-43B3-948B-1728B52AA6E4}">
+                <adec:decorative xmlns:adec="http://schemas.microsoft.com/office/drawing/2017/decorative" val="1"/>
+              </a:ext>
+            </a:extLst>
+          </p:cNvPr>
+          <p:cNvSpPr>
+            <a:spLocks noGrp="1" noRot="1" noChangeAspect="1" noMove="1" noResize="1" noEditPoints="1" noAdjustHandles="1" noChangeArrowheads="1" noChangeShapeType="1" noTextEdit="1"/>
+          </p:cNvSpPr>
+          <p:nvPr>
+            <p:extLst>
+              <p:ext uri="{386F3935-93C4-4BCD-93E2-E3B085C9AB24}">
+                <p16:designElem xmlns:p16="http://schemas.microsoft.com/office/powerpoint/2015/main" val="1"/>
+              </p:ext>
+            </p:extLst>
+          </p:nvPr>
+        </p:nvSpPr>
+        <p:spPr>
+          <a:xfrm>
+            <a:off x="501777" y="1258029"/>
+            <a:ext cx="8140446" cy="13716"/>
+          </a:xfrm>
+          <a:custGeom>
+            <a:avLst/>
+            <a:gdLst>
+              <a:gd name="csX0" fmla="*/ 0 w 8140446"/>
+              <a:gd name="csY0" fmla="*/ 0 h 13716"/>
+              <a:gd name="csX1" fmla="*/ 434157 w 8140446"/>
+              <a:gd name="csY1" fmla="*/ 0 h 13716"/>
+              <a:gd name="csX2" fmla="*/ 1193932 w 8140446"/>
+              <a:gd name="csY2" fmla="*/ 0 h 13716"/>
+              <a:gd name="csX3" fmla="*/ 1628089 w 8140446"/>
+              <a:gd name="csY3" fmla="*/ 0 h 13716"/>
+              <a:gd name="csX4" fmla="*/ 2225055 w 8140446"/>
+              <a:gd name="csY4" fmla="*/ 0 h 13716"/>
+              <a:gd name="csX5" fmla="*/ 3066235 w 8140446"/>
+              <a:gd name="csY5" fmla="*/ 0 h 13716"/>
+              <a:gd name="csX6" fmla="*/ 3744605 w 8140446"/>
+              <a:gd name="csY6" fmla="*/ 0 h 13716"/>
+              <a:gd name="csX7" fmla="*/ 4504380 w 8140446"/>
+              <a:gd name="csY7" fmla="*/ 0 h 13716"/>
+              <a:gd name="csX8" fmla="*/ 5101346 w 8140446"/>
+              <a:gd name="csY8" fmla="*/ 0 h 13716"/>
+              <a:gd name="csX9" fmla="*/ 5779717 w 8140446"/>
+              <a:gd name="csY9" fmla="*/ 0 h 13716"/>
+              <a:gd name="csX10" fmla="*/ 6620896 w 8140446"/>
+              <a:gd name="csY10" fmla="*/ 0 h 13716"/>
+              <a:gd name="csX11" fmla="*/ 7136458 w 8140446"/>
+              <a:gd name="csY11" fmla="*/ 0 h 13716"/>
+              <a:gd name="csX12" fmla="*/ 8140446 w 8140446"/>
+              <a:gd name="csY12" fmla="*/ 0 h 13716"/>
+              <a:gd name="csX13" fmla="*/ 8140446 w 8140446"/>
+              <a:gd name="csY13" fmla="*/ 13716 h 13716"/>
+              <a:gd name="csX14" fmla="*/ 7543480 w 8140446"/>
+              <a:gd name="csY14" fmla="*/ 13716 h 13716"/>
+              <a:gd name="csX15" fmla="*/ 7109323 w 8140446"/>
+              <a:gd name="csY15" fmla="*/ 13716 h 13716"/>
+              <a:gd name="csX16" fmla="*/ 6430952 w 8140446"/>
+              <a:gd name="csY16" fmla="*/ 13716 h 13716"/>
+              <a:gd name="csX17" fmla="*/ 5915391 w 8140446"/>
+              <a:gd name="csY17" fmla="*/ 13716 h 13716"/>
+              <a:gd name="csX18" fmla="*/ 5237020 w 8140446"/>
+              <a:gd name="csY18" fmla="*/ 13716 h 13716"/>
+              <a:gd name="csX19" fmla="*/ 4558650 w 8140446"/>
+              <a:gd name="csY19" fmla="*/ 13716 h 13716"/>
+              <a:gd name="csX20" fmla="*/ 3880279 w 8140446"/>
+              <a:gd name="csY20" fmla="*/ 13716 h 13716"/>
+              <a:gd name="csX21" fmla="*/ 3201909 w 8140446"/>
+              <a:gd name="csY21" fmla="*/ 13716 h 13716"/>
+              <a:gd name="csX22" fmla="*/ 2604943 w 8140446"/>
+              <a:gd name="csY22" fmla="*/ 13716 h 13716"/>
+              <a:gd name="csX23" fmla="*/ 1845168 w 8140446"/>
+              <a:gd name="csY23" fmla="*/ 13716 h 13716"/>
+              <a:gd name="csX24" fmla="*/ 1166797 w 8140446"/>
+              <a:gd name="csY24" fmla="*/ 13716 h 13716"/>
+              <a:gd name="csX25" fmla="*/ 0 w 8140446"/>
+              <a:gd name="csY25" fmla="*/ 13716 h 13716"/>
+              <a:gd name="csX26" fmla="*/ 0 w 8140446"/>
+              <a:gd name="csY26" fmla="*/ 0 h 13716"/>
+            </a:gdLst>
+            <a:ahLst/>
+            <a:cxnLst>
+              <a:cxn ang="0">
+                <a:pos x="csX0" y="csY0"/>
+              </a:cxn>
+              <a:cxn ang="0">
+                <a:pos x="csX1" y="csY1"/>
+              </a:cxn>
+              <a:cxn ang="0">
+                <a:pos x="csX2" y="csY2"/>
+              </a:cxn>
+              <a:cxn ang="0">
+                <a:pos x="csX3" y="csY3"/>
+              </a:cxn>
+              <a:cxn ang="0">
+                <a:pos x="csX4" y="csY4"/>
+              </a:cxn>
+              <a:cxn ang="0">
+                <a:pos x="csX5" y="csY5"/>
+              </a:cxn>
+              <a:cxn ang="0">
+                <a:pos x="csX6" y="csY6"/>
+              </a:cxn>
+              <a:cxn ang="0">
+                <a:pos x="csX7" y="csY7"/>
+              </a:cxn>
+              <a:cxn ang="0">
+                <a:pos x="csX8" y="csY8"/>
+              </a:cxn>
+              <a:cxn ang="0">
+                <a:pos x="csX9" y="csY9"/>
+              </a:cxn>
+              <a:cxn ang="0">
+                <a:pos x="csX10" y="csY10"/>
+              </a:cxn>
+              <a:cxn ang="0">
+                <a:pos x="csX11" y="csY11"/>
+              </a:cxn>
+              <a:cxn ang="0">
+                <a:pos x="csX12" y="csY12"/>
+              </a:cxn>
+              <a:cxn ang="0">
+                <a:pos x="csX13" y="csY13"/>
+              </a:cxn>
+              <a:cxn ang="0">
+                <a:pos x="csX14" y="csY14"/>
+              </a:cxn>
+              <a:cxn ang="0">
+                <a:pos x="csX15" y="csY15"/>
+              </a:cxn>
+              <a:cxn ang="0">
+                <a:pos x="csX16" y="csY16"/>
+              </a:cxn>
+              <a:cxn ang="0">
+                <a:pos x="csX17" y="csY17"/>
+              </a:cxn>
+              <a:cxn ang="0">
+                <a:pos x="csX18" y="csY18"/>
+              </a:cxn>
+              <a:cxn ang="0">
+                <a:pos x="csX19" y="csY19"/>
+              </a:cxn>
+              <a:cxn ang="0">
+                <a:pos x="csX20" y="csY20"/>
+              </a:cxn>
+              <a:cxn ang="0">
+                <a:pos x="csX21" y="csY21"/>
+              </a:cxn>
+              <a:cxn ang="0">
+                <a:pos x="csX22" y="csY22"/>
+              </a:cxn>
+              <a:cxn ang="0">
+                <a:pos x="csX23" y="csY23"/>
+              </a:cxn>
+              <a:cxn ang="0">
+                <a:pos x="csX24" y="csY24"/>
+              </a:cxn>
+              <a:cxn ang="0">
+                <a:pos x="csX25" y="csY25"/>
+              </a:cxn>
+              <a:cxn ang="0">
+                <a:pos x="csX26" y="csY26"/>
+              </a:cxn>
+            </a:cxnLst>
+            <a:rect l="l" t="t" r="r" b="b"/>
+            <a:pathLst>
+              <a:path w="8140446" h="13716" fill="none" extrusionOk="0">
+                <a:moveTo>
+                  <a:pt x="0" y="0"/>
+                </a:moveTo>
+                <a:cubicBezTo>
+                  <a:pt x="94920" y="9103"/>
+                  <a:pt x="287892" y="-4966"/>
+                  <a:pt x="434157" y="0"/>
+                </a:cubicBezTo>
+                <a:cubicBezTo>
+                  <a:pt x="580422" y="4966"/>
+                  <a:pt x="943595" y="-14182"/>
+                  <a:pt x="1193932" y="0"/>
+                </a:cubicBezTo>
+                <a:cubicBezTo>
+                  <a:pt x="1444270" y="14182"/>
+                  <a:pt x="1472129" y="5523"/>
+                  <a:pt x="1628089" y="0"/>
+                </a:cubicBezTo>
+                <a:cubicBezTo>
+                  <a:pt x="1784049" y="-5523"/>
+                  <a:pt x="1962419" y="-17322"/>
+                  <a:pt x="2225055" y="0"/>
+                </a:cubicBezTo>
+                <a:cubicBezTo>
+                  <a:pt x="2487691" y="17322"/>
+                  <a:pt x="2700681" y="1311"/>
+                  <a:pt x="3066235" y="0"/>
+                </a:cubicBezTo>
+                <a:cubicBezTo>
+                  <a:pt x="3431789" y="-1311"/>
+                  <a:pt x="3405662" y="25081"/>
+                  <a:pt x="3744605" y="0"/>
+                </a:cubicBezTo>
+                <a:cubicBezTo>
+                  <a:pt x="4083548" y="-25081"/>
+                  <a:pt x="4265111" y="-11945"/>
+                  <a:pt x="4504380" y="0"/>
+                </a:cubicBezTo>
+                <a:cubicBezTo>
+                  <a:pt x="4743649" y="11945"/>
+                  <a:pt x="4860394" y="-2832"/>
+                  <a:pt x="5101346" y="0"/>
+                </a:cubicBezTo>
+                <a:cubicBezTo>
+                  <a:pt x="5342298" y="2832"/>
+                  <a:pt x="5456387" y="23676"/>
+                  <a:pt x="5779717" y="0"/>
+                </a:cubicBezTo>
+                <a:cubicBezTo>
+                  <a:pt x="6103047" y="-23676"/>
+                  <a:pt x="6270379" y="-37291"/>
+                  <a:pt x="6620896" y="0"/>
+                </a:cubicBezTo>
+                <a:cubicBezTo>
+                  <a:pt x="6971413" y="37291"/>
+                  <a:pt x="6989068" y="24674"/>
+                  <a:pt x="7136458" y="0"/>
+                </a:cubicBezTo>
+                <a:cubicBezTo>
+                  <a:pt x="7283848" y="-24674"/>
+                  <a:pt x="7752532" y="-22436"/>
+                  <a:pt x="8140446" y="0"/>
+                </a:cubicBezTo>
+                <a:cubicBezTo>
+                  <a:pt x="8140543" y="2784"/>
+                  <a:pt x="8140462" y="9558"/>
+                  <a:pt x="8140446" y="13716"/>
+                </a:cubicBezTo>
+                <a:cubicBezTo>
+                  <a:pt x="7906329" y="-7615"/>
+                  <a:pt x="7681180" y="22893"/>
+                  <a:pt x="7543480" y="13716"/>
+                </a:cubicBezTo>
+                <a:cubicBezTo>
+                  <a:pt x="7405780" y="4539"/>
+                  <a:pt x="7216607" y="-912"/>
+                  <a:pt x="7109323" y="13716"/>
+                </a:cubicBezTo>
+                <a:cubicBezTo>
+                  <a:pt x="7002039" y="28344"/>
+                  <a:pt x="6576231" y="38120"/>
+                  <a:pt x="6430952" y="13716"/>
+                </a:cubicBezTo>
+                <a:cubicBezTo>
+                  <a:pt x="6285673" y="-10688"/>
+                  <a:pt x="6138840" y="29949"/>
+                  <a:pt x="5915391" y="13716"/>
+                </a:cubicBezTo>
+                <a:cubicBezTo>
+                  <a:pt x="5691942" y="-2517"/>
+                  <a:pt x="5459460" y="47094"/>
+                  <a:pt x="5237020" y="13716"/>
+                </a:cubicBezTo>
+                <a:cubicBezTo>
+                  <a:pt x="5014580" y="-19662"/>
+                  <a:pt x="4747677" y="35877"/>
+                  <a:pt x="4558650" y="13716"/>
+                </a:cubicBezTo>
+                <a:cubicBezTo>
+                  <a:pt x="4369623" y="-8445"/>
+                  <a:pt x="4146061" y="7996"/>
+                  <a:pt x="3880279" y="13716"/>
+                </a:cubicBezTo>
+                <a:cubicBezTo>
+                  <a:pt x="3614497" y="19436"/>
+                  <a:pt x="3473808" y="-17480"/>
+                  <a:pt x="3201909" y="13716"/>
+                </a:cubicBezTo>
+                <a:cubicBezTo>
+                  <a:pt x="2930010" y="44912"/>
+                  <a:pt x="2728175" y="-8002"/>
+                  <a:pt x="2604943" y="13716"/>
+                </a:cubicBezTo>
+                <a:cubicBezTo>
+                  <a:pt x="2481711" y="35434"/>
+                  <a:pt x="2004334" y="22380"/>
+                  <a:pt x="1845168" y="13716"/>
+                </a:cubicBezTo>
+                <a:cubicBezTo>
+                  <a:pt x="1686003" y="5052"/>
+                  <a:pt x="1375070" y="33008"/>
+                  <a:pt x="1166797" y="13716"/>
+                </a:cubicBezTo>
+                <a:cubicBezTo>
+                  <a:pt x="958524" y="-5576"/>
+                  <a:pt x="342846" y="4308"/>
+                  <a:pt x="0" y="13716"/>
+                </a:cubicBezTo>
+                <a:cubicBezTo>
+                  <a:pt x="-100" y="9589"/>
+                  <a:pt x="468" y="2983"/>
+                  <a:pt x="0" y="0"/>
+                </a:cubicBezTo>
+                <a:close/>
+              </a:path>
+              <a:path w="8140446" h="13716" stroke="0" extrusionOk="0">
+                <a:moveTo>
+                  <a:pt x="0" y="0"/>
+                </a:moveTo>
+                <a:cubicBezTo>
+                  <a:pt x="142435" y="-24533"/>
+                  <a:pt x="380026" y="17447"/>
+                  <a:pt x="596966" y="0"/>
+                </a:cubicBezTo>
+                <a:cubicBezTo>
+                  <a:pt x="813906" y="-17447"/>
+                  <a:pt x="830530" y="13462"/>
+                  <a:pt x="1031123" y="0"/>
+                </a:cubicBezTo>
+                <a:cubicBezTo>
+                  <a:pt x="1231716" y="-13462"/>
+                  <a:pt x="1634038" y="0"/>
+                  <a:pt x="1872303" y="0"/>
+                </a:cubicBezTo>
+                <a:cubicBezTo>
+                  <a:pt x="2110568" y="0"/>
+                  <a:pt x="2261934" y="-25727"/>
+                  <a:pt x="2469269" y="0"/>
+                </a:cubicBezTo>
+                <a:cubicBezTo>
+                  <a:pt x="2676604" y="25727"/>
+                  <a:pt x="2790440" y="16284"/>
+                  <a:pt x="3066235" y="0"/>
+                </a:cubicBezTo>
+                <a:cubicBezTo>
+                  <a:pt x="3342030" y="-16284"/>
+                  <a:pt x="3685603" y="41976"/>
+                  <a:pt x="3907414" y="0"/>
+                </a:cubicBezTo>
+                <a:cubicBezTo>
+                  <a:pt x="4129225" y="-41976"/>
+                  <a:pt x="4177416" y="-7598"/>
+                  <a:pt x="4422976" y="0"/>
+                </a:cubicBezTo>
+                <a:cubicBezTo>
+                  <a:pt x="4668536" y="7598"/>
+                  <a:pt x="5023499" y="-28058"/>
+                  <a:pt x="5264155" y="0"/>
+                </a:cubicBezTo>
+                <a:cubicBezTo>
+                  <a:pt x="5504811" y="28058"/>
+                  <a:pt x="5703675" y="13288"/>
+                  <a:pt x="6105335" y="0"/>
+                </a:cubicBezTo>
+                <a:cubicBezTo>
+                  <a:pt x="6506995" y="-13288"/>
+                  <a:pt x="6455516" y="-5124"/>
+                  <a:pt x="6783705" y="0"/>
+                </a:cubicBezTo>
+                <a:cubicBezTo>
+                  <a:pt x="7111894" y="5124"/>
+                  <a:pt x="7512856" y="10604"/>
+                  <a:pt x="8140446" y="0"/>
+                </a:cubicBezTo>
+                <a:cubicBezTo>
+                  <a:pt x="8139772" y="5682"/>
+                  <a:pt x="8139843" y="9439"/>
+                  <a:pt x="8140446" y="13716"/>
+                </a:cubicBezTo>
+                <a:cubicBezTo>
+                  <a:pt x="7959314" y="-1227"/>
+                  <a:pt x="7870113" y="5865"/>
+                  <a:pt x="7706289" y="13716"/>
+                </a:cubicBezTo>
+                <a:cubicBezTo>
+                  <a:pt x="7542465" y="21567"/>
+                  <a:pt x="7157940" y="12910"/>
+                  <a:pt x="6865109" y="13716"/>
+                </a:cubicBezTo>
+                <a:cubicBezTo>
+                  <a:pt x="6572278" y="14522"/>
+                  <a:pt x="6524256" y="33479"/>
+                  <a:pt x="6349548" y="13716"/>
+                </a:cubicBezTo>
+                <a:cubicBezTo>
+                  <a:pt x="6174840" y="-6047"/>
+                  <a:pt x="5951624" y="-4398"/>
+                  <a:pt x="5671177" y="13716"/>
+                </a:cubicBezTo>
+                <a:cubicBezTo>
+                  <a:pt x="5390730" y="31830"/>
+                  <a:pt x="5222992" y="55486"/>
+                  <a:pt x="4829998" y="13716"/>
+                </a:cubicBezTo>
+                <a:cubicBezTo>
+                  <a:pt x="4437004" y="-28054"/>
+                  <a:pt x="4344181" y="34515"/>
+                  <a:pt x="4151627" y="13716"/>
+                </a:cubicBezTo>
+                <a:cubicBezTo>
+                  <a:pt x="3959073" y="-7083"/>
+                  <a:pt x="3886970" y="28303"/>
+                  <a:pt x="3717470" y="13716"/>
+                </a:cubicBezTo>
+                <a:cubicBezTo>
+                  <a:pt x="3547970" y="-871"/>
+                  <a:pt x="3451521" y="27300"/>
+                  <a:pt x="3201909" y="13716"/>
+                </a:cubicBezTo>
+                <a:cubicBezTo>
+                  <a:pt x="2952297" y="132"/>
+                  <a:pt x="2543413" y="1457"/>
+                  <a:pt x="2360729" y="13716"/>
+                </a:cubicBezTo>
+                <a:cubicBezTo>
+                  <a:pt x="2178045" y="25975"/>
+                  <a:pt x="1906056" y="21275"/>
+                  <a:pt x="1682359" y="13716"/>
+                </a:cubicBezTo>
+                <a:cubicBezTo>
+                  <a:pt x="1458662" y="6158"/>
+                  <a:pt x="1330405" y="3474"/>
+                  <a:pt x="1166797" y="13716"/>
+                </a:cubicBezTo>
+                <a:cubicBezTo>
+                  <a:pt x="1003189" y="23958"/>
+                  <a:pt x="278098" y="14961"/>
+                  <a:pt x="0" y="13716"/>
+                </a:cubicBezTo>
+                <a:cubicBezTo>
+                  <a:pt x="303" y="7982"/>
+                  <a:pt x="182" y="5202"/>
+                  <a:pt x="0" y="0"/>
+                </a:cubicBezTo>
+                <a:close/>
+              </a:path>
+            </a:pathLst>
+          </a:custGeom>
+          <a:solidFill>
+            <a:schemeClr val="accent2"/>
+          </a:solidFill>
+          <a:ln w="41275" cap="rnd">
+            <a:solidFill>
+              <a:schemeClr val="accent2"/>
+            </a:solidFill>
+            <a:round/>
+            <a:extLst>
+              <a:ext uri="{C807C97D-BFC1-408E-A445-0C87EB9F89A2}">
+                <ask:lineSketchStyleProps xmlns:ask="http://schemas.microsoft.com/office/drawing/2018/sketchyshapes" sd="1219033472">
+                  <a:prstGeom prst="rect">
+                    <a:avLst/>
+                  </a:prstGeom>
+                  <ask:type>
+                    <ask:lineSketchFreehand/>
+                  </ask:type>
+                </ask:lineSketchStyleProps>
+              </a:ext>
+            </a:extLst>
+          </a:ln>
+        </p:spPr>
+        <p:style>
+          <a:lnRef idx="2">
+            <a:schemeClr val="accent1">
+              <a:shade val="50000"/>
+            </a:schemeClr>
+          </a:lnRef>
+          <a:fillRef idx="1">
+            <a:schemeClr val="accent1"/>
+          </a:fillRef>
+          <a:effectRef idx="0">
+            <a:schemeClr val="accent1"/>
+          </a:effectRef>
+          <a:fontRef idx="minor">
+            <a:schemeClr val="lt1"/>
+          </a:fontRef>
+        </p:style>
+        <p:txBody>
+          <a:bodyPr rtlCol="0" anchor="ctr"/>
+          <a:lstStyle/>
+          <a:p>
+            <a:pPr algn="ctr"/>
+            <a:endParaRPr lang="en-US"/>
+          </a:p>
+        </p:txBody>
+      </p:sp>
+      <p:sp>
+        <p:nvSpPr>
+          <p:cNvPr id="3" name="Content Placeholder 2"/>
+          <p:cNvSpPr>
+            <a:spLocks noGrp="1"/>
+          </p:cNvSpPr>
+          <p:nvPr>
+            <p:ph idx="1"/>
+          </p:nvPr>
+        </p:nvSpPr>
+        <p:spPr>
+          <a:xfrm>
+            <a:off x="628650" y="1447038"/>
+            <a:ext cx="7886700" cy="3188970"/>
+          </a:xfrm>
+        </p:spPr>
+        <p:txBody>
+          <a:bodyPr>
+            <a:normAutofit/>
+          </a:bodyPr>
+          <a:lstStyle/>
+          <a:p>
+            <a:pPr lvl="0"/>
+            <a:r>
+              <a:rPr lang="en-US" sz="1700" b="1"/>
+              <a:t>Built-in Statistics Functions</a:t>
+            </a:r>
+          </a:p>
+          <a:p>
+            <a:pPr lvl="1"/>
+            <a:r>
+              <a:rPr lang="en-US" sz="1700"/>
+              <a:t>Provides a variety of statistical tests, such as t-tests, ANOVA, etc.</a:t>
+            </a:r>
+          </a:p>
+          <a:p>
+            <a:pPr lvl="0"/>
+            <a:r>
+              <a:rPr lang="en-US" sz="1700" b="1"/>
+              <a:t>Visualization Capabilities</a:t>
+            </a:r>
+          </a:p>
+          <a:p>
+            <a:pPr lvl="1"/>
+            <a:r>
+              <a:rPr lang="en-US" sz="1700"/>
+              <a:t>Tools like </a:t>
+            </a:r>
+            <a:r>
+              <a:rPr lang="en-US" sz="1700">
+                <a:latin typeface="Courier"/>
+              </a:rPr>
+              <a:t>ggplot2</a:t>
+            </a:r>
+            <a:r>
+              <a:rPr lang="en-US" sz="1700"/>
+              <a:t> facilitate high-quality visualizations.</a:t>
+            </a:r>
+          </a:p>
+          <a:p>
+            <a:pPr lvl="0"/>
+            <a:r>
+              <a:rPr lang="en-US" sz="1700" b="1"/>
+              <a:t>Expanded Capabilities through Added Libraries</a:t>
+            </a:r>
+          </a:p>
+          <a:p>
+            <a:pPr lvl="1"/>
+            <a:r>
+              <a:rPr lang="en-US" sz="1700"/>
+              <a:t>Thousands of packages are available on CRAN.</a:t>
+            </a:r>
+          </a:p>
+          <a:p>
+            <a:pPr lvl="0"/>
+            <a:r>
+              <a:rPr lang="en-US" sz="1700" b="1"/>
+              <a:t>Integration with Other Tools, such as SQL</a:t>
+            </a:r>
+          </a:p>
+          <a:p>
+            <a:pPr lvl="1"/>
+            <a:r>
+              <a:rPr lang="en-US" sz="1700"/>
+              <a:t>Connects with databases for efficient data manipulation.</a:t>
+            </a:r>
+          </a:p>
+        </p:txBody>
+      </p:sp>
+    </p:spTree>
+  </p:cSld>
+  <p:clrMapOvr>
+    <a:masterClrMapping/>
+  </p:clrMapOvr>
+</p:sld>
+</file>
+
+<file path=ppt/slides/slide11.xml><?xml version="1.0" encoding="utf-8"?>
+<p:sld xmlns:a="http://schemas.openxmlformats.org/drawingml/2006/main" xmlns:r="http://schemas.openxmlformats.org/officeDocument/2006/relationships" xmlns:p="http://schemas.openxmlformats.org/presentationml/2006/main">
+  <p:cSld>
+    <p:bg>
+      <p:bgPr>
+        <a:solidFill>
+          <a:schemeClr val="bg1"/>
+        </a:solidFill>
+        <a:effectLst/>
+      </p:bgPr>
+    </p:bg>
+    <p:spTree>
+      <p:nvGrpSpPr>
+        <p:cNvPr id="1" name=""/>
+        <p:cNvGrpSpPr/>
+        <p:nvPr/>
+      </p:nvGrpSpPr>
+      <p:grpSpPr>
+        <a:xfrm>
+          <a:off x="0" y="0"/>
+          <a:ext cx="0" cy="0"/>
+          <a:chOff x="0" y="0"/>
+          <a:chExt cx="0" cy="0"/>
+        </a:xfrm>
+      </p:grpSpPr>
+      <p:sp useBgFill="1">
+        <p:nvSpPr>
+          <p:cNvPr id="8" name="Rectangle 7">
+            <a:extLst>
+              <a:ext uri="{FF2B5EF4-FFF2-40B4-BE49-F238E27FC236}">
                 <a16:creationId xmlns:a16="http://schemas.microsoft.com/office/drawing/2014/main" id="{777A147A-9ED8-46B4-8660-1B3C2AA880B5}"/>
               </a:ext>
               <a:ext uri="{C183D7F6-B498-43B3-948B-1728B52AA6E4}">
@@ -27289,7 +28295,7 @@
 </p:sld>
 </file>
 
-<file path=ppt/slides/slide11.xml><?xml version="1.0" encoding="utf-8"?>
+<file path=ppt/slides/slide12.xml><?xml version="1.0" encoding="utf-8"?>
 <p:sld xmlns:a="http://schemas.openxmlformats.org/drawingml/2006/main" xmlns:r="http://schemas.openxmlformats.org/officeDocument/2006/relationships" xmlns:p="http://schemas.openxmlformats.org/presentationml/2006/main">
   <p:cSld>
     <p:bg>
@@ -27768,359 +28774,6 @@
 </p:sld>
 </file>
 
-<file path=ppt/slides/slide12.xml><?xml version="1.0" encoding="utf-8"?>
-<p:sld xmlns:a="http://schemas.openxmlformats.org/drawingml/2006/main" xmlns:r="http://schemas.openxmlformats.org/officeDocument/2006/relationships" xmlns:p="http://schemas.openxmlformats.org/presentationml/2006/main">
-  <p:cSld>
-    <p:bg>
-      <p:bgPr>
-        <a:solidFill>
-          <a:schemeClr val="bg1"/>
-        </a:solidFill>
-        <a:effectLst/>
-      </p:bgPr>
-    </p:bg>
-    <p:spTree>
-      <p:nvGrpSpPr>
-        <p:cNvPr id="1" name=""/>
-        <p:cNvGrpSpPr/>
-        <p:nvPr/>
-      </p:nvGrpSpPr>
-      <p:grpSpPr>
-        <a:xfrm>
-          <a:off x="0" y="0"/>
-          <a:ext cx="0" cy="0"/>
-          <a:chOff x="0" y="0"/>
-          <a:chExt cx="0" cy="0"/>
-        </a:xfrm>
-      </p:grpSpPr>
-      <p:sp useBgFill="1">
-        <p:nvSpPr>
-          <p:cNvPr id="8" name="Rectangle 7">
-            <a:extLst>
-              <a:ext uri="{FF2B5EF4-FFF2-40B4-BE49-F238E27FC236}">
-                <a16:creationId xmlns:a16="http://schemas.microsoft.com/office/drawing/2014/main" id="{907EF6B7-1338-4443-8C46-6A318D952DFD}"/>
-              </a:ext>
-              <a:ext uri="{C183D7F6-B498-43B3-948B-1728B52AA6E4}">
-                <adec:decorative xmlns:adec="http://schemas.microsoft.com/office/drawing/2017/decorative" val="1"/>
-              </a:ext>
-            </a:extLst>
-          </p:cNvPr>
-          <p:cNvSpPr>
-            <a:spLocks noGrp="1" noRot="1" noChangeAspect="1" noMove="1" noResize="1" noEditPoints="1" noAdjustHandles="1" noChangeArrowheads="1" noChangeShapeType="1" noTextEdit="1"/>
-          </p:cNvSpPr>
-          <p:nvPr>
-            <p:extLst>
-              <p:ext uri="{386F3935-93C4-4BCD-93E2-E3B085C9AB24}">
-                <p16:designElem xmlns:p16="http://schemas.microsoft.com/office/powerpoint/2015/main" val="1"/>
-              </p:ext>
-            </p:extLst>
-          </p:nvPr>
-        </p:nvSpPr>
-        <p:spPr>
-          <a:xfrm>
-            <a:off x="2286" y="0"/>
-            <a:ext cx="9141714" cy="5143500"/>
-          </a:xfrm>
-          <a:prstGeom prst="rect">
-            <a:avLst/>
-          </a:prstGeom>
-          <a:ln>
-            <a:noFill/>
-          </a:ln>
-        </p:spPr>
-        <p:style>
-          <a:lnRef idx="2">
-            <a:schemeClr val="accent1">
-              <a:shade val="50000"/>
-            </a:schemeClr>
-          </a:lnRef>
-          <a:fillRef idx="1">
-            <a:schemeClr val="accent1"/>
-          </a:fillRef>
-          <a:effectRef idx="0">
-            <a:schemeClr val="accent1"/>
-          </a:effectRef>
-          <a:fontRef idx="minor">
-            <a:schemeClr val="lt1"/>
-          </a:fontRef>
-        </p:style>
-        <p:txBody>
-          <a:bodyPr rtlCol="0" anchor="ctr"/>
-          <a:lstStyle/>
-          <a:p>
-            <a:pPr algn="ctr"/>
-            <a:endParaRPr lang="en-US"/>
-          </a:p>
-        </p:txBody>
-      </p:sp>
-      <p:sp>
-        <p:nvSpPr>
-          <p:cNvPr id="10" name="Freeform: Shape 9">
-            <a:extLst>
-              <a:ext uri="{FF2B5EF4-FFF2-40B4-BE49-F238E27FC236}">
-                <a16:creationId xmlns:a16="http://schemas.microsoft.com/office/drawing/2014/main" id="{DAAE4CDD-124C-4DCF-9584-B6033B545DD5}"/>
-              </a:ext>
-              <a:ext uri="{C183D7F6-B498-43B3-948B-1728B52AA6E4}">
-                <adec:decorative xmlns:adec="http://schemas.microsoft.com/office/drawing/2017/decorative" val="1"/>
-              </a:ext>
-            </a:extLst>
-          </p:cNvPr>
-          <p:cNvSpPr>
-            <a:spLocks noGrp="1" noRot="1" noChangeAspect="1" noMove="1" noResize="1" noEditPoints="1" noAdjustHandles="1" noChangeArrowheads="1" noChangeShapeType="1" noTextEdit="1"/>
-          </p:cNvSpPr>
-          <p:nvPr>
-            <p:extLst>
-              <p:ext uri="{386F3935-93C4-4BCD-93E2-E3B085C9AB24}">
-                <p16:designElem xmlns:p16="http://schemas.microsoft.com/office/powerpoint/2015/main" val="1"/>
-              </p:ext>
-            </p:extLst>
-          </p:nvPr>
-        </p:nvSpPr>
-        <p:spPr>
-          <a:xfrm>
-            <a:off x="0" y="0"/>
-            <a:ext cx="3125454" cy="5143500"/>
-          </a:xfrm>
-          <a:custGeom>
-            <a:avLst/>
-            <a:gdLst>
-              <a:gd name="connsiteX0" fmla="*/ 0 w 4167271"/>
-              <a:gd name="connsiteY0" fmla="*/ 0 h 6858000"/>
-              <a:gd name="connsiteX1" fmla="*/ 2259550 w 4167271"/>
-              <a:gd name="connsiteY1" fmla="*/ 0 h 6858000"/>
-              <a:gd name="connsiteX2" fmla="*/ 2387803 w 4167271"/>
-              <a:gd name="connsiteY2" fmla="*/ 82222 h 6858000"/>
-              <a:gd name="connsiteX3" fmla="*/ 4167271 w 4167271"/>
-              <a:gd name="connsiteY3" fmla="*/ 3429000 h 6858000"/>
-              <a:gd name="connsiteX4" fmla="*/ 2387803 w 4167271"/>
-              <a:gd name="connsiteY4" fmla="*/ 6775779 h 6858000"/>
-              <a:gd name="connsiteX5" fmla="*/ 2259550 w 4167271"/>
-              <a:gd name="connsiteY5" fmla="*/ 6858000 h 6858000"/>
-              <a:gd name="connsiteX6" fmla="*/ 0 w 4167271"/>
-              <a:gd name="connsiteY6" fmla="*/ 6858000 h 6858000"/>
-            </a:gdLst>
-            <a:ahLst/>
-            <a:cxnLst>
-              <a:cxn ang="0">
-                <a:pos x="connsiteX0" y="connsiteY0"/>
-              </a:cxn>
-              <a:cxn ang="0">
-                <a:pos x="connsiteX1" y="connsiteY1"/>
-              </a:cxn>
-              <a:cxn ang="0">
-                <a:pos x="connsiteX2" y="connsiteY2"/>
-              </a:cxn>
-              <a:cxn ang="0">
-                <a:pos x="connsiteX3" y="connsiteY3"/>
-              </a:cxn>
-              <a:cxn ang="0">
-                <a:pos x="connsiteX4" y="connsiteY4"/>
-              </a:cxn>
-              <a:cxn ang="0">
-                <a:pos x="connsiteX5" y="connsiteY5"/>
-              </a:cxn>
-              <a:cxn ang="0">
-                <a:pos x="connsiteX6" y="connsiteY6"/>
-              </a:cxn>
-            </a:cxnLst>
-            <a:rect l="l" t="t" r="r" b="b"/>
-            <a:pathLst>
-              <a:path w="4167271" h="6858000">
-                <a:moveTo>
-                  <a:pt x="0" y="0"/>
-                </a:moveTo>
-                <a:lnTo>
-                  <a:pt x="2259550" y="0"/>
-                </a:lnTo>
-                <a:lnTo>
-                  <a:pt x="2387803" y="82222"/>
-                </a:lnTo>
-                <a:cubicBezTo>
-                  <a:pt x="3461407" y="807534"/>
-                  <a:pt x="4167271" y="2035835"/>
-                  <a:pt x="4167271" y="3429000"/>
-                </a:cubicBezTo>
-                <a:cubicBezTo>
-                  <a:pt x="4167271" y="4822165"/>
-                  <a:pt x="3461407" y="6050467"/>
-                  <a:pt x="2387803" y="6775779"/>
-                </a:cubicBezTo>
-                <a:lnTo>
-                  <a:pt x="2259550" y="6858000"/>
-                </a:lnTo>
-                <a:lnTo>
-                  <a:pt x="0" y="6858000"/>
-                </a:lnTo>
-                <a:close/>
-              </a:path>
-            </a:pathLst>
-          </a:custGeom>
-          <a:solidFill>
-            <a:schemeClr val="accent2"/>
-          </a:solidFill>
-          <a:ln>
-            <a:noFill/>
-          </a:ln>
-        </p:spPr>
-        <p:style>
-          <a:lnRef idx="2">
-            <a:schemeClr val="accent1">
-              <a:shade val="50000"/>
-            </a:schemeClr>
-          </a:lnRef>
-          <a:fillRef idx="1">
-            <a:schemeClr val="accent1"/>
-          </a:fillRef>
-          <a:effectRef idx="0">
-            <a:schemeClr val="accent1"/>
-          </a:effectRef>
-          <a:fontRef idx="minor">
-            <a:schemeClr val="lt1"/>
-          </a:fontRef>
-        </p:style>
-        <p:txBody>
-          <a:bodyPr rtlCol="0" anchor="ctr"/>
-          <a:lstStyle/>
-          <a:p>
-            <a:pPr algn="ctr"/>
-            <a:endParaRPr lang="en-US"/>
-          </a:p>
-        </p:txBody>
-      </p:sp>
-      <p:sp>
-        <p:nvSpPr>
-          <p:cNvPr id="2" name="Title 1"/>
-          <p:cNvSpPr>
-            <a:spLocks noGrp="1"/>
-          </p:cNvSpPr>
-          <p:nvPr>
-            <p:ph type="title"/>
-          </p:nvPr>
-        </p:nvSpPr>
-        <p:spPr>
-          <a:xfrm>
-            <a:off x="515125" y="865179"/>
-            <a:ext cx="2400300" cy="3345872"/>
-          </a:xfrm>
-        </p:spPr>
-        <p:txBody>
-          <a:bodyPr>
-            <a:normAutofit/>
-          </a:bodyPr>
-          <a:lstStyle/>
-          <a:p>
-            <a:pPr marL="0" lvl="0" indent="0">
-              <a:buNone/>
-            </a:pPr>
-            <a:r>
-              <a:rPr lang="en-US" sz="3100">
-                <a:solidFill>
-                  <a:srgbClr val="FFFFFF"/>
-                </a:solidFill>
-              </a:rPr>
-              <a:t>What is RMarkdown?</a:t>
-            </a:r>
-          </a:p>
-        </p:txBody>
-      </p:sp>
-      <p:sp>
-        <p:nvSpPr>
-          <p:cNvPr id="12" name="Arc 11">
-            <a:extLst>
-              <a:ext uri="{FF2B5EF4-FFF2-40B4-BE49-F238E27FC236}">
-                <a16:creationId xmlns:a16="http://schemas.microsoft.com/office/drawing/2014/main" id="{081E4A58-353D-44AE-B2FC-2A74E2E400F7}"/>
-              </a:ext>
-              <a:ext uri="{C183D7F6-B498-43B3-948B-1728B52AA6E4}">
-                <adec:decorative xmlns:adec="http://schemas.microsoft.com/office/drawing/2017/decorative" val="1"/>
-              </a:ext>
-            </a:extLst>
-          </p:cNvPr>
-          <p:cNvSpPr>
-            <a:spLocks noGrp="1" noRot="1" noChangeAspect="1" noMove="1" noResize="1" noEditPoints="1" noAdjustHandles="1" noChangeArrowheads="1" noChangeShapeType="1" noTextEdit="1"/>
-          </p:cNvSpPr>
-          <p:nvPr>
-            <p:extLst>
-              <p:ext uri="{386F3935-93C4-4BCD-93E2-E3B085C9AB24}">
-                <p16:designElem xmlns:p16="http://schemas.microsoft.com/office/powerpoint/2015/main" val="1"/>
-              </p:ext>
-            </p:extLst>
-          </p:nvPr>
-        </p:nvSpPr>
-        <p:spPr>
-          <a:xfrm flipV="1">
-            <a:off x="5662801" y="1841609"/>
-            <a:ext cx="3062575" cy="3062575"/>
-          </a:xfrm>
-          <a:prstGeom prst="arc">
-            <a:avLst/>
-          </a:prstGeom>
-          <a:ln w="127000" cap="rnd">
-            <a:solidFill>
-              <a:schemeClr val="accent4"/>
-            </a:solidFill>
-            <a:prstDash val="dash"/>
-          </a:ln>
-        </p:spPr>
-        <p:style>
-          <a:lnRef idx="1">
-            <a:schemeClr val="accent1"/>
-          </a:lnRef>
-          <a:fillRef idx="0">
-            <a:schemeClr val="accent1"/>
-          </a:fillRef>
-          <a:effectRef idx="0">
-            <a:schemeClr val="accent1"/>
-          </a:effectRef>
-          <a:fontRef idx="minor">
-            <a:schemeClr val="tx1"/>
-          </a:fontRef>
-        </p:style>
-        <p:txBody>
-          <a:bodyPr rtlCol="0" anchor="ctr"/>
-          <a:lstStyle/>
-          <a:p>
-            <a:pPr algn="ctr"/>
-            <a:endParaRPr lang="en-US" dirty="0"/>
-          </a:p>
-        </p:txBody>
-      </p:sp>
-      <p:sp>
-        <p:nvSpPr>
-          <p:cNvPr id="3" name="Content Placeholder 2"/>
-          <p:cNvSpPr>
-            <a:spLocks noGrp="1"/>
-          </p:cNvSpPr>
-          <p:nvPr>
-            <p:ph idx="1"/>
-          </p:nvPr>
-        </p:nvSpPr>
-        <p:spPr>
-          <a:xfrm>
-            <a:off x="3335481" y="443508"/>
-            <a:ext cx="5179868" cy="4189214"/>
-          </a:xfrm>
-        </p:spPr>
-        <p:txBody>
-          <a:bodyPr anchor="ctr">
-            <a:normAutofit/>
-          </a:bodyPr>
-          <a:lstStyle/>
-          <a:p>
-            <a:pPr lvl="0"/>
-            <a:r>
-              <a:t>RMarkdown is an authoring format that allows you to combine text, code, and output in a single document.</a:t>
-            </a:r>
-          </a:p>
-        </p:txBody>
-      </p:sp>
-    </p:spTree>
-  </p:cSld>
-  <p:clrMapOvr>
-    <a:masterClrMapping/>
-  </p:clrMapOvr>
-</p:sld>
-</file>
-
 <file path=ppt/slides/slide13.xml><?xml version="1.0" encoding="utf-8"?>
 <p:sld xmlns:a="http://schemas.openxmlformats.org/drawingml/2006/main" xmlns:r="http://schemas.openxmlformats.org/officeDocument/2006/relationships" xmlns:p="http://schemas.openxmlformats.org/presentationml/2006/main">
   <p:cSld>
@@ -28235,13 +28888,26 @@
               <a:buNone/>
             </a:pPr>
             <a:r>
-              <a:rPr lang="en-US">
+              <a:rPr lang="en-US" dirty="0">
                 <a:solidFill>
                   <a:srgbClr val="FFFFFF"/>
                 </a:solidFill>
               </a:rPr>
-              <a:t>Key Features of RMarkdown</a:t>
+              <a:t>Key Features of </a:t>
             </a:r>
+            <a:r>
+              <a:rPr lang="en-US" dirty="0" err="1">
+                <a:solidFill>
+                  <a:srgbClr val="FFFFFF"/>
+                </a:solidFill>
+              </a:rPr>
+              <a:t>RMarkdown</a:t>
+            </a:r>
+            <a:endParaRPr lang="en-US" dirty="0">
+              <a:solidFill>
+                <a:srgbClr val="FFFFFF"/>
+              </a:solidFill>
+            </a:endParaRPr>
           </a:p>
         </p:txBody>
       </p:sp>
@@ -28339,7 +29005,7 @@
         </p:xfrm>
         <a:graphic>
           <a:graphicData uri="http://schemas.openxmlformats.org/drawingml/2006/diagram">
-            <dgm:relIds xmlns:dgm="http://schemas.openxmlformats.org/drawingml/2006/diagram" xmlns:r="http://schemas.openxmlformats.org/officeDocument/2006/relationships" r:dm="rId2" r:lo="rId3" r:qs="rId4" r:cs="rId5"/>
+            <dgm:relIds xmlns:dgm="http://schemas.openxmlformats.org/drawingml/2006/diagram" xmlns:r="http://schemas.openxmlformats.org/officeDocument/2006/relationships" r:dm="rId3" r:lo="rId4" r:qs="rId5" r:cs="rId6"/>
           </a:graphicData>
         </a:graphic>
       </p:graphicFrame>
@@ -37975,318 +38641,6 @@
       </p:grpSpPr>
       <p:sp useBgFill="1">
         <p:nvSpPr>
-          <p:cNvPr id="52" name="Rectangle 51">
-            <a:extLst>
-              <a:ext uri="{FF2B5EF4-FFF2-40B4-BE49-F238E27FC236}">
-                <a16:creationId xmlns:a16="http://schemas.microsoft.com/office/drawing/2014/main" id="{955A2079-FA98-4876-80F0-72364A7D2EA4}"/>
-              </a:ext>
-              <a:ext uri="{C183D7F6-B498-43B3-948B-1728B52AA6E4}">
-                <adec:decorative xmlns:adec="http://schemas.microsoft.com/office/drawing/2017/decorative" val="1"/>
-              </a:ext>
-            </a:extLst>
-          </p:cNvPr>
-          <p:cNvSpPr>
-            <a:spLocks noGrp="1" noRot="1" noChangeAspect="1" noMove="1" noResize="1" noEditPoints="1" noAdjustHandles="1" noChangeArrowheads="1" noChangeShapeType="1" noTextEdit="1"/>
-          </p:cNvSpPr>
-          <p:nvPr>
-            <p:extLst>
-              <p:ext uri="{386F3935-93C4-4BCD-93E2-E3B085C9AB24}">
-                <p16:designElem xmlns:p16="http://schemas.microsoft.com/office/powerpoint/2015/main" val="1"/>
-              </p:ext>
-            </p:extLst>
-          </p:nvPr>
-        </p:nvSpPr>
-        <p:spPr>
-          <a:xfrm>
-            <a:off x="0" y="0"/>
-            <a:ext cx="9141713" cy="5143500"/>
-          </a:xfrm>
-          <a:prstGeom prst="rect">
-            <a:avLst/>
-          </a:prstGeom>
-          <a:ln>
-            <a:noFill/>
-          </a:ln>
-        </p:spPr>
-        <p:style>
-          <a:lnRef idx="2">
-            <a:schemeClr val="accent1">
-              <a:shade val="50000"/>
-            </a:schemeClr>
-          </a:lnRef>
-          <a:fillRef idx="1">
-            <a:schemeClr val="accent1"/>
-          </a:fillRef>
-          <a:effectRef idx="0">
-            <a:schemeClr val="accent1"/>
-          </a:effectRef>
-          <a:fontRef idx="minor">
-            <a:schemeClr val="lt1"/>
-          </a:fontRef>
-        </p:style>
-        <p:txBody>
-          <a:bodyPr rtlCol="0" anchor="ctr"/>
-          <a:lstStyle/>
-          <a:p>
-            <a:pPr algn="ctr"/>
-            <a:endParaRPr lang="en-US"/>
-          </a:p>
-        </p:txBody>
-      </p:sp>
-      <p:sp>
-        <p:nvSpPr>
-          <p:cNvPr id="2" name="Title 1"/>
-          <p:cNvSpPr>
-            <a:spLocks noGrp="1"/>
-          </p:cNvSpPr>
-          <p:nvPr>
-            <p:ph type="title"/>
-          </p:nvPr>
-        </p:nvSpPr>
-        <p:spPr>
-          <a:xfrm>
-            <a:off x="628650" y="417891"/>
-            <a:ext cx="7886700" cy="850124"/>
-          </a:xfrm>
-        </p:spPr>
-        <p:txBody>
-          <a:bodyPr>
-            <a:normAutofit/>
-          </a:bodyPr>
-          <a:lstStyle/>
-          <a:p>
-            <a:pPr marL="0" lvl="0" indent="0">
-              <a:buNone/>
-            </a:pPr>
-            <a:r>
-              <a:rPr lang="en-US" sz="3900"/>
-              <a:t>Essential Tidyverse Functions in dplyr</a:t>
-            </a:r>
-          </a:p>
-        </p:txBody>
-      </p:sp>
-      <p:graphicFrame>
-        <p:nvGraphicFramePr>
-          <p:cNvPr id="47" name="Content Placeholder 2">
-            <a:extLst>
-              <a:ext uri="{FF2B5EF4-FFF2-40B4-BE49-F238E27FC236}">
-                <a16:creationId xmlns:a16="http://schemas.microsoft.com/office/drawing/2014/main" id="{3361AF66-045F-0131-2EC8-849C34877525}"/>
-              </a:ext>
-            </a:extLst>
-          </p:cNvPr>
-          <p:cNvGraphicFramePr>
-            <a:graphicFrameLocks noGrp="1"/>
-          </p:cNvGraphicFramePr>
-          <p:nvPr>
-            <p:ph idx="1"/>
-            <p:extLst>
-              <p:ext uri="{D42A27DB-BD31-4B8C-83A1-F6EECF244321}">
-                <p14:modId xmlns:p14="http://schemas.microsoft.com/office/powerpoint/2010/main" val="478715732"/>
-              </p:ext>
-            </p:extLst>
-          </p:nvPr>
-        </p:nvGraphicFramePr>
-        <p:xfrm>
-          <a:off x="628650" y="1371600"/>
-          <a:ext cx="7886700" cy="3264408"/>
-        </p:xfrm>
-        <a:graphic>
-          <a:graphicData uri="http://schemas.openxmlformats.org/drawingml/2006/diagram">
-            <dgm:relIds xmlns:dgm="http://schemas.openxmlformats.org/drawingml/2006/diagram" xmlns:r="http://schemas.openxmlformats.org/officeDocument/2006/relationships" r:dm="rId2" r:lo="rId3" r:qs="rId4" r:cs="rId5"/>
-          </a:graphicData>
-        </a:graphic>
-      </p:graphicFrame>
-    </p:spTree>
-  </p:cSld>
-  <p:clrMapOvr>
-    <a:masterClrMapping/>
-  </p:clrMapOvr>
-</p:sld>
-</file>
-
-<file path=ppt/slides/slide28.xml><?xml version="1.0" encoding="utf-8"?>
-<p:sld xmlns:a="http://schemas.openxmlformats.org/drawingml/2006/main" xmlns:r="http://schemas.openxmlformats.org/officeDocument/2006/relationships" xmlns:p="http://schemas.openxmlformats.org/presentationml/2006/main">
-  <p:cSld>
-    <p:bg>
-      <p:bgPr>
-        <a:solidFill>
-          <a:schemeClr val="bg1"/>
-        </a:solidFill>
-        <a:effectLst/>
-      </p:bgPr>
-    </p:bg>
-    <p:spTree>
-      <p:nvGrpSpPr>
-        <p:cNvPr id="1" name=""/>
-        <p:cNvGrpSpPr/>
-        <p:nvPr/>
-      </p:nvGrpSpPr>
-      <p:grpSpPr>
-        <a:xfrm>
-          <a:off x="0" y="0"/>
-          <a:ext cx="0" cy="0"/>
-          <a:chOff x="0" y="0"/>
-          <a:chExt cx="0" cy="0"/>
-        </a:xfrm>
-      </p:grpSpPr>
-      <p:sp useBgFill="1">
-        <p:nvSpPr>
-          <p:cNvPr id="16" name="Rectangle 15">
-            <a:extLst>
-              <a:ext uri="{FF2B5EF4-FFF2-40B4-BE49-F238E27FC236}">
-                <a16:creationId xmlns:a16="http://schemas.microsoft.com/office/drawing/2014/main" id="{6C4028FD-8BAA-4A19-BFDE-594D991B7552}"/>
-              </a:ext>
-              <a:ext uri="{C183D7F6-B498-43B3-948B-1728B52AA6E4}">
-                <adec:decorative xmlns:adec="http://schemas.microsoft.com/office/drawing/2017/decorative" val="1"/>
-              </a:ext>
-            </a:extLst>
-          </p:cNvPr>
-          <p:cNvSpPr>
-            <a:spLocks noGrp="1" noRot="1" noChangeAspect="1" noMove="1" noResize="1" noEditPoints="1" noAdjustHandles="1" noChangeArrowheads="1" noChangeShapeType="1" noTextEdit="1"/>
-          </p:cNvSpPr>
-          <p:nvPr>
-            <p:extLst>
-              <p:ext uri="{386F3935-93C4-4BCD-93E2-E3B085C9AB24}">
-                <p16:designElem xmlns:p16="http://schemas.microsoft.com/office/powerpoint/2015/main" val="1"/>
-              </p:ext>
-            </p:extLst>
-          </p:nvPr>
-        </p:nvSpPr>
-        <p:spPr>
-          <a:xfrm>
-            <a:off x="0" y="0"/>
-            <a:ext cx="9141713" cy="5143500"/>
-          </a:xfrm>
-          <a:prstGeom prst="rect">
-            <a:avLst/>
-          </a:prstGeom>
-          <a:ln>
-            <a:noFill/>
-          </a:ln>
-        </p:spPr>
-        <p:style>
-          <a:lnRef idx="2">
-            <a:schemeClr val="accent1">
-              <a:shade val="50000"/>
-            </a:schemeClr>
-          </a:lnRef>
-          <a:fillRef idx="1">
-            <a:schemeClr val="accent1"/>
-          </a:fillRef>
-          <a:effectRef idx="0">
-            <a:schemeClr val="accent1"/>
-          </a:effectRef>
-          <a:fontRef idx="minor">
-            <a:schemeClr val="lt1"/>
-          </a:fontRef>
-        </p:style>
-        <p:txBody>
-          <a:bodyPr rtlCol="0" anchor="ctr"/>
-          <a:lstStyle/>
-          <a:p>
-            <a:pPr algn="ctr"/>
-            <a:endParaRPr lang="en-US"/>
-          </a:p>
-        </p:txBody>
-      </p:sp>
-      <p:sp>
-        <p:nvSpPr>
-          <p:cNvPr id="2" name="Title 1"/>
-          <p:cNvSpPr>
-            <a:spLocks noGrp="1"/>
-          </p:cNvSpPr>
-          <p:nvPr>
-            <p:ph type="title"/>
-          </p:nvPr>
-        </p:nvSpPr>
-        <p:spPr>
-          <a:xfrm>
-            <a:off x="628650" y="417746"/>
-            <a:ext cx="7886700" cy="850270"/>
-          </a:xfrm>
-        </p:spPr>
-        <p:txBody>
-          <a:bodyPr>
-            <a:normAutofit/>
-          </a:bodyPr>
-          <a:lstStyle/>
-          <a:p>
-            <a:pPr marL="0" lvl="0" indent="0">
-              <a:buNone/>
-            </a:pPr>
-            <a:r>
-              <a:rPr lang="en-US" sz="3900"/>
-              <a:t>Essential Functions in dplyr</a:t>
-            </a:r>
-          </a:p>
-        </p:txBody>
-      </p:sp>
-      <p:graphicFrame>
-        <p:nvGraphicFramePr>
-          <p:cNvPr id="5" name="Content Placeholder 2">
-            <a:extLst>
-              <a:ext uri="{FF2B5EF4-FFF2-40B4-BE49-F238E27FC236}">
-                <a16:creationId xmlns:a16="http://schemas.microsoft.com/office/drawing/2014/main" id="{D6488C6E-0712-38EE-0977-D423CEC330D4}"/>
-              </a:ext>
-            </a:extLst>
-          </p:cNvPr>
-          <p:cNvGraphicFramePr>
-            <a:graphicFrameLocks noGrp="1"/>
-          </p:cNvGraphicFramePr>
-          <p:nvPr>
-            <p:ph idx="1"/>
-            <p:extLst>
-              <p:ext uri="{D42A27DB-BD31-4B8C-83A1-F6EECF244321}">
-                <p14:modId xmlns:p14="http://schemas.microsoft.com/office/powerpoint/2010/main" val="4102905987"/>
-              </p:ext>
-            </p:extLst>
-          </p:nvPr>
-        </p:nvGraphicFramePr>
-        <p:xfrm>
-          <a:off x="628650" y="1369218"/>
-          <a:ext cx="7886700" cy="3263504"/>
-        </p:xfrm>
-        <a:graphic>
-          <a:graphicData uri="http://schemas.openxmlformats.org/drawingml/2006/diagram">
-            <dgm:relIds xmlns:dgm="http://schemas.openxmlformats.org/drawingml/2006/diagram" xmlns:r="http://schemas.openxmlformats.org/officeDocument/2006/relationships" r:dm="rId2" r:lo="rId3" r:qs="rId4" r:cs="rId5"/>
-          </a:graphicData>
-        </a:graphic>
-      </p:graphicFrame>
-    </p:spTree>
-  </p:cSld>
-  <p:clrMapOvr>
-    <a:masterClrMapping/>
-  </p:clrMapOvr>
-</p:sld>
-</file>
-
-<file path=ppt/slides/slide29.xml><?xml version="1.0" encoding="utf-8"?>
-<p:sld xmlns:a="http://schemas.openxmlformats.org/drawingml/2006/main" xmlns:r="http://schemas.openxmlformats.org/officeDocument/2006/relationships" xmlns:p="http://schemas.openxmlformats.org/presentationml/2006/main">
-  <p:cSld>
-    <p:bg>
-      <p:bgPr>
-        <a:solidFill>
-          <a:schemeClr val="bg1"/>
-        </a:solidFill>
-        <a:effectLst/>
-      </p:bgPr>
-    </p:bg>
-    <p:spTree>
-      <p:nvGrpSpPr>
-        <p:cNvPr id="1" name=""/>
-        <p:cNvGrpSpPr/>
-        <p:nvPr/>
-      </p:nvGrpSpPr>
-      <p:grpSpPr>
-        <a:xfrm>
-          <a:off x="0" y="0"/>
-          <a:ext cx="0" cy="0"/>
-          <a:chOff x="0" y="0"/>
-          <a:chExt cx="0" cy="0"/>
-        </a:xfrm>
-      </p:grpSpPr>
-      <p:sp useBgFill="1">
-        <p:nvSpPr>
           <p:cNvPr id="8" name="Rectangle 7">
             <a:extLst>
               <a:ext uri="{FF2B5EF4-FFF2-40B4-BE49-F238E27FC236}">
@@ -38954,6 +39308,527 @@
           </a:p>
         </p:txBody>
       </p:sp>
+    </p:spTree>
+  </p:cSld>
+  <p:clrMapOvr>
+    <a:masterClrMapping/>
+  </p:clrMapOvr>
+</p:sld>
+</file>
+
+<file path=ppt/slides/slide28.xml><?xml version="1.0" encoding="utf-8"?>
+<p:sld xmlns:a="http://schemas.openxmlformats.org/drawingml/2006/main" xmlns:r="http://schemas.openxmlformats.org/officeDocument/2006/relationships" xmlns:p="http://schemas.openxmlformats.org/presentationml/2006/main">
+  <p:cSld>
+    <p:bg>
+      <p:bgPr>
+        <a:solidFill>
+          <a:schemeClr val="bg1"/>
+        </a:solidFill>
+        <a:effectLst/>
+      </p:bgPr>
+    </p:bg>
+    <p:spTree>
+      <p:nvGrpSpPr>
+        <p:cNvPr id="1" name=""/>
+        <p:cNvGrpSpPr/>
+        <p:nvPr/>
+      </p:nvGrpSpPr>
+      <p:grpSpPr>
+        <a:xfrm>
+          <a:off x="0" y="0"/>
+          <a:ext cx="0" cy="0"/>
+          <a:chOff x="0" y="0"/>
+          <a:chExt cx="0" cy="0"/>
+        </a:xfrm>
+      </p:grpSpPr>
+      <p:sp useBgFill="1">
+        <p:nvSpPr>
+          <p:cNvPr id="8" name="Rectangle 7">
+            <a:extLst>
+              <a:ext uri="{FF2B5EF4-FFF2-40B4-BE49-F238E27FC236}">
+                <a16:creationId xmlns:a16="http://schemas.microsoft.com/office/drawing/2014/main" id="{907EF6B7-1338-4443-8C46-6A318D952DFD}"/>
+              </a:ext>
+              <a:ext uri="{C183D7F6-B498-43B3-948B-1728B52AA6E4}">
+                <adec:decorative xmlns:adec="http://schemas.microsoft.com/office/drawing/2017/decorative" val="1"/>
+              </a:ext>
+            </a:extLst>
+          </p:cNvPr>
+          <p:cNvSpPr>
+            <a:spLocks noGrp="1" noRot="1" noChangeAspect="1" noMove="1" noResize="1" noEditPoints="1" noAdjustHandles="1" noChangeArrowheads="1" noChangeShapeType="1" noTextEdit="1"/>
+          </p:cNvSpPr>
+          <p:nvPr>
+            <p:extLst>
+              <p:ext uri="{386F3935-93C4-4BCD-93E2-E3B085C9AB24}">
+                <p16:designElem xmlns:p16="http://schemas.microsoft.com/office/powerpoint/2015/main" val="1"/>
+              </p:ext>
+            </p:extLst>
+          </p:nvPr>
+        </p:nvSpPr>
+        <p:spPr>
+          <a:xfrm>
+            <a:off x="2286" y="0"/>
+            <a:ext cx="9141714" cy="5143500"/>
+          </a:xfrm>
+          <a:prstGeom prst="rect">
+            <a:avLst/>
+          </a:prstGeom>
+          <a:ln>
+            <a:noFill/>
+          </a:ln>
+        </p:spPr>
+        <p:style>
+          <a:lnRef idx="2">
+            <a:schemeClr val="accent1">
+              <a:shade val="50000"/>
+            </a:schemeClr>
+          </a:lnRef>
+          <a:fillRef idx="1">
+            <a:schemeClr val="accent1"/>
+          </a:fillRef>
+          <a:effectRef idx="0">
+            <a:schemeClr val="accent1"/>
+          </a:effectRef>
+          <a:fontRef idx="minor">
+            <a:schemeClr val="lt1"/>
+          </a:fontRef>
+        </p:style>
+        <p:txBody>
+          <a:bodyPr rtlCol="0" anchor="ctr"/>
+          <a:lstStyle/>
+          <a:p>
+            <a:pPr algn="ctr"/>
+            <a:endParaRPr lang="en-US"/>
+          </a:p>
+        </p:txBody>
+      </p:sp>
+      <p:sp>
+        <p:nvSpPr>
+          <p:cNvPr id="10" name="Freeform: Shape 9">
+            <a:extLst>
+              <a:ext uri="{FF2B5EF4-FFF2-40B4-BE49-F238E27FC236}">
+                <a16:creationId xmlns:a16="http://schemas.microsoft.com/office/drawing/2014/main" id="{DAAE4CDD-124C-4DCF-9584-B6033B545DD5}"/>
+              </a:ext>
+              <a:ext uri="{C183D7F6-B498-43B3-948B-1728B52AA6E4}">
+                <adec:decorative xmlns:adec="http://schemas.microsoft.com/office/drawing/2017/decorative" val="1"/>
+              </a:ext>
+            </a:extLst>
+          </p:cNvPr>
+          <p:cNvSpPr>
+            <a:spLocks noGrp="1" noRot="1" noChangeAspect="1" noMove="1" noResize="1" noEditPoints="1" noAdjustHandles="1" noChangeArrowheads="1" noChangeShapeType="1" noTextEdit="1"/>
+          </p:cNvSpPr>
+          <p:nvPr>
+            <p:extLst>
+              <p:ext uri="{386F3935-93C4-4BCD-93E2-E3B085C9AB24}">
+                <p16:designElem xmlns:p16="http://schemas.microsoft.com/office/powerpoint/2015/main" val="1"/>
+              </p:ext>
+            </p:extLst>
+          </p:nvPr>
+        </p:nvSpPr>
+        <p:spPr>
+          <a:xfrm>
+            <a:off x="0" y="0"/>
+            <a:ext cx="3125454" cy="5143500"/>
+          </a:xfrm>
+          <a:custGeom>
+            <a:avLst/>
+            <a:gdLst>
+              <a:gd name="connsiteX0" fmla="*/ 0 w 4167271"/>
+              <a:gd name="connsiteY0" fmla="*/ 0 h 6858000"/>
+              <a:gd name="connsiteX1" fmla="*/ 2259550 w 4167271"/>
+              <a:gd name="connsiteY1" fmla="*/ 0 h 6858000"/>
+              <a:gd name="connsiteX2" fmla="*/ 2387803 w 4167271"/>
+              <a:gd name="connsiteY2" fmla="*/ 82222 h 6858000"/>
+              <a:gd name="connsiteX3" fmla="*/ 4167271 w 4167271"/>
+              <a:gd name="connsiteY3" fmla="*/ 3429000 h 6858000"/>
+              <a:gd name="connsiteX4" fmla="*/ 2387803 w 4167271"/>
+              <a:gd name="connsiteY4" fmla="*/ 6775779 h 6858000"/>
+              <a:gd name="connsiteX5" fmla="*/ 2259550 w 4167271"/>
+              <a:gd name="connsiteY5" fmla="*/ 6858000 h 6858000"/>
+              <a:gd name="connsiteX6" fmla="*/ 0 w 4167271"/>
+              <a:gd name="connsiteY6" fmla="*/ 6858000 h 6858000"/>
+            </a:gdLst>
+            <a:ahLst/>
+            <a:cxnLst>
+              <a:cxn ang="0">
+                <a:pos x="connsiteX0" y="connsiteY0"/>
+              </a:cxn>
+              <a:cxn ang="0">
+                <a:pos x="connsiteX1" y="connsiteY1"/>
+              </a:cxn>
+              <a:cxn ang="0">
+                <a:pos x="connsiteX2" y="connsiteY2"/>
+              </a:cxn>
+              <a:cxn ang="0">
+                <a:pos x="connsiteX3" y="connsiteY3"/>
+              </a:cxn>
+              <a:cxn ang="0">
+                <a:pos x="connsiteX4" y="connsiteY4"/>
+              </a:cxn>
+              <a:cxn ang="0">
+                <a:pos x="connsiteX5" y="connsiteY5"/>
+              </a:cxn>
+              <a:cxn ang="0">
+                <a:pos x="connsiteX6" y="connsiteY6"/>
+              </a:cxn>
+            </a:cxnLst>
+            <a:rect l="l" t="t" r="r" b="b"/>
+            <a:pathLst>
+              <a:path w="4167271" h="6858000">
+                <a:moveTo>
+                  <a:pt x="0" y="0"/>
+                </a:moveTo>
+                <a:lnTo>
+                  <a:pt x="2259550" y="0"/>
+                </a:lnTo>
+                <a:lnTo>
+                  <a:pt x="2387803" y="82222"/>
+                </a:lnTo>
+                <a:cubicBezTo>
+                  <a:pt x="3461407" y="807534"/>
+                  <a:pt x="4167271" y="2035835"/>
+                  <a:pt x="4167271" y="3429000"/>
+                </a:cubicBezTo>
+                <a:cubicBezTo>
+                  <a:pt x="4167271" y="4822165"/>
+                  <a:pt x="3461407" y="6050467"/>
+                  <a:pt x="2387803" y="6775779"/>
+                </a:cubicBezTo>
+                <a:lnTo>
+                  <a:pt x="2259550" y="6858000"/>
+                </a:lnTo>
+                <a:lnTo>
+                  <a:pt x="0" y="6858000"/>
+                </a:lnTo>
+                <a:close/>
+              </a:path>
+            </a:pathLst>
+          </a:custGeom>
+          <a:solidFill>
+            <a:schemeClr val="accent2"/>
+          </a:solidFill>
+          <a:ln>
+            <a:noFill/>
+          </a:ln>
+        </p:spPr>
+        <p:style>
+          <a:lnRef idx="2">
+            <a:schemeClr val="accent1">
+              <a:shade val="50000"/>
+            </a:schemeClr>
+          </a:lnRef>
+          <a:fillRef idx="1">
+            <a:schemeClr val="accent1"/>
+          </a:fillRef>
+          <a:effectRef idx="0">
+            <a:schemeClr val="accent1"/>
+          </a:effectRef>
+          <a:fontRef idx="minor">
+            <a:schemeClr val="lt1"/>
+          </a:fontRef>
+        </p:style>
+        <p:txBody>
+          <a:bodyPr rtlCol="0" anchor="ctr"/>
+          <a:lstStyle/>
+          <a:p>
+            <a:pPr algn="ctr"/>
+            <a:endParaRPr lang="en-US"/>
+          </a:p>
+        </p:txBody>
+      </p:sp>
+      <p:sp>
+        <p:nvSpPr>
+          <p:cNvPr id="2" name="Title 1"/>
+          <p:cNvSpPr>
+            <a:spLocks noGrp="1"/>
+          </p:cNvSpPr>
+          <p:nvPr>
+            <p:ph type="title"/>
+          </p:nvPr>
+        </p:nvSpPr>
+        <p:spPr>
+          <a:xfrm>
+            <a:off x="515125" y="865179"/>
+            <a:ext cx="2400300" cy="3345872"/>
+          </a:xfrm>
+        </p:spPr>
+        <p:txBody>
+          <a:bodyPr>
+            <a:normAutofit/>
+          </a:bodyPr>
+          <a:lstStyle/>
+          <a:p>
+            <a:pPr marL="0" lvl="0" indent="0">
+              <a:buNone/>
+            </a:pPr>
+            <a:r>
+              <a:rPr lang="en-US">
+                <a:solidFill>
+                  <a:srgbClr val="FFFFFF"/>
+                </a:solidFill>
+              </a:rPr>
+              <a:t>Missing Data</a:t>
+            </a:r>
+          </a:p>
+        </p:txBody>
+      </p:sp>
+      <p:sp>
+        <p:nvSpPr>
+          <p:cNvPr id="12" name="Arc 11">
+            <a:extLst>
+              <a:ext uri="{FF2B5EF4-FFF2-40B4-BE49-F238E27FC236}">
+                <a16:creationId xmlns:a16="http://schemas.microsoft.com/office/drawing/2014/main" id="{081E4A58-353D-44AE-B2FC-2A74E2E400F7}"/>
+              </a:ext>
+              <a:ext uri="{C183D7F6-B498-43B3-948B-1728B52AA6E4}">
+                <adec:decorative xmlns:adec="http://schemas.microsoft.com/office/drawing/2017/decorative" val="1"/>
+              </a:ext>
+            </a:extLst>
+          </p:cNvPr>
+          <p:cNvSpPr>
+            <a:spLocks noGrp="1" noRot="1" noChangeAspect="1" noMove="1" noResize="1" noEditPoints="1" noAdjustHandles="1" noChangeArrowheads="1" noChangeShapeType="1" noTextEdit="1"/>
+          </p:cNvSpPr>
+          <p:nvPr>
+            <p:extLst>
+              <p:ext uri="{386F3935-93C4-4BCD-93E2-E3B085C9AB24}">
+                <p16:designElem xmlns:p16="http://schemas.microsoft.com/office/powerpoint/2015/main" val="1"/>
+              </p:ext>
+            </p:extLst>
+          </p:nvPr>
+        </p:nvSpPr>
+        <p:spPr>
+          <a:xfrm flipV="1">
+            <a:off x="5662801" y="1841609"/>
+            <a:ext cx="3062575" cy="3062575"/>
+          </a:xfrm>
+          <a:prstGeom prst="arc">
+            <a:avLst/>
+          </a:prstGeom>
+          <a:ln w="127000" cap="rnd">
+            <a:solidFill>
+              <a:schemeClr val="accent4"/>
+            </a:solidFill>
+            <a:prstDash val="dash"/>
+          </a:ln>
+        </p:spPr>
+        <p:style>
+          <a:lnRef idx="1">
+            <a:schemeClr val="accent1"/>
+          </a:lnRef>
+          <a:fillRef idx="0">
+            <a:schemeClr val="accent1"/>
+          </a:fillRef>
+          <a:effectRef idx="0">
+            <a:schemeClr val="accent1"/>
+          </a:effectRef>
+          <a:fontRef idx="minor">
+            <a:schemeClr val="tx1"/>
+          </a:fontRef>
+        </p:style>
+        <p:txBody>
+          <a:bodyPr rtlCol="0" anchor="ctr"/>
+          <a:lstStyle/>
+          <a:p>
+            <a:pPr algn="ctr"/>
+            <a:endParaRPr lang="en-US" dirty="0"/>
+          </a:p>
+        </p:txBody>
+      </p:sp>
+      <p:sp>
+        <p:nvSpPr>
+          <p:cNvPr id="3" name="Content Placeholder 2"/>
+          <p:cNvSpPr>
+            <a:spLocks noGrp="1"/>
+          </p:cNvSpPr>
+          <p:nvPr>
+            <p:ph idx="1"/>
+          </p:nvPr>
+        </p:nvSpPr>
+        <p:spPr>
+          <a:xfrm>
+            <a:off x="3335481" y="443508"/>
+            <a:ext cx="5179868" cy="4189214"/>
+          </a:xfrm>
+        </p:spPr>
+        <p:txBody>
+          <a:bodyPr anchor="ctr">
+            <a:normAutofit/>
+          </a:bodyPr>
+          <a:lstStyle/>
+          <a:p>
+            <a:pPr lvl="0"/>
+            <a:r>
+              <a:t>complete.cases(df)</a:t>
+            </a:r>
+          </a:p>
+          <a:p>
+            <a:pPr lvl="0"/>
+            <a:r>
+              <a:t>is.na()</a:t>
+            </a:r>
+          </a:p>
+          <a:p>
+            <a:pPr lvl="0"/>
+            <a:r>
+              <a:t>replace_na</a:t>
+            </a:r>
+          </a:p>
+        </p:txBody>
+      </p:sp>
+    </p:spTree>
+  </p:cSld>
+  <p:clrMapOvr>
+    <a:masterClrMapping/>
+  </p:clrMapOvr>
+</p:sld>
+</file>
+
+<file path=ppt/slides/slide29.xml><?xml version="1.0" encoding="utf-8"?>
+<p:sld xmlns:a="http://schemas.openxmlformats.org/drawingml/2006/main" xmlns:r="http://schemas.openxmlformats.org/officeDocument/2006/relationships" xmlns:p="http://schemas.openxmlformats.org/presentationml/2006/main">
+  <p:cSld>
+    <p:bg>
+      <p:bgPr>
+        <a:solidFill>
+          <a:schemeClr val="bg1"/>
+        </a:solidFill>
+        <a:effectLst/>
+      </p:bgPr>
+    </p:bg>
+    <p:spTree>
+      <p:nvGrpSpPr>
+        <p:cNvPr id="1" name=""/>
+        <p:cNvGrpSpPr/>
+        <p:nvPr/>
+      </p:nvGrpSpPr>
+      <p:grpSpPr>
+        <a:xfrm>
+          <a:off x="0" y="0"/>
+          <a:ext cx="0" cy="0"/>
+          <a:chOff x="0" y="0"/>
+          <a:chExt cx="0" cy="0"/>
+        </a:xfrm>
+      </p:grpSpPr>
+      <p:sp useBgFill="1">
+        <p:nvSpPr>
+          <p:cNvPr id="52" name="Rectangle 51">
+            <a:extLst>
+              <a:ext uri="{FF2B5EF4-FFF2-40B4-BE49-F238E27FC236}">
+                <a16:creationId xmlns:a16="http://schemas.microsoft.com/office/drawing/2014/main" id="{955A2079-FA98-4876-80F0-72364A7D2EA4}"/>
+              </a:ext>
+              <a:ext uri="{C183D7F6-B498-43B3-948B-1728B52AA6E4}">
+                <adec:decorative xmlns:adec="http://schemas.microsoft.com/office/drawing/2017/decorative" val="1"/>
+              </a:ext>
+            </a:extLst>
+          </p:cNvPr>
+          <p:cNvSpPr>
+            <a:spLocks noGrp="1" noRot="1" noChangeAspect="1" noMove="1" noResize="1" noEditPoints="1" noAdjustHandles="1" noChangeArrowheads="1" noChangeShapeType="1" noTextEdit="1"/>
+          </p:cNvSpPr>
+          <p:nvPr>
+            <p:extLst>
+              <p:ext uri="{386F3935-93C4-4BCD-93E2-E3B085C9AB24}">
+                <p16:designElem xmlns:p16="http://schemas.microsoft.com/office/powerpoint/2015/main" val="1"/>
+              </p:ext>
+            </p:extLst>
+          </p:nvPr>
+        </p:nvSpPr>
+        <p:spPr>
+          <a:xfrm>
+            <a:off x="0" y="0"/>
+            <a:ext cx="9141713" cy="5143500"/>
+          </a:xfrm>
+          <a:prstGeom prst="rect">
+            <a:avLst/>
+          </a:prstGeom>
+          <a:ln>
+            <a:noFill/>
+          </a:ln>
+        </p:spPr>
+        <p:style>
+          <a:lnRef idx="2">
+            <a:schemeClr val="accent1">
+              <a:shade val="50000"/>
+            </a:schemeClr>
+          </a:lnRef>
+          <a:fillRef idx="1">
+            <a:schemeClr val="accent1"/>
+          </a:fillRef>
+          <a:effectRef idx="0">
+            <a:schemeClr val="accent1"/>
+          </a:effectRef>
+          <a:fontRef idx="minor">
+            <a:schemeClr val="lt1"/>
+          </a:fontRef>
+        </p:style>
+        <p:txBody>
+          <a:bodyPr rtlCol="0" anchor="ctr"/>
+          <a:lstStyle/>
+          <a:p>
+            <a:pPr algn="ctr"/>
+            <a:endParaRPr lang="en-US"/>
+          </a:p>
+        </p:txBody>
+      </p:sp>
+      <p:sp>
+        <p:nvSpPr>
+          <p:cNvPr id="2" name="Title 1"/>
+          <p:cNvSpPr>
+            <a:spLocks noGrp="1"/>
+          </p:cNvSpPr>
+          <p:nvPr>
+            <p:ph type="title"/>
+          </p:nvPr>
+        </p:nvSpPr>
+        <p:spPr>
+          <a:xfrm>
+            <a:off x="628650" y="417891"/>
+            <a:ext cx="7886700" cy="850124"/>
+          </a:xfrm>
+        </p:spPr>
+        <p:txBody>
+          <a:bodyPr>
+            <a:normAutofit/>
+          </a:bodyPr>
+          <a:lstStyle/>
+          <a:p>
+            <a:pPr marL="0" lvl="0" indent="0">
+              <a:buNone/>
+            </a:pPr>
+            <a:r>
+              <a:rPr lang="en-US" sz="3900"/>
+              <a:t>Essential Tidyverse Functions in dplyr</a:t>
+            </a:r>
+          </a:p>
+        </p:txBody>
+      </p:sp>
+      <p:graphicFrame>
+        <p:nvGraphicFramePr>
+          <p:cNvPr id="47" name="Content Placeholder 2">
+            <a:extLst>
+              <a:ext uri="{FF2B5EF4-FFF2-40B4-BE49-F238E27FC236}">
+                <a16:creationId xmlns:a16="http://schemas.microsoft.com/office/drawing/2014/main" id="{3361AF66-045F-0131-2EC8-849C34877525}"/>
+              </a:ext>
+            </a:extLst>
+          </p:cNvPr>
+          <p:cNvGraphicFramePr>
+            <a:graphicFrameLocks noGrp="1"/>
+          </p:cNvGraphicFramePr>
+          <p:nvPr>
+            <p:ph idx="1"/>
+            <p:extLst>
+              <p:ext uri="{D42A27DB-BD31-4B8C-83A1-F6EECF244321}">
+                <p14:modId xmlns:p14="http://schemas.microsoft.com/office/powerpoint/2010/main" val="478715732"/>
+              </p:ext>
+            </p:extLst>
+          </p:nvPr>
+        </p:nvGraphicFramePr>
+        <p:xfrm>
+          <a:off x="628650" y="1371600"/>
+          <a:ext cx="7886700" cy="3264408"/>
+        </p:xfrm>
+        <a:graphic>
+          <a:graphicData uri="http://schemas.openxmlformats.org/drawingml/2006/diagram">
+            <dgm:relIds xmlns:dgm="http://schemas.openxmlformats.org/drawingml/2006/diagram" xmlns:r="http://schemas.openxmlformats.org/officeDocument/2006/relationships" r:dm="rId2" r:lo="rId3" r:qs="rId4" r:cs="rId5"/>
+          </a:graphicData>
+        </a:graphic>
+      </p:graphicFrame>
     </p:spTree>
   </p:cSld>
   <p:clrMapOvr>
@@ -39763,70 +40638,10 @@
       </p:grpSpPr>
       <p:sp useBgFill="1">
         <p:nvSpPr>
-          <p:cNvPr id="8" name="Rectangle 7">
+          <p:cNvPr id="16" name="Rectangle 15">
             <a:extLst>
               <a:ext uri="{FF2B5EF4-FFF2-40B4-BE49-F238E27FC236}">
-                <a16:creationId xmlns:a16="http://schemas.microsoft.com/office/drawing/2014/main" id="{907EF6B7-1338-4443-8C46-6A318D952DFD}"/>
-              </a:ext>
-              <a:ext uri="{C183D7F6-B498-43B3-948B-1728B52AA6E4}">
-                <adec:decorative xmlns:adec="http://schemas.microsoft.com/office/drawing/2017/decorative" val="1"/>
-              </a:ext>
-            </a:extLst>
-          </p:cNvPr>
-          <p:cNvSpPr>
-            <a:spLocks noGrp="1" noRot="1" noChangeAspect="1" noMove="1" noResize="1" noEditPoints="1" noAdjustHandles="1" noChangeArrowheads="1" noChangeShapeType="1" noTextEdit="1"/>
-          </p:cNvSpPr>
-          <p:nvPr>
-            <p:extLst>
-              <p:ext uri="{386F3935-93C4-4BCD-93E2-E3B085C9AB24}">
-                <p16:designElem xmlns:p16="http://schemas.microsoft.com/office/powerpoint/2015/main" val="1"/>
-              </p:ext>
-            </p:extLst>
-          </p:nvPr>
-        </p:nvSpPr>
-        <p:spPr>
-          <a:xfrm>
-            <a:off x="2286" y="0"/>
-            <a:ext cx="9141714" cy="5143500"/>
-          </a:xfrm>
-          <a:prstGeom prst="rect">
-            <a:avLst/>
-          </a:prstGeom>
-          <a:ln>
-            <a:noFill/>
-          </a:ln>
-        </p:spPr>
-        <p:style>
-          <a:lnRef idx="2">
-            <a:schemeClr val="accent1">
-              <a:shade val="50000"/>
-            </a:schemeClr>
-          </a:lnRef>
-          <a:fillRef idx="1">
-            <a:schemeClr val="accent1"/>
-          </a:fillRef>
-          <a:effectRef idx="0">
-            <a:schemeClr val="accent1"/>
-          </a:effectRef>
-          <a:fontRef idx="minor">
-            <a:schemeClr val="lt1"/>
-          </a:fontRef>
-        </p:style>
-        <p:txBody>
-          <a:bodyPr rtlCol="0" anchor="ctr"/>
-          <a:lstStyle/>
-          <a:p>
-            <a:pPr algn="ctr"/>
-            <a:endParaRPr lang="en-US"/>
-          </a:p>
-        </p:txBody>
-      </p:sp>
-      <p:sp>
-        <p:nvSpPr>
-          <p:cNvPr id="10" name="Freeform: Shape 9">
-            <a:extLst>
-              <a:ext uri="{FF2B5EF4-FFF2-40B4-BE49-F238E27FC236}">
-                <a16:creationId xmlns:a16="http://schemas.microsoft.com/office/drawing/2014/main" id="{DAAE4CDD-124C-4DCF-9584-B6033B545DD5}"/>
+                <a16:creationId xmlns:a16="http://schemas.microsoft.com/office/drawing/2014/main" id="{6C4028FD-8BAA-4A19-BFDE-594D991B7552}"/>
               </a:ext>
               <a:ext uri="{C183D7F6-B498-43B3-948B-1728B52AA6E4}">
                 <adec:decorative xmlns:adec="http://schemas.microsoft.com/office/drawing/2017/decorative" val="1"/>
@@ -39847,85 +40662,11 @@
         <p:spPr>
           <a:xfrm>
             <a:off x="0" y="0"/>
-            <a:ext cx="3125454" cy="5143500"/>
+            <a:ext cx="9141713" cy="5143500"/>
           </a:xfrm>
-          <a:custGeom>
+          <a:prstGeom prst="rect">
             <a:avLst/>
-            <a:gdLst>
-              <a:gd name="connsiteX0" fmla="*/ 0 w 4167271"/>
-              <a:gd name="connsiteY0" fmla="*/ 0 h 6858000"/>
-              <a:gd name="connsiteX1" fmla="*/ 2259550 w 4167271"/>
-              <a:gd name="connsiteY1" fmla="*/ 0 h 6858000"/>
-              <a:gd name="connsiteX2" fmla="*/ 2387803 w 4167271"/>
-              <a:gd name="connsiteY2" fmla="*/ 82222 h 6858000"/>
-              <a:gd name="connsiteX3" fmla="*/ 4167271 w 4167271"/>
-              <a:gd name="connsiteY3" fmla="*/ 3429000 h 6858000"/>
-              <a:gd name="connsiteX4" fmla="*/ 2387803 w 4167271"/>
-              <a:gd name="connsiteY4" fmla="*/ 6775779 h 6858000"/>
-              <a:gd name="connsiteX5" fmla="*/ 2259550 w 4167271"/>
-              <a:gd name="connsiteY5" fmla="*/ 6858000 h 6858000"/>
-              <a:gd name="connsiteX6" fmla="*/ 0 w 4167271"/>
-              <a:gd name="connsiteY6" fmla="*/ 6858000 h 6858000"/>
-            </a:gdLst>
-            <a:ahLst/>
-            <a:cxnLst>
-              <a:cxn ang="0">
-                <a:pos x="connsiteX0" y="connsiteY0"/>
-              </a:cxn>
-              <a:cxn ang="0">
-                <a:pos x="connsiteX1" y="connsiteY1"/>
-              </a:cxn>
-              <a:cxn ang="0">
-                <a:pos x="connsiteX2" y="connsiteY2"/>
-              </a:cxn>
-              <a:cxn ang="0">
-                <a:pos x="connsiteX3" y="connsiteY3"/>
-              </a:cxn>
-              <a:cxn ang="0">
-                <a:pos x="connsiteX4" y="connsiteY4"/>
-              </a:cxn>
-              <a:cxn ang="0">
-                <a:pos x="connsiteX5" y="connsiteY5"/>
-              </a:cxn>
-              <a:cxn ang="0">
-                <a:pos x="connsiteX6" y="connsiteY6"/>
-              </a:cxn>
-            </a:cxnLst>
-            <a:rect l="l" t="t" r="r" b="b"/>
-            <a:pathLst>
-              <a:path w="4167271" h="6858000">
-                <a:moveTo>
-                  <a:pt x="0" y="0"/>
-                </a:moveTo>
-                <a:lnTo>
-                  <a:pt x="2259550" y="0"/>
-                </a:lnTo>
-                <a:lnTo>
-                  <a:pt x="2387803" y="82222"/>
-                </a:lnTo>
-                <a:cubicBezTo>
-                  <a:pt x="3461407" y="807534"/>
-                  <a:pt x="4167271" y="2035835"/>
-                  <a:pt x="4167271" y="3429000"/>
-                </a:cubicBezTo>
-                <a:cubicBezTo>
-                  <a:pt x="4167271" y="4822165"/>
-                  <a:pt x="3461407" y="6050467"/>
-                  <a:pt x="2387803" y="6775779"/>
-                </a:cubicBezTo>
-                <a:lnTo>
-                  <a:pt x="2259550" y="6858000"/>
-                </a:lnTo>
-                <a:lnTo>
-                  <a:pt x="0" y="6858000"/>
-                </a:lnTo>
-                <a:close/>
-              </a:path>
-            </a:pathLst>
-          </a:custGeom>
-          <a:solidFill>
-            <a:schemeClr val="accent2"/>
-          </a:solidFill>
+          </a:prstGeom>
           <a:ln>
             <a:noFill/>
           </a:ln>
@@ -39967,8 +40708,8 @@
         </p:nvSpPr>
         <p:spPr>
           <a:xfrm>
-            <a:off x="515125" y="865179"/>
-            <a:ext cx="2400300" cy="3345872"/>
+            <a:off x="628650" y="417746"/>
+            <a:ext cx="7886700" cy="850270"/>
           </a:xfrm>
         </p:spPr>
         <p:txBody>
@@ -39981,118 +40722,43 @@
               <a:buNone/>
             </a:pPr>
             <a:r>
-              <a:rPr lang="en-US">
-                <a:solidFill>
-                  <a:srgbClr val="FFFFFF"/>
-                </a:solidFill>
-              </a:rPr>
-              <a:t>Missing Data</a:t>
+              <a:rPr lang="en-US" sz="3900"/>
+              <a:t>Essential Functions in dplyr</a:t>
             </a:r>
           </a:p>
         </p:txBody>
       </p:sp>
-      <p:sp>
-        <p:nvSpPr>
-          <p:cNvPr id="12" name="Arc 11">
+      <p:graphicFrame>
+        <p:nvGraphicFramePr>
+          <p:cNvPr id="5" name="Content Placeholder 2">
             <a:extLst>
               <a:ext uri="{FF2B5EF4-FFF2-40B4-BE49-F238E27FC236}">
-                <a16:creationId xmlns:a16="http://schemas.microsoft.com/office/drawing/2014/main" id="{081E4A58-353D-44AE-B2FC-2A74E2E400F7}"/>
-              </a:ext>
-              <a:ext uri="{C183D7F6-B498-43B3-948B-1728B52AA6E4}">
-                <adec:decorative xmlns:adec="http://schemas.microsoft.com/office/drawing/2017/decorative" val="1"/>
+                <a16:creationId xmlns:a16="http://schemas.microsoft.com/office/drawing/2014/main" id="{D6488C6E-0712-38EE-0977-D423CEC330D4}"/>
               </a:ext>
             </a:extLst>
           </p:cNvPr>
-          <p:cNvSpPr>
-            <a:spLocks noGrp="1" noRot="1" noChangeAspect="1" noMove="1" noResize="1" noEditPoints="1" noAdjustHandles="1" noChangeArrowheads="1" noChangeShapeType="1" noTextEdit="1"/>
-          </p:cNvSpPr>
+          <p:cNvGraphicFramePr>
+            <a:graphicFrameLocks noGrp="1"/>
+          </p:cNvGraphicFramePr>
           <p:nvPr>
+            <p:ph idx="1"/>
             <p:extLst>
-              <p:ext uri="{386F3935-93C4-4BCD-93E2-E3B085C9AB24}">
-                <p16:designElem xmlns:p16="http://schemas.microsoft.com/office/powerpoint/2015/main" val="1"/>
+              <p:ext uri="{D42A27DB-BD31-4B8C-83A1-F6EECF244321}">
+                <p14:modId xmlns:p14="http://schemas.microsoft.com/office/powerpoint/2010/main" val="4102905987"/>
               </p:ext>
             </p:extLst>
           </p:nvPr>
-        </p:nvSpPr>
-        <p:spPr>
-          <a:xfrm flipV="1">
-            <a:off x="5662801" y="1841609"/>
-            <a:ext cx="3062575" cy="3062575"/>
-          </a:xfrm>
-          <a:prstGeom prst="arc">
-            <a:avLst/>
-          </a:prstGeom>
-          <a:ln w="127000" cap="rnd">
-            <a:solidFill>
-              <a:schemeClr val="accent4"/>
-            </a:solidFill>
-            <a:prstDash val="dash"/>
-          </a:ln>
-        </p:spPr>
-        <p:style>
-          <a:lnRef idx="1">
-            <a:schemeClr val="accent1"/>
-          </a:lnRef>
-          <a:fillRef idx="0">
-            <a:schemeClr val="accent1"/>
-          </a:fillRef>
-          <a:effectRef idx="0">
-            <a:schemeClr val="accent1"/>
-          </a:effectRef>
-          <a:fontRef idx="minor">
-            <a:schemeClr val="tx1"/>
-          </a:fontRef>
-        </p:style>
-        <p:txBody>
-          <a:bodyPr rtlCol="0" anchor="ctr"/>
-          <a:lstStyle/>
-          <a:p>
-            <a:pPr algn="ctr"/>
-            <a:endParaRPr lang="en-US" dirty="0"/>
-          </a:p>
-        </p:txBody>
-      </p:sp>
-      <p:sp>
-        <p:nvSpPr>
-          <p:cNvPr id="3" name="Content Placeholder 2"/>
-          <p:cNvSpPr>
-            <a:spLocks noGrp="1"/>
-          </p:cNvSpPr>
-          <p:nvPr>
-            <p:ph idx="1"/>
-          </p:nvPr>
-        </p:nvSpPr>
-        <p:spPr>
-          <a:xfrm>
-            <a:off x="3335481" y="443508"/>
-            <a:ext cx="5179868" cy="4189214"/>
-          </a:xfrm>
-        </p:spPr>
-        <p:txBody>
-          <a:bodyPr anchor="ctr">
-            <a:normAutofit/>
-          </a:bodyPr>
-          <a:lstStyle/>
-          <a:p>
-            <a:pPr lvl="0"/>
-            <a:r>
-              <a:t>complete.cases(df)</a:t>
-            </a:r>
-          </a:p>
-          <a:p>
-            <a:pPr lvl="0"/>
-            <a:r>
-              <a:t>is.na()</a:t>
-            </a:r>
-          </a:p>
-          <a:p>
-            <a:pPr lvl="0"/>
-            <a:r>
-              <a:t>replace_na</a:t>
-            </a:r>
-          </a:p>
-        </p:txBody>
-      </p:sp>
+        </p:nvGraphicFramePr>
+        <p:xfrm>
+          <a:off x="628650" y="1369218"/>
+          <a:ext cx="7886700" cy="3263504"/>
+        </p:xfrm>
+        <a:graphic>
+          <a:graphicData uri="http://schemas.openxmlformats.org/drawingml/2006/diagram">
+            <dgm:relIds xmlns:dgm="http://schemas.openxmlformats.org/drawingml/2006/diagram" xmlns:r="http://schemas.openxmlformats.org/officeDocument/2006/relationships" r:dm="rId2" r:lo="rId3" r:qs="rId4" r:cs="rId5"/>
+          </a:graphicData>
+        </a:graphic>
+      </p:graphicFrame>
     </p:spTree>
   </p:cSld>
   <p:clrMapOvr>
@@ -41154,7 +41820,7 @@
 </p:sld>
 </file>
 
-<file path=ppt/slides/slide32.xml><?xml version="1.0" encoding="utf-8"?>
+<file path=ppt/slides/slide4.xml><?xml version="1.0" encoding="utf-8"?>
 <p:sld xmlns:a="http://schemas.openxmlformats.org/drawingml/2006/main" xmlns:r="http://schemas.openxmlformats.org/officeDocument/2006/relationships" xmlns:p="http://schemas.openxmlformats.org/presentationml/2006/main">
   <p:cSld>
     <p:bg>
@@ -41181,10 +41847,10 @@
       </p:grpSpPr>
       <p:sp useBgFill="1">
         <p:nvSpPr>
-          <p:cNvPr id="9" name="Rectangle 8">
+          <p:cNvPr id="27" name="Rectangle 26">
             <a:extLst>
               <a:ext uri="{FF2B5EF4-FFF2-40B4-BE49-F238E27FC236}">
-                <a16:creationId xmlns:a16="http://schemas.microsoft.com/office/drawing/2014/main" id="{2C61293E-6EBE-43EF-A52C-9BEBFD7679D4}"/>
+                <a16:creationId xmlns:a16="http://schemas.microsoft.com/office/drawing/2014/main" id="{743AA782-23D1-4521-8CAD-47662984AA08}"/>
               </a:ext>
               <a:ext uri="{C183D7F6-B498-43B3-948B-1728B52AA6E4}">
                 <adec:decorative xmlns:adec="http://schemas.microsoft.com/office/drawing/2017/decorative" val="1"/>
@@ -41205,7 +41871,7 @@
         <p:spPr>
           <a:xfrm>
             <a:off x="0" y="0"/>
-            <a:ext cx="9141714" cy="5143500"/>
+            <a:ext cx="9144000" cy="5143500"/>
           </a:xfrm>
           <a:prstGeom prst="rect">
             <a:avLst/>
@@ -41241,7 +41907,13 @@
       </p:sp>
       <p:sp>
         <p:nvSpPr>
-          <p:cNvPr id="2" name="Title 1"/>
+          <p:cNvPr id="2" name="Title 1">
+            <a:extLst>
+              <a:ext uri="{FF2B5EF4-FFF2-40B4-BE49-F238E27FC236}">
+                <a16:creationId xmlns:a16="http://schemas.microsoft.com/office/drawing/2014/main" id="{21EA1C47-C75E-2DA0-A8CB-156191345359}"/>
+              </a:ext>
+            </a:extLst>
+          </p:cNvPr>
           <p:cNvSpPr>
             <a:spLocks noGrp="1"/>
           </p:cNvSpPr>
@@ -41251,175 +41923,41 @@
         </p:nvSpPr>
         <p:spPr>
           <a:xfrm>
-            <a:off x="3973321" y="246888"/>
-            <a:ext cx="4688333" cy="1337310"/>
+            <a:off x="473202" y="480060"/>
+            <a:ext cx="3614166" cy="1110996"/>
           </a:xfrm>
         </p:spPr>
         <p:txBody>
-          <a:bodyPr anchor="b">
+          <a:bodyPr vert="horz" lIns="91440" tIns="45720" rIns="91440" bIns="45720" rtlCol="0" anchor="b">
             <a:normAutofit/>
           </a:bodyPr>
           <a:lstStyle/>
           <a:p>
-            <a:pPr marL="0" lvl="0" indent="0">
-              <a:buNone/>
+            <a:pPr algn="l" defTabSz="914400">
+              <a:lnSpc>
+                <a:spcPct val="90000"/>
+              </a:lnSpc>
             </a:pPr>
             <a:r>
-              <a:rPr lang="en-US" sz="4100"/>
-              <a:t>Basketball Example</a:t>
+              <a:rPr lang="en-US" sz="3500" kern="1200">
+                <a:solidFill>
+                  <a:schemeClr val="tx1"/>
+                </a:solidFill>
+                <a:latin typeface="+mj-lt"/>
+                <a:ea typeface="+mj-ea"/>
+                <a:cs typeface="+mj-cs"/>
+              </a:rPr>
+              <a:t>Download GitHub Desktop</a:t>
             </a:r>
           </a:p>
         </p:txBody>
       </p:sp>
-      <p:pic>
-        <p:nvPicPr>
-          <p:cNvPr id="5" name="Picture 4" descr="Basketball going into hoop against sky">
+      <p:sp>
+        <p:nvSpPr>
+          <p:cNvPr id="29" name="sketch line">
             <a:extLst>
               <a:ext uri="{FF2B5EF4-FFF2-40B4-BE49-F238E27FC236}">
-                <a16:creationId xmlns:a16="http://schemas.microsoft.com/office/drawing/2014/main" id="{0F42BA01-83FE-9885-7FC3-2C2AF9080E6C}"/>
-              </a:ext>
-            </a:extLst>
-          </p:cNvPr>
-          <p:cNvPicPr>
-            <a:picLocks noChangeAspect="1"/>
-          </p:cNvPicPr>
-          <p:nvPr/>
-        </p:nvPicPr>
-        <p:blipFill>
-          <a:blip r:embed="rId2"/>
-          <a:srcRect l="8906" r="40161"/>
-          <a:stretch>
-            <a:fillRect/>
-          </a:stretch>
-        </p:blipFill>
-        <p:spPr>
-          <a:xfrm>
-            <a:off x="20" y="10"/>
-            <a:ext cx="3492988" cy="5143490"/>
-          </a:xfrm>
-          <a:custGeom>
-            <a:avLst/>
-            <a:gdLst/>
-            <a:ahLst/>
-            <a:cxnLst/>
-            <a:rect l="l" t="t" r="r" b="b"/>
-            <a:pathLst>
-              <a:path w="4657344" h="6858000">
-                <a:moveTo>
-                  <a:pt x="0" y="0"/>
-                </a:moveTo>
-                <a:lnTo>
-                  <a:pt x="3429755" y="0"/>
-                </a:lnTo>
-                <a:lnTo>
-                  <a:pt x="3526016" y="148742"/>
-                </a:lnTo>
-                <a:cubicBezTo>
-                  <a:pt x="3657740" y="365513"/>
-                  <a:pt x="3777402" y="589569"/>
-                  <a:pt x="3886489" y="819975"/>
-                </a:cubicBezTo>
-                <a:cubicBezTo>
-                  <a:pt x="3891856" y="833492"/>
-                  <a:pt x="3900663" y="845393"/>
-                  <a:pt x="3912049" y="854514"/>
-                </a:cubicBezTo>
-                <a:cubicBezTo>
-                  <a:pt x="3897352" y="819849"/>
-                  <a:pt x="3883037" y="784928"/>
-                  <a:pt x="3868083" y="750263"/>
-                </a:cubicBezTo>
-                <a:cubicBezTo>
-                  <a:pt x="3806989" y="608712"/>
-                  <a:pt x="3742478" y="469145"/>
-                  <a:pt x="3674155" y="331786"/>
-                </a:cubicBezTo>
-                <a:lnTo>
-                  <a:pt x="3496656" y="0"/>
-                </a:lnTo>
-                <a:lnTo>
-                  <a:pt x="3554371" y="0"/>
-                </a:lnTo>
-                <a:lnTo>
-                  <a:pt x="3661621" y="196614"/>
-                </a:lnTo>
-                <a:cubicBezTo>
-                  <a:pt x="3856899" y="573253"/>
-                  <a:pt x="4021071" y="966066"/>
-                  <a:pt x="4161279" y="1371196"/>
-                </a:cubicBezTo>
-                <a:cubicBezTo>
-                  <a:pt x="4379525" y="2007265"/>
-                  <a:pt x="4530141" y="2664286"/>
-                  <a:pt x="4610660" y="3331516"/>
-                </a:cubicBezTo>
-                <a:cubicBezTo>
-                  <a:pt x="4652837" y="3672965"/>
-                  <a:pt x="4671625" y="4013908"/>
-                  <a:pt x="4645040" y="4357388"/>
-                </a:cubicBezTo>
-                <a:cubicBezTo>
-                  <a:pt x="4613599" y="4758899"/>
-                  <a:pt x="4566181" y="5157998"/>
-                  <a:pt x="4485789" y="5552906"/>
-                </a:cubicBezTo>
-                <a:cubicBezTo>
-                  <a:pt x="4397121" y="5988893"/>
-                  <a:pt x="4276748" y="6414594"/>
-                  <a:pt x="4117769" y="6828295"/>
-                </a:cubicBezTo>
-                <a:lnTo>
-                  <a:pt x="4105288" y="6858000"/>
-                </a:lnTo>
-                <a:lnTo>
-                  <a:pt x="4052520" y="6858000"/>
-                </a:lnTo>
-                <a:lnTo>
-                  <a:pt x="4059369" y="6841549"/>
-                </a:lnTo>
-                <a:cubicBezTo>
-                  <a:pt x="4147276" y="6614016"/>
-                  <a:pt x="4224193" y="6380817"/>
-                  <a:pt x="4291518" y="6142729"/>
-                </a:cubicBezTo>
-                <a:cubicBezTo>
-                  <a:pt x="4350055" y="5935370"/>
-                  <a:pt x="4393256" y="5723695"/>
-                  <a:pt x="4443357" y="5513923"/>
-                </a:cubicBezTo>
-                <a:cubicBezTo>
-                  <a:pt x="4444541" y="5502788"/>
-                  <a:pt x="4445137" y="5491601"/>
-                  <a:pt x="4445146" y="5480401"/>
-                </a:cubicBezTo>
-                <a:cubicBezTo>
-                  <a:pt x="4408465" y="5607635"/>
-                  <a:pt x="4379196" y="5719759"/>
-                  <a:pt x="4344559" y="5830359"/>
-                </a:cubicBezTo>
-                <a:cubicBezTo>
-                  <a:pt x="4254261" y="6118381"/>
-                  <a:pt x="4150112" y="6398531"/>
-                  <a:pt x="4031702" y="6670527"/>
-                </a:cubicBezTo>
-                <a:lnTo>
-                  <a:pt x="3943824" y="6858000"/>
-                </a:lnTo>
-                <a:lnTo>
-                  <a:pt x="0" y="6858000"/>
-                </a:lnTo>
-                <a:close/>
-              </a:path>
-            </a:pathLst>
-          </a:custGeom>
-        </p:spPr>
-      </p:pic>
-      <p:sp>
-        <p:nvSpPr>
-          <p:cNvPr id="11" name="sketchy line">
-            <a:extLst>
-              <a:ext uri="{FF2B5EF4-FFF2-40B4-BE49-F238E27FC236}">
-                <a16:creationId xmlns:a16="http://schemas.microsoft.com/office/drawing/2014/main" id="{21540236-BFD5-4A9D-8840-4703E7F76825}"/>
+                <a16:creationId xmlns:a16="http://schemas.microsoft.com/office/drawing/2014/main" id="{71877DBC-BB60-40F0-AC93-2ACDBAAE60CE}"/>
               </a:ext>
               <a:ext uri="{C183D7F6-B498-43B3-948B-1728B52AA6E4}">
                 <adec:decorative xmlns:adec="http://schemas.microsoft.com/office/drawing/2017/decorative" val="1"/>
@@ -41439,38 +41977,34 @@
         </p:nvSpPr>
         <p:spPr>
           <a:xfrm>
-            <a:off x="3973321" y="1781210"/>
-            <a:ext cx="3182692" cy="13716"/>
+            <a:off x="482458" y="1779651"/>
+            <a:ext cx="2441321" cy="13716"/>
           </a:xfrm>
           <a:custGeom>
             <a:avLst/>
             <a:gdLst>
-              <a:gd name="csX0" fmla="*/ 0 w 3182692"/>
+              <a:gd name="csX0" fmla="*/ 0 w 2441321"/>
               <a:gd name="csY0" fmla="*/ 0 h 13716"/>
-              <a:gd name="csX1" fmla="*/ 636538 w 3182692"/>
+              <a:gd name="csX1" fmla="*/ 585917 w 2441321"/>
               <a:gd name="csY1" fmla="*/ 0 h 13716"/>
-              <a:gd name="csX2" fmla="*/ 1273077 w 3182692"/>
+              <a:gd name="csX2" fmla="*/ 1196247 w 2441321"/>
               <a:gd name="csY2" fmla="*/ 0 h 13716"/>
-              <a:gd name="csX3" fmla="*/ 1909615 w 3182692"/>
+              <a:gd name="csX3" fmla="*/ 1806578 w 2441321"/>
               <a:gd name="csY3" fmla="*/ 0 h 13716"/>
-              <a:gd name="csX4" fmla="*/ 2482500 w 3182692"/>
+              <a:gd name="csX4" fmla="*/ 2441321 w 2441321"/>
               <a:gd name="csY4" fmla="*/ 0 h 13716"/>
-              <a:gd name="csX5" fmla="*/ 3182692 w 3182692"/>
-              <a:gd name="csY5" fmla="*/ 0 h 13716"/>
-              <a:gd name="csX6" fmla="*/ 3182692 w 3182692"/>
+              <a:gd name="csX5" fmla="*/ 2441321 w 2441321"/>
+              <a:gd name="csY5" fmla="*/ 13716 h 13716"/>
+              <a:gd name="csX6" fmla="*/ 1830991 w 2441321"/>
               <a:gd name="csY6" fmla="*/ 13716 h 13716"/>
-              <a:gd name="csX7" fmla="*/ 2609807 w 3182692"/>
+              <a:gd name="csX7" fmla="*/ 1269487 w 2441321"/>
               <a:gd name="csY7" fmla="*/ 13716 h 13716"/>
-              <a:gd name="csX8" fmla="*/ 2068750 w 3182692"/>
+              <a:gd name="csX8" fmla="*/ 707983 w 2441321"/>
               <a:gd name="csY8" fmla="*/ 13716 h 13716"/>
-              <a:gd name="csX9" fmla="*/ 1432211 w 3182692"/>
+              <a:gd name="csX9" fmla="*/ 0 w 2441321"/>
               <a:gd name="csY9" fmla="*/ 13716 h 13716"/>
-              <a:gd name="csX10" fmla="*/ 859327 w 3182692"/>
-              <a:gd name="csY10" fmla="*/ 13716 h 13716"/>
-              <a:gd name="csX11" fmla="*/ 0 w 3182692"/>
-              <a:gd name="csY11" fmla="*/ 13716 h 13716"/>
-              <a:gd name="csX12" fmla="*/ 0 w 3182692"/>
-              <a:gd name="csY12" fmla="*/ 0 h 13716"/>
+              <a:gd name="csX10" fmla="*/ 0 w 2441321"/>
+              <a:gd name="csY10" fmla="*/ 0 h 13716"/>
             </a:gdLst>
             <a:ahLst/>
             <a:cxnLst>
@@ -41507,143 +42041,117 @@
               <a:cxn ang="0">
                 <a:pos x="csX10" y="csY10"/>
               </a:cxn>
-              <a:cxn ang="0">
-                <a:pos x="csX11" y="csY11"/>
-              </a:cxn>
-              <a:cxn ang="0">
-                <a:pos x="csX12" y="csY12"/>
-              </a:cxn>
             </a:cxnLst>
             <a:rect l="l" t="t" r="r" b="b"/>
             <a:pathLst>
-              <a:path w="3182692" h="13716" fill="none" extrusionOk="0">
+              <a:path w="2441321" h="13716" fill="none" extrusionOk="0">
                 <a:moveTo>
                   <a:pt x="0" y="0"/>
                 </a:moveTo>
                 <a:cubicBezTo>
-                  <a:pt x="253588" y="25878"/>
-                  <a:pt x="409323" y="-5359"/>
-                  <a:pt x="636538" y="0"/>
-                </a:cubicBezTo>
-                <a:cubicBezTo>
-                  <a:pt x="863753" y="5359"/>
-                  <a:pt x="1007727" y="-28"/>
-                  <a:pt x="1273077" y="0"/>
-                </a:cubicBezTo>
-                <a:cubicBezTo>
-                  <a:pt x="1538427" y="28"/>
-                  <a:pt x="1698640" y="-12775"/>
-                  <a:pt x="1909615" y="0"/>
-                </a:cubicBezTo>
-                <a:cubicBezTo>
-                  <a:pt x="2120590" y="12775"/>
-                  <a:pt x="2210293" y="-21823"/>
-                  <a:pt x="2482500" y="0"/>
-                </a:cubicBezTo>
-                <a:cubicBezTo>
-                  <a:pt x="2754708" y="21823"/>
-                  <a:pt x="3004133" y="-28750"/>
-                  <a:pt x="3182692" y="0"/>
-                </a:cubicBezTo>
-                <a:cubicBezTo>
-                  <a:pt x="3182906" y="4075"/>
-                  <a:pt x="3183008" y="9784"/>
-                  <a:pt x="3182692" y="13716"/>
-                </a:cubicBezTo>
-                <a:cubicBezTo>
-                  <a:pt x="2947402" y="17868"/>
-                  <a:pt x="2876226" y="22619"/>
-                  <a:pt x="2609807" y="13716"/>
-                </a:cubicBezTo>
-                <a:cubicBezTo>
-                  <a:pt x="2343389" y="4813"/>
-                  <a:pt x="2326689" y="21007"/>
-                  <a:pt x="2068750" y="13716"/>
-                </a:cubicBezTo>
-                <a:cubicBezTo>
-                  <a:pt x="1810811" y="6425"/>
-                  <a:pt x="1713836" y="43647"/>
-                  <a:pt x="1432211" y="13716"/>
-                </a:cubicBezTo>
-                <a:cubicBezTo>
-                  <a:pt x="1150586" y="-16215"/>
-                  <a:pt x="982765" y="-825"/>
-                  <a:pt x="859327" y="13716"/>
-                </a:cubicBezTo>
-                <a:cubicBezTo>
-                  <a:pt x="735889" y="28257"/>
-                  <a:pt x="254183" y="30659"/>
+                  <a:pt x="273217" y="-17533"/>
+                  <a:pt x="355785" y="-4171"/>
+                  <a:pt x="585917" y="0"/>
+                </a:cubicBezTo>
+                <a:cubicBezTo>
+                  <a:pt x="816049" y="4171"/>
+                  <a:pt x="991446" y="-9419"/>
+                  <a:pt x="1196247" y="0"/>
+                </a:cubicBezTo>
+                <a:cubicBezTo>
+                  <a:pt x="1401048" y="9419"/>
+                  <a:pt x="1589984" y="-731"/>
+                  <a:pt x="1806578" y="0"/>
+                </a:cubicBezTo>
+                <a:cubicBezTo>
+                  <a:pt x="2023172" y="731"/>
+                  <a:pt x="2247754" y="8393"/>
+                  <a:pt x="2441321" y="0"/>
+                </a:cubicBezTo>
+                <a:cubicBezTo>
+                  <a:pt x="2440939" y="4363"/>
+                  <a:pt x="2441580" y="8857"/>
+                  <a:pt x="2441321" y="13716"/>
+                </a:cubicBezTo>
+                <a:cubicBezTo>
+                  <a:pt x="2169723" y="25934"/>
+                  <a:pt x="2045712" y="34568"/>
+                  <a:pt x="1830991" y="13716"/>
+                </a:cubicBezTo>
+                <a:cubicBezTo>
+                  <a:pt x="1616270" y="-7136"/>
+                  <a:pt x="1505876" y="-623"/>
+                  <a:pt x="1269487" y="13716"/>
+                </a:cubicBezTo>
+                <a:cubicBezTo>
+                  <a:pt x="1033098" y="28055"/>
+                  <a:pt x="908661" y="36619"/>
+                  <a:pt x="707983" y="13716"/>
+                </a:cubicBezTo>
+                <a:cubicBezTo>
+                  <a:pt x="507305" y="-9187"/>
+                  <a:pt x="333592" y="16187"/>
                   <a:pt x="0" y="13716"/>
                 </a:cubicBezTo>
                 <a:cubicBezTo>
-                  <a:pt x="-535" y="8247"/>
-                  <a:pt x="-201" y="2959"/>
+                  <a:pt x="-459" y="8317"/>
+                  <a:pt x="190" y="2744"/>
                   <a:pt x="0" y="0"/>
                 </a:cubicBezTo>
                 <a:close/>
               </a:path>
-              <a:path w="3182692" h="13716" stroke="0" extrusionOk="0">
+              <a:path w="2441321" h="13716" stroke="0" extrusionOk="0">
                 <a:moveTo>
                   <a:pt x="0" y="0"/>
                 </a:moveTo>
                 <a:cubicBezTo>
-                  <a:pt x="243108" y="-22426"/>
-                  <a:pt x="387854" y="22949"/>
-                  <a:pt x="572885" y="0"/>
-                </a:cubicBezTo>
-                <a:cubicBezTo>
-                  <a:pt x="757916" y="-22949"/>
-                  <a:pt x="923707" y="6797"/>
-                  <a:pt x="1113942" y="0"/>
-                </a:cubicBezTo>
-                <a:cubicBezTo>
-                  <a:pt x="1304177" y="-6797"/>
-                  <a:pt x="1495991" y="20627"/>
-                  <a:pt x="1686827" y="0"/>
-                </a:cubicBezTo>
-                <a:cubicBezTo>
-                  <a:pt x="1877663" y="-20627"/>
-                  <a:pt x="2170182" y="-20672"/>
-                  <a:pt x="2323365" y="0"/>
-                </a:cubicBezTo>
-                <a:cubicBezTo>
-                  <a:pt x="2476548" y="20672"/>
-                  <a:pt x="2919164" y="6097"/>
-                  <a:pt x="3182692" y="0"/>
-                </a:cubicBezTo>
-                <a:cubicBezTo>
-                  <a:pt x="3182126" y="5320"/>
-                  <a:pt x="3182368" y="9001"/>
-                  <a:pt x="3182692" y="13716"/>
-                </a:cubicBezTo>
-                <a:cubicBezTo>
-                  <a:pt x="3026065" y="-15421"/>
-                  <a:pt x="2775006" y="18495"/>
-                  <a:pt x="2546154" y="13716"/>
-                </a:cubicBezTo>
-                <a:cubicBezTo>
-                  <a:pt x="2317302" y="8937"/>
-                  <a:pt x="2168173" y="-13085"/>
-                  <a:pt x="1845961" y="13716"/>
-                </a:cubicBezTo>
-                <a:cubicBezTo>
-                  <a:pt x="1523749" y="40517"/>
-                  <a:pt x="1450078" y="-5416"/>
-                  <a:pt x="1304904" y="13716"/>
-                </a:cubicBezTo>
-                <a:cubicBezTo>
-                  <a:pt x="1159730" y="32848"/>
-                  <a:pt x="942635" y="-14593"/>
-                  <a:pt x="604711" y="13716"/>
-                </a:cubicBezTo>
-                <a:cubicBezTo>
-                  <a:pt x="266787" y="42025"/>
-                  <a:pt x="141927" y="-12967"/>
+                  <a:pt x="207071" y="-14617"/>
+                  <a:pt x="444194" y="-15606"/>
+                  <a:pt x="585917" y="0"/>
+                </a:cubicBezTo>
+                <a:cubicBezTo>
+                  <a:pt x="727640" y="15606"/>
+                  <a:pt x="904326" y="-79"/>
+                  <a:pt x="1123008" y="0"/>
+                </a:cubicBezTo>
+                <a:cubicBezTo>
+                  <a:pt x="1341690" y="79"/>
+                  <a:pt x="1600014" y="10401"/>
+                  <a:pt x="1782164" y="0"/>
+                </a:cubicBezTo>
+                <a:cubicBezTo>
+                  <a:pt x="1964314" y="-10401"/>
+                  <a:pt x="2143537" y="-21488"/>
+                  <a:pt x="2441321" y="0"/>
+                </a:cubicBezTo>
+                <a:cubicBezTo>
+                  <a:pt x="2441507" y="3335"/>
+                  <a:pt x="2441322" y="9457"/>
+                  <a:pt x="2441321" y="13716"/>
+                </a:cubicBezTo>
+                <a:cubicBezTo>
+                  <a:pt x="2166745" y="24201"/>
+                  <a:pt x="2078726" y="10904"/>
+                  <a:pt x="1879817" y="13716"/>
+                </a:cubicBezTo>
+                <a:cubicBezTo>
+                  <a:pt x="1680908" y="16528"/>
+                  <a:pt x="1548770" y="-8699"/>
+                  <a:pt x="1318313" y="13716"/>
+                </a:cubicBezTo>
+                <a:cubicBezTo>
+                  <a:pt x="1087856" y="36131"/>
+                  <a:pt x="894613" y="-645"/>
+                  <a:pt x="659157" y="13716"/>
+                </a:cubicBezTo>
+                <a:cubicBezTo>
+                  <a:pt x="423701" y="28077"/>
+                  <a:pt x="246611" y="29403"/>
                   <a:pt x="0" y="13716"/>
                 </a:cubicBezTo>
                 <a:cubicBezTo>
-                  <a:pt x="58" y="7834"/>
-                  <a:pt x="453" y="5833"/>
+                  <a:pt x="-120" y="7867"/>
+                  <a:pt x="674" y="3919"/>
                   <a:pt x="0" y="0"/>
                 </a:cubicBezTo>
                 <a:close/>
@@ -41653,365 +42161,7 @@
           <a:solidFill>
             <a:schemeClr val="accent2"/>
           </a:solidFill>
-          <a:ln w="44450" cap="rnd">
-            <a:solidFill>
-              <a:schemeClr val="accent2"/>
-            </a:solidFill>
-            <a:round/>
-            <a:extLst>
-              <a:ext uri="{C807C97D-BFC1-408E-A445-0C87EB9F89A2}">
-                <ask:lineSketchStyleProps xmlns:ask="http://schemas.microsoft.com/office/drawing/2018/sketchyshapes" sd="2727557108">
-                  <a:prstGeom prst="rect">
-                    <a:avLst/>
-                  </a:prstGeom>
-                  <ask:type>
-                    <ask:lineSketchFreehand/>
-                  </ask:type>
-                </ask:lineSketchStyleProps>
-              </a:ext>
-            </a:extLst>
-          </a:ln>
-        </p:spPr>
-        <p:style>
-          <a:lnRef idx="2">
-            <a:schemeClr val="accent1">
-              <a:shade val="50000"/>
-            </a:schemeClr>
-          </a:lnRef>
-          <a:fillRef idx="1">
-            <a:schemeClr val="accent1"/>
-          </a:fillRef>
-          <a:effectRef idx="0">
-            <a:schemeClr val="accent1"/>
-          </a:effectRef>
-          <a:fontRef idx="minor">
-            <a:schemeClr val="lt1"/>
-          </a:fontRef>
-        </p:style>
-        <p:txBody>
-          <a:bodyPr rtlCol="0" anchor="ctr"/>
-          <a:lstStyle/>
-          <a:p>
-            <a:pPr algn="ctr"/>
-            <a:endParaRPr lang="en-US"/>
-          </a:p>
-        </p:txBody>
-      </p:sp>
-      <p:sp>
-        <p:nvSpPr>
-          <p:cNvPr id="3" name="Content Placeholder 2"/>
-          <p:cNvSpPr>
-            <a:spLocks noGrp="1"/>
-          </p:cNvSpPr>
-          <p:nvPr>
-            <p:ph idx="1"/>
-          </p:nvPr>
-        </p:nvSpPr>
-        <p:spPr>
-          <a:xfrm>
-            <a:off x="3973321" y="2029968"/>
-            <a:ext cx="4688333" cy="2612898"/>
-          </a:xfrm>
-        </p:spPr>
-        <p:txBody>
-          <a:bodyPr>
-            <a:normAutofit/>
-          </a:bodyPr>
-          <a:lstStyle/>
-          <a:p>
-            <a:pPr marL="0" lvl="0" indent="0">
-              <a:buNone/>
-            </a:pPr>
-            <a:r>
-              <a:rPr lang="en-US" sz="1700"/>
-              <a:t>Example can be found in Murach’s R for Data Analysis Book by Scott McCoy</a:t>
-            </a:r>
-          </a:p>
-        </p:txBody>
-      </p:sp>
-    </p:spTree>
-  </p:cSld>
-  <p:clrMapOvr>
-    <a:masterClrMapping/>
-  </p:clrMapOvr>
-</p:sld>
-</file>
-
-<file path=ppt/slides/slide4.xml><?xml version="1.0" encoding="utf-8"?>
-<p:sld xmlns:a="http://schemas.openxmlformats.org/drawingml/2006/main" xmlns:r="http://schemas.openxmlformats.org/officeDocument/2006/relationships" xmlns:p="http://schemas.openxmlformats.org/presentationml/2006/main">
-  <p:cSld>
-    <p:bg>
-      <p:bgPr>
-        <a:solidFill>
-          <a:schemeClr val="bg1"/>
-        </a:solidFill>
-        <a:effectLst/>
-      </p:bgPr>
-    </p:bg>
-    <p:spTree>
-      <p:nvGrpSpPr>
-        <p:cNvPr id="1" name=""/>
-        <p:cNvGrpSpPr/>
-        <p:nvPr/>
-      </p:nvGrpSpPr>
-      <p:grpSpPr>
-        <a:xfrm>
-          <a:off x="0" y="0"/>
-          <a:ext cx="0" cy="0"/>
-          <a:chOff x="0" y="0"/>
-          <a:chExt cx="0" cy="0"/>
-        </a:xfrm>
-      </p:grpSpPr>
-      <p:sp useBgFill="1">
-        <p:nvSpPr>
-          <p:cNvPr id="20" name="Rectangle 19">
-            <a:extLst>
-              <a:ext uri="{FF2B5EF4-FFF2-40B4-BE49-F238E27FC236}">
-                <a16:creationId xmlns:a16="http://schemas.microsoft.com/office/drawing/2014/main" id="{69D47016-023F-44BD-981C-50E7A10A6609}"/>
-              </a:ext>
-              <a:ext uri="{C183D7F6-B498-43B3-948B-1728B52AA6E4}">
-                <adec:decorative xmlns:adec="http://schemas.microsoft.com/office/drawing/2017/decorative" val="1"/>
-              </a:ext>
-            </a:extLst>
-          </p:cNvPr>
-          <p:cNvSpPr>
-            <a:spLocks noGrp="1" noRot="1" noChangeAspect="1" noMove="1" noResize="1" noEditPoints="1" noAdjustHandles="1" noChangeArrowheads="1" noChangeShapeType="1" noTextEdit="1"/>
-          </p:cNvSpPr>
-          <p:nvPr>
-            <p:extLst>
-              <p:ext uri="{386F3935-93C4-4BCD-93E2-E3B085C9AB24}">
-                <p16:designElem xmlns:p16="http://schemas.microsoft.com/office/powerpoint/2015/main" val="1"/>
-              </p:ext>
-            </p:extLst>
-          </p:nvPr>
-        </p:nvSpPr>
-        <p:spPr>
-          <a:xfrm>
-            <a:off x="0" y="0"/>
-            <a:ext cx="9141714" cy="5143500"/>
-          </a:xfrm>
-          <a:prstGeom prst="rect">
-            <a:avLst/>
-          </a:prstGeom>
-          <a:ln>
-            <a:noFill/>
-          </a:ln>
-        </p:spPr>
-        <p:style>
-          <a:lnRef idx="2">
-            <a:schemeClr val="accent1">
-              <a:shade val="50000"/>
-            </a:schemeClr>
-          </a:lnRef>
-          <a:fillRef idx="1">
-            <a:schemeClr val="accent1"/>
-          </a:fillRef>
-          <a:effectRef idx="0">
-            <a:schemeClr val="accent1"/>
-          </a:effectRef>
-          <a:fontRef idx="minor">
-            <a:schemeClr val="lt1"/>
-          </a:fontRef>
-        </p:style>
-        <p:txBody>
-          <a:bodyPr rtlCol="0" anchor="ctr"/>
-          <a:lstStyle/>
-          <a:p>
-            <a:pPr algn="ctr"/>
-            <a:endParaRPr lang="en-US" dirty="0"/>
-          </a:p>
-        </p:txBody>
-      </p:sp>
-      <p:sp>
-        <p:nvSpPr>
-          <p:cNvPr id="2" name="Title 1">
-            <a:extLst>
-              <a:ext uri="{FF2B5EF4-FFF2-40B4-BE49-F238E27FC236}">
-                <a16:creationId xmlns:a16="http://schemas.microsoft.com/office/drawing/2014/main" id="{21EA1C47-C75E-2DA0-A8CB-156191345359}"/>
-              </a:ext>
-            </a:extLst>
-          </p:cNvPr>
-          <p:cNvSpPr>
-            <a:spLocks noGrp="1"/>
-          </p:cNvSpPr>
-          <p:nvPr>
-            <p:ph type="title"/>
-          </p:nvPr>
-        </p:nvSpPr>
-        <p:spPr>
-          <a:xfrm>
-            <a:off x="473202" y="342900"/>
-            <a:ext cx="3257550" cy="1447038"/>
-          </a:xfrm>
-        </p:spPr>
-        <p:txBody>
-          <a:bodyPr vert="horz" lIns="91440" tIns="45720" rIns="91440" bIns="45720" rtlCol="0" anchor="ctr">
-            <a:normAutofit/>
-          </a:bodyPr>
-          <a:lstStyle/>
-          <a:p>
-            <a:pPr algn="l" defTabSz="914400">
-              <a:lnSpc>
-                <a:spcPct val="90000"/>
-              </a:lnSpc>
-            </a:pPr>
-            <a:r>
-              <a:rPr lang="en-US" sz="3600"/>
-              <a:t>Download GitHub Desktop</a:t>
-            </a:r>
-          </a:p>
-        </p:txBody>
-      </p:sp>
-      <p:sp>
-        <p:nvSpPr>
-          <p:cNvPr id="22" name="sketchy line">
-            <a:extLst>
-              <a:ext uri="{FF2B5EF4-FFF2-40B4-BE49-F238E27FC236}">
-                <a16:creationId xmlns:a16="http://schemas.microsoft.com/office/drawing/2014/main" id="{6D8B37B0-0682-433E-BC8D-498C04ABD9A7}"/>
-              </a:ext>
-              <a:ext uri="{C183D7F6-B498-43B3-948B-1728B52AA6E4}">
-                <adec:decorative xmlns:adec="http://schemas.microsoft.com/office/drawing/2017/decorative" val="1"/>
-              </a:ext>
-            </a:extLst>
-          </p:cNvPr>
-          <p:cNvSpPr>
-            <a:spLocks noGrp="1" noRot="1" noChangeAspect="1" noMove="1" noResize="1" noEditPoints="1" noAdjustHandles="1" noChangeArrowheads="1" noChangeShapeType="1" noTextEdit="1"/>
-          </p:cNvSpPr>
-          <p:nvPr>
-            <p:extLst>
-              <p:ext uri="{386F3935-93C4-4BCD-93E2-E3B085C9AB24}">
-                <p16:designElem xmlns:p16="http://schemas.microsoft.com/office/powerpoint/2015/main" val="1"/>
-              </p:ext>
-            </p:extLst>
-          </p:nvPr>
-        </p:nvSpPr>
-        <p:spPr>
-          <a:xfrm rot="5400000">
-            <a:off x="3353561" y="1059561"/>
-            <a:ext cx="1165860" cy="13716"/>
-          </a:xfrm>
-          <a:custGeom>
-            <a:avLst/>
-            <a:gdLst>
-              <a:gd name="csX0" fmla="*/ 0 w 1165860"/>
-              <a:gd name="csY0" fmla="*/ 0 h 13716"/>
-              <a:gd name="csX1" fmla="*/ 606247 w 1165860"/>
-              <a:gd name="csY1" fmla="*/ 0 h 13716"/>
-              <a:gd name="csX2" fmla="*/ 1165860 w 1165860"/>
-              <a:gd name="csY2" fmla="*/ 0 h 13716"/>
-              <a:gd name="csX3" fmla="*/ 1165860 w 1165860"/>
-              <a:gd name="csY3" fmla="*/ 13716 h 13716"/>
-              <a:gd name="csX4" fmla="*/ 594589 w 1165860"/>
-              <a:gd name="csY4" fmla="*/ 13716 h 13716"/>
-              <a:gd name="csX5" fmla="*/ 0 w 1165860"/>
-              <a:gd name="csY5" fmla="*/ 13716 h 13716"/>
-              <a:gd name="csX6" fmla="*/ 0 w 1165860"/>
-              <a:gd name="csY6" fmla="*/ 0 h 13716"/>
-            </a:gdLst>
-            <a:ahLst/>
-            <a:cxnLst>
-              <a:cxn ang="0">
-                <a:pos x="csX0" y="csY0"/>
-              </a:cxn>
-              <a:cxn ang="0">
-                <a:pos x="csX1" y="csY1"/>
-              </a:cxn>
-              <a:cxn ang="0">
-                <a:pos x="csX2" y="csY2"/>
-              </a:cxn>
-              <a:cxn ang="0">
-                <a:pos x="csX3" y="csY3"/>
-              </a:cxn>
-              <a:cxn ang="0">
-                <a:pos x="csX4" y="csY4"/>
-              </a:cxn>
-              <a:cxn ang="0">
-                <a:pos x="csX5" y="csY5"/>
-              </a:cxn>
-              <a:cxn ang="0">
-                <a:pos x="csX6" y="csY6"/>
-              </a:cxn>
-            </a:cxnLst>
-            <a:rect l="l" t="t" r="r" b="b"/>
-            <a:pathLst>
-              <a:path w="1165860" h="13716" fill="none" extrusionOk="0">
-                <a:moveTo>
-                  <a:pt x="0" y="0"/>
-                </a:moveTo>
-                <a:cubicBezTo>
-                  <a:pt x="164196" y="4475"/>
-                  <a:pt x="311417" y="-11483"/>
-                  <a:pt x="606247" y="0"/>
-                </a:cubicBezTo>
-                <a:cubicBezTo>
-                  <a:pt x="901077" y="11483"/>
-                  <a:pt x="1028750" y="-4041"/>
-                  <a:pt x="1165860" y="0"/>
-                </a:cubicBezTo>
-                <a:cubicBezTo>
-                  <a:pt x="1165578" y="4434"/>
-                  <a:pt x="1165988" y="8423"/>
-                  <a:pt x="1165860" y="13716"/>
-                </a:cubicBezTo>
-                <a:cubicBezTo>
-                  <a:pt x="940964" y="3888"/>
-                  <a:pt x="745886" y="20893"/>
-                  <a:pt x="594589" y="13716"/>
-                </a:cubicBezTo>
-                <a:cubicBezTo>
-                  <a:pt x="443292" y="6539"/>
-                  <a:pt x="119306" y="21776"/>
-                  <a:pt x="0" y="13716"/>
-                </a:cubicBezTo>
-                <a:cubicBezTo>
-                  <a:pt x="103" y="7543"/>
-                  <a:pt x="-154" y="4446"/>
-                  <a:pt x="0" y="0"/>
-                </a:cubicBezTo>
-                <a:close/>
-              </a:path>
-              <a:path w="1165860" h="13716" stroke="0" extrusionOk="0">
-                <a:moveTo>
-                  <a:pt x="0" y="0"/>
-                </a:moveTo>
-                <a:cubicBezTo>
-                  <a:pt x="199755" y="-8614"/>
-                  <a:pt x="439971" y="-19466"/>
-                  <a:pt x="571271" y="0"/>
-                </a:cubicBezTo>
-                <a:cubicBezTo>
-                  <a:pt x="702571" y="19466"/>
-                  <a:pt x="922660" y="-18418"/>
-                  <a:pt x="1165860" y="0"/>
-                </a:cubicBezTo>
-                <a:cubicBezTo>
-                  <a:pt x="1165756" y="6849"/>
-                  <a:pt x="1166068" y="9414"/>
-                  <a:pt x="1165860" y="13716"/>
-                </a:cubicBezTo>
-                <a:cubicBezTo>
-                  <a:pt x="981594" y="16996"/>
-                  <a:pt x="788922" y="30312"/>
-                  <a:pt x="582930" y="13716"/>
-                </a:cubicBezTo>
-                <a:cubicBezTo>
-                  <a:pt x="376938" y="-2880"/>
-                  <a:pt x="227474" y="40246"/>
-                  <a:pt x="0" y="13716"/>
-                </a:cubicBezTo>
-                <a:cubicBezTo>
-                  <a:pt x="469" y="7851"/>
-                  <a:pt x="200" y="5770"/>
-                  <a:pt x="0" y="0"/>
-                </a:cubicBezTo>
-                <a:close/>
-              </a:path>
-            </a:pathLst>
-          </a:custGeom>
-          <a:solidFill>
-            <a:schemeClr val="accent2"/>
-          </a:solidFill>
-          <a:ln w="41275" cap="rnd">
+          <a:ln w="38100" cap="rnd">
             <a:solidFill>
               <a:schemeClr val="accent2"/>
             </a:solidFill>
@@ -42073,12 +42223,12 @@
         </p:nvSpPr>
         <p:spPr>
           <a:xfrm>
-            <a:off x="4155947" y="342900"/>
-            <a:ext cx="4505706" cy="1447038"/>
+            <a:off x="473202" y="1995678"/>
+            <a:ext cx="3614166" cy="2660904"/>
           </a:xfrm>
         </p:spPr>
         <p:txBody>
-          <a:bodyPr vert="horz" lIns="91440" tIns="45720" rIns="91440" bIns="45720" rtlCol="0" anchor="ctr">
+          <a:bodyPr vert="horz" lIns="91440" tIns="45720" rIns="91440" bIns="45720" rtlCol="0" anchor="t">
             <a:normAutofit/>
           </a:bodyPr>
           <a:lstStyle/>
@@ -42093,19 +42243,6 @@
             <a:r>
               <a:rPr lang="en-US" sz="1700" dirty="0"/>
               <a:t>Desktop.github.com/download</a:t>
-            </a:r>
-          </a:p>
-          <a:p>
-            <a:pPr indent="-228600" defTabSz="914400">
-              <a:lnSpc>
-                <a:spcPct val="90000"/>
-              </a:lnSpc>
-              <a:buFont typeface="Arial" panose="020B0604020202020204" pitchFamily="34" charset="0"/>
-              <a:buChar char="•"/>
-            </a:pPr>
-            <a:r>
-              <a:rPr lang="en-US" sz="1700" dirty="0"/>
-              <a:t>Clone this repository (repo)</a:t>
             </a:r>
           </a:p>
           <a:p>
@@ -42132,36 +42269,6 @@
       </p:sp>
       <p:pic>
         <p:nvPicPr>
-          <p:cNvPr id="10" name="Picture 9">
-            <a:extLst>
-              <a:ext uri="{FF2B5EF4-FFF2-40B4-BE49-F238E27FC236}">
-                <a16:creationId xmlns:a16="http://schemas.microsoft.com/office/drawing/2014/main" id="{03B70DA4-25BE-898A-9EEF-D65BCE47386D}"/>
-              </a:ext>
-            </a:extLst>
-          </p:cNvPr>
-          <p:cNvPicPr>
-            <a:picLocks noChangeAspect="1"/>
-          </p:cNvPicPr>
-          <p:nvPr/>
-        </p:nvPicPr>
-        <p:blipFill>
-          <a:blip r:embed="rId2"/>
-          <a:stretch>
-            <a:fillRect/>
-          </a:stretch>
-        </p:blipFill>
-        <p:spPr>
-          <a:xfrm>
-            <a:off x="1020699" y="1927098"/>
-            <a:ext cx="2759202" cy="2759202"/>
-          </a:xfrm>
-          <a:prstGeom prst="rect">
-            <a:avLst/>
-          </a:prstGeom>
-        </p:spPr>
-      </p:pic>
-      <p:pic>
-        <p:nvPicPr>
           <p:cNvPr id="7" name="Content Placeholder 6">
             <a:extLst>
               <a:ext uri="{FF2B5EF4-FFF2-40B4-BE49-F238E27FC236}">
@@ -42177,10 +42284,10 @@
           </p:nvPr>
         </p:nvPicPr>
         <p:blipFill>
-          <a:blip r:embed="rId3">
+          <a:blip r:embed="rId2">
             <a:extLst>
               <a:ext uri="{837473B0-CC2E-450A-ABE3-18F120FF3D39}">
-                <a1611:picAttrSrcUrl xmlns:a1611="http://schemas.microsoft.com/office/drawing/2016/11/main" r:id="rId4"/>
+                <a1611:picAttrSrcUrl xmlns:a1611="http://schemas.microsoft.com/office/drawing/2016/11/main" r:id="rId3"/>
               </a:ext>
             </a:extLst>
           </a:blip>
@@ -42190,8 +42297,8 @@
         </p:blipFill>
         <p:spPr>
           <a:xfrm>
-            <a:off x="4725315" y="1927098"/>
-            <a:ext cx="4032197" cy="2759202"/>
+            <a:off x="4574286" y="1170926"/>
+            <a:ext cx="4094226" cy="2801647"/>
           </a:xfrm>
           <a:prstGeom prst="rect">
             <a:avLst/>
@@ -42212,7 +42319,7 @@
         </p:nvSpPr>
         <p:spPr>
           <a:xfrm>
-            <a:off x="6298185" y="4486245"/>
+            <a:off x="6209185" y="3772518"/>
             <a:ext cx="2459327" cy="200055"/>
           </a:xfrm>
           <a:prstGeom prst="rect">
@@ -42238,7 +42345,7 @@
                 <a:solidFill>
                   <a:srgbClr val="FFFFFF"/>
                 </a:solidFill>
-                <a:hlinkClick r:id="rId4" tooltip="https://gecbunlari.com/githuba-tek-seferde-100den-fazla-dosya-atma/">
+                <a:hlinkClick r:id="rId3" tooltip="https://gecbunlari.com/githuba-tek-seferde-100den-fazla-dosya-atma/">
                   <a:extLst>
                     <a:ext uri="{A12FA001-AC4F-418D-AE19-62706E023703}">
                       <ahyp:hlinkClr xmlns:ahyp="http://schemas.microsoft.com/office/drawing/2018/hyperlinkcolor" val="tx"/>
@@ -42261,7 +42368,7 @@
                 <a:solidFill>
                   <a:srgbClr val="FFFFFF"/>
                 </a:solidFill>
-                <a:hlinkClick r:id="rId5" tooltip="https://creativecommons.org/licenses/by-nc-nd/3.0/">
+                <a:hlinkClick r:id="rId4" tooltip="https://creativecommons.org/licenses/by-nc-nd/3.0/">
                   <a:extLst>
                     <a:ext uri="{A12FA001-AC4F-418D-AE19-62706E023703}">
                       <ahyp:hlinkClr xmlns:ahyp="http://schemas.microsoft.com/office/drawing/2018/hyperlinkcolor" val="tx"/>
@@ -43187,6 +43294,819 @@
     </p:bg>
     <p:spTree>
       <p:nvGrpSpPr>
+        <p:cNvPr id="1" name=""/>
+        <p:cNvGrpSpPr/>
+        <p:nvPr/>
+      </p:nvGrpSpPr>
+      <p:grpSpPr>
+        <a:xfrm>
+          <a:off x="0" y="0"/>
+          <a:ext cx="0" cy="0"/>
+          <a:chOff x="0" y="0"/>
+          <a:chExt cx="0" cy="0"/>
+        </a:xfrm>
+      </p:grpSpPr>
+      <p:sp useBgFill="1">
+        <p:nvSpPr>
+          <p:cNvPr id="15" name="Rectangle 14">
+            <a:extLst>
+              <a:ext uri="{FF2B5EF4-FFF2-40B4-BE49-F238E27FC236}">
+                <a16:creationId xmlns:a16="http://schemas.microsoft.com/office/drawing/2014/main" id="{45D37F4E-DDB4-456B-97E0-9937730A039F}"/>
+              </a:ext>
+              <a:ext uri="{C183D7F6-B498-43B3-948B-1728B52AA6E4}">
+                <adec:decorative xmlns:adec="http://schemas.microsoft.com/office/drawing/2017/decorative" val="1"/>
+              </a:ext>
+            </a:extLst>
+          </p:cNvPr>
+          <p:cNvSpPr>
+            <a:spLocks noGrp="1" noRot="1" noChangeAspect="1" noMove="1" noResize="1" noEditPoints="1" noAdjustHandles="1" noChangeArrowheads="1" noChangeShapeType="1" noTextEdit="1"/>
+          </p:cNvSpPr>
+          <p:nvPr>
+            <p:extLst>
+              <p:ext uri="{386F3935-93C4-4BCD-93E2-E3B085C9AB24}">
+                <p16:designElem xmlns:p16="http://schemas.microsoft.com/office/powerpoint/2015/main" val="1"/>
+              </p:ext>
+            </p:extLst>
+          </p:nvPr>
+        </p:nvSpPr>
+        <p:spPr>
+          <a:xfrm>
+            <a:off x="0" y="0"/>
+            <a:ext cx="9141714" cy="5143500"/>
+          </a:xfrm>
+          <a:prstGeom prst="rect">
+            <a:avLst/>
+          </a:prstGeom>
+          <a:ln>
+            <a:noFill/>
+          </a:ln>
+        </p:spPr>
+        <p:style>
+          <a:lnRef idx="2">
+            <a:schemeClr val="accent1">
+              <a:shade val="50000"/>
+            </a:schemeClr>
+          </a:lnRef>
+          <a:fillRef idx="1">
+            <a:schemeClr val="accent1"/>
+          </a:fillRef>
+          <a:effectRef idx="0">
+            <a:schemeClr val="accent1"/>
+          </a:effectRef>
+          <a:fontRef idx="minor">
+            <a:schemeClr val="lt1"/>
+          </a:fontRef>
+        </p:style>
+        <p:txBody>
+          <a:bodyPr rtlCol="0" anchor="ctr"/>
+          <a:lstStyle/>
+          <a:p>
+            <a:pPr algn="ctr"/>
+            <a:endParaRPr lang="en-US"/>
+          </a:p>
+        </p:txBody>
+      </p:sp>
+      <p:sp>
+        <p:nvSpPr>
+          <p:cNvPr id="2" name="Title 1">
+            <a:extLst>
+              <a:ext uri="{FF2B5EF4-FFF2-40B4-BE49-F238E27FC236}">
+                <a16:creationId xmlns:a16="http://schemas.microsoft.com/office/drawing/2014/main" id="{91D8F338-53D2-BAB1-947D-28C598EC8826}"/>
+              </a:ext>
+            </a:extLst>
+          </p:cNvPr>
+          <p:cNvSpPr>
+            <a:spLocks noGrp="1"/>
+          </p:cNvSpPr>
+          <p:nvPr>
+            <p:ph type="title"/>
+          </p:nvPr>
+        </p:nvSpPr>
+        <p:spPr>
+          <a:xfrm>
+            <a:off x="429369" y="178904"/>
+            <a:ext cx="8263890" cy="1075811"/>
+          </a:xfrm>
+        </p:spPr>
+        <p:txBody>
+          <a:bodyPr vert="horz" lIns="91440" tIns="45720" rIns="91440" bIns="45720" rtlCol="0" anchor="b">
+            <a:normAutofit/>
+          </a:bodyPr>
+          <a:lstStyle/>
+          <a:p>
+            <a:pPr algn="l" defTabSz="914400">
+              <a:lnSpc>
+                <a:spcPct val="90000"/>
+              </a:lnSpc>
+            </a:pPr>
+            <a:r>
+              <a:rPr lang="en-US" sz="4100"/>
+              <a:t>Create a GitHub Account</a:t>
+            </a:r>
+          </a:p>
+        </p:txBody>
+      </p:sp>
+      <p:sp>
+        <p:nvSpPr>
+          <p:cNvPr id="17" name="sketchy line">
+            <a:extLst>
+              <a:ext uri="{FF2B5EF4-FFF2-40B4-BE49-F238E27FC236}">
+                <a16:creationId xmlns:a16="http://schemas.microsoft.com/office/drawing/2014/main" id="{B2DD41CD-8F47-4F56-AD12-4E2FF7696987}"/>
+              </a:ext>
+              <a:ext uri="{C183D7F6-B498-43B3-948B-1728B52AA6E4}">
+                <adec:decorative xmlns:adec="http://schemas.microsoft.com/office/drawing/2017/decorative" val="1"/>
+              </a:ext>
+            </a:extLst>
+          </p:cNvPr>
+          <p:cNvSpPr>
+            <a:spLocks noGrp="1" noRot="1" noChangeAspect="1" noMove="1" noResize="1" noEditPoints="1" noAdjustHandles="1" noChangeArrowheads="1" noChangeShapeType="1" noTextEdit="1"/>
+          </p:cNvSpPr>
+          <p:nvPr>
+            <p:extLst>
+              <p:ext uri="{386F3935-93C4-4BCD-93E2-E3B085C9AB24}">
+                <p16:designElem xmlns:p16="http://schemas.microsoft.com/office/powerpoint/2015/main" val="1"/>
+              </p:ext>
+            </p:extLst>
+          </p:nvPr>
+        </p:nvSpPr>
+        <p:spPr>
+          <a:xfrm>
+            <a:off x="429369" y="1261158"/>
+            <a:ext cx="8229600" cy="13716"/>
+          </a:xfrm>
+          <a:custGeom>
+            <a:avLst/>
+            <a:gdLst>
+              <a:gd name="csX0" fmla="*/ 0 w 8229600"/>
+              <a:gd name="csY0" fmla="*/ 0 h 13716"/>
+              <a:gd name="csX1" fmla="*/ 521208 w 8229600"/>
+              <a:gd name="csY1" fmla="*/ 0 h 13716"/>
+              <a:gd name="csX2" fmla="*/ 1371600 w 8229600"/>
+              <a:gd name="csY2" fmla="*/ 0 h 13716"/>
+              <a:gd name="csX3" fmla="*/ 2221992 w 8229600"/>
+              <a:gd name="csY3" fmla="*/ 0 h 13716"/>
+              <a:gd name="csX4" fmla="*/ 3072384 w 8229600"/>
+              <a:gd name="csY4" fmla="*/ 0 h 13716"/>
+              <a:gd name="csX5" fmla="*/ 3511296 w 8229600"/>
+              <a:gd name="csY5" fmla="*/ 0 h 13716"/>
+              <a:gd name="csX6" fmla="*/ 4114800 w 8229600"/>
+              <a:gd name="csY6" fmla="*/ 0 h 13716"/>
+              <a:gd name="csX7" fmla="*/ 4553712 w 8229600"/>
+              <a:gd name="csY7" fmla="*/ 0 h 13716"/>
+              <a:gd name="csX8" fmla="*/ 5239512 w 8229600"/>
+              <a:gd name="csY8" fmla="*/ 0 h 13716"/>
+              <a:gd name="csX9" fmla="*/ 5843016 w 8229600"/>
+              <a:gd name="csY9" fmla="*/ 0 h 13716"/>
+              <a:gd name="csX10" fmla="*/ 6611112 w 8229600"/>
+              <a:gd name="csY10" fmla="*/ 0 h 13716"/>
+              <a:gd name="csX11" fmla="*/ 7461504 w 8229600"/>
+              <a:gd name="csY11" fmla="*/ 0 h 13716"/>
+              <a:gd name="csX12" fmla="*/ 8229600 w 8229600"/>
+              <a:gd name="csY12" fmla="*/ 0 h 13716"/>
+              <a:gd name="csX13" fmla="*/ 8229600 w 8229600"/>
+              <a:gd name="csY13" fmla="*/ 13716 h 13716"/>
+              <a:gd name="csX14" fmla="*/ 7461504 w 8229600"/>
+              <a:gd name="csY14" fmla="*/ 13716 h 13716"/>
+              <a:gd name="csX15" fmla="*/ 6940296 w 8229600"/>
+              <a:gd name="csY15" fmla="*/ 13716 h 13716"/>
+              <a:gd name="csX16" fmla="*/ 6419088 w 8229600"/>
+              <a:gd name="csY16" fmla="*/ 13716 h 13716"/>
+              <a:gd name="csX17" fmla="*/ 5650992 w 8229600"/>
+              <a:gd name="csY17" fmla="*/ 13716 h 13716"/>
+              <a:gd name="csX18" fmla="*/ 5129784 w 8229600"/>
+              <a:gd name="csY18" fmla="*/ 13716 h 13716"/>
+              <a:gd name="csX19" fmla="*/ 4690872 w 8229600"/>
+              <a:gd name="csY19" fmla="*/ 13716 h 13716"/>
+              <a:gd name="csX20" fmla="*/ 4087368 w 8229600"/>
+              <a:gd name="csY20" fmla="*/ 13716 h 13716"/>
+              <a:gd name="csX21" fmla="*/ 3401568 w 8229600"/>
+              <a:gd name="csY21" fmla="*/ 13716 h 13716"/>
+              <a:gd name="csX22" fmla="*/ 2798064 w 8229600"/>
+              <a:gd name="csY22" fmla="*/ 13716 h 13716"/>
+              <a:gd name="csX23" fmla="*/ 2276856 w 8229600"/>
+              <a:gd name="csY23" fmla="*/ 13716 h 13716"/>
+              <a:gd name="csX24" fmla="*/ 1426464 w 8229600"/>
+              <a:gd name="csY24" fmla="*/ 13716 h 13716"/>
+              <a:gd name="csX25" fmla="*/ 740664 w 8229600"/>
+              <a:gd name="csY25" fmla="*/ 13716 h 13716"/>
+              <a:gd name="csX26" fmla="*/ 0 w 8229600"/>
+              <a:gd name="csY26" fmla="*/ 13716 h 13716"/>
+              <a:gd name="csX27" fmla="*/ 0 w 8229600"/>
+              <a:gd name="csY27" fmla="*/ 0 h 13716"/>
+            </a:gdLst>
+            <a:ahLst/>
+            <a:cxnLst>
+              <a:cxn ang="0">
+                <a:pos x="csX0" y="csY0"/>
+              </a:cxn>
+              <a:cxn ang="0">
+                <a:pos x="csX1" y="csY1"/>
+              </a:cxn>
+              <a:cxn ang="0">
+                <a:pos x="csX2" y="csY2"/>
+              </a:cxn>
+              <a:cxn ang="0">
+                <a:pos x="csX3" y="csY3"/>
+              </a:cxn>
+              <a:cxn ang="0">
+                <a:pos x="csX4" y="csY4"/>
+              </a:cxn>
+              <a:cxn ang="0">
+                <a:pos x="csX5" y="csY5"/>
+              </a:cxn>
+              <a:cxn ang="0">
+                <a:pos x="csX6" y="csY6"/>
+              </a:cxn>
+              <a:cxn ang="0">
+                <a:pos x="csX7" y="csY7"/>
+              </a:cxn>
+              <a:cxn ang="0">
+                <a:pos x="csX8" y="csY8"/>
+              </a:cxn>
+              <a:cxn ang="0">
+                <a:pos x="csX9" y="csY9"/>
+              </a:cxn>
+              <a:cxn ang="0">
+                <a:pos x="csX10" y="csY10"/>
+              </a:cxn>
+              <a:cxn ang="0">
+                <a:pos x="csX11" y="csY11"/>
+              </a:cxn>
+              <a:cxn ang="0">
+                <a:pos x="csX12" y="csY12"/>
+              </a:cxn>
+              <a:cxn ang="0">
+                <a:pos x="csX13" y="csY13"/>
+              </a:cxn>
+              <a:cxn ang="0">
+                <a:pos x="csX14" y="csY14"/>
+              </a:cxn>
+              <a:cxn ang="0">
+                <a:pos x="csX15" y="csY15"/>
+              </a:cxn>
+              <a:cxn ang="0">
+                <a:pos x="csX16" y="csY16"/>
+              </a:cxn>
+              <a:cxn ang="0">
+                <a:pos x="csX17" y="csY17"/>
+              </a:cxn>
+              <a:cxn ang="0">
+                <a:pos x="csX18" y="csY18"/>
+              </a:cxn>
+              <a:cxn ang="0">
+                <a:pos x="csX19" y="csY19"/>
+              </a:cxn>
+              <a:cxn ang="0">
+                <a:pos x="csX20" y="csY20"/>
+              </a:cxn>
+              <a:cxn ang="0">
+                <a:pos x="csX21" y="csY21"/>
+              </a:cxn>
+              <a:cxn ang="0">
+                <a:pos x="csX22" y="csY22"/>
+              </a:cxn>
+              <a:cxn ang="0">
+                <a:pos x="csX23" y="csY23"/>
+              </a:cxn>
+              <a:cxn ang="0">
+                <a:pos x="csX24" y="csY24"/>
+              </a:cxn>
+              <a:cxn ang="0">
+                <a:pos x="csX25" y="csY25"/>
+              </a:cxn>
+              <a:cxn ang="0">
+                <a:pos x="csX26" y="csY26"/>
+              </a:cxn>
+              <a:cxn ang="0">
+                <a:pos x="csX27" y="csY27"/>
+              </a:cxn>
+            </a:cxnLst>
+            <a:rect l="l" t="t" r="r" b="b"/>
+            <a:pathLst>
+              <a:path w="8229600" h="13716" fill="none" extrusionOk="0">
+                <a:moveTo>
+                  <a:pt x="0" y="0"/>
+                </a:moveTo>
+                <a:cubicBezTo>
+                  <a:pt x="227594" y="-4267"/>
+                  <a:pt x="329693" y="13251"/>
+                  <a:pt x="521208" y="0"/>
+                </a:cubicBezTo>
+                <a:cubicBezTo>
+                  <a:pt x="712723" y="-13251"/>
+                  <a:pt x="1137373" y="-13618"/>
+                  <a:pt x="1371600" y="0"/>
+                </a:cubicBezTo>
+                <a:cubicBezTo>
+                  <a:pt x="1605827" y="13618"/>
+                  <a:pt x="1975382" y="-27374"/>
+                  <a:pt x="2221992" y="0"/>
+                </a:cubicBezTo>
+                <a:cubicBezTo>
+                  <a:pt x="2468602" y="27374"/>
+                  <a:pt x="2863316" y="-20517"/>
+                  <a:pt x="3072384" y="0"/>
+                </a:cubicBezTo>
+                <a:cubicBezTo>
+                  <a:pt x="3281452" y="20517"/>
+                  <a:pt x="3331438" y="10793"/>
+                  <a:pt x="3511296" y="0"/>
+                </a:cubicBezTo>
+                <a:cubicBezTo>
+                  <a:pt x="3691154" y="-10793"/>
+                  <a:pt x="3906405" y="-29737"/>
+                  <a:pt x="4114800" y="0"/>
+                </a:cubicBezTo>
+                <a:cubicBezTo>
+                  <a:pt x="4323195" y="29737"/>
+                  <a:pt x="4428852" y="-2234"/>
+                  <a:pt x="4553712" y="0"/>
+                </a:cubicBezTo>
+                <a:cubicBezTo>
+                  <a:pt x="4678572" y="2234"/>
+                  <a:pt x="5065629" y="29368"/>
+                  <a:pt x="5239512" y="0"/>
+                </a:cubicBezTo>
+                <a:cubicBezTo>
+                  <a:pt x="5413395" y="-29368"/>
+                  <a:pt x="5703888" y="11839"/>
+                  <a:pt x="5843016" y="0"/>
+                </a:cubicBezTo>
+                <a:cubicBezTo>
+                  <a:pt x="5982144" y="-11839"/>
+                  <a:pt x="6260765" y="24719"/>
+                  <a:pt x="6611112" y="0"/>
+                </a:cubicBezTo>
+                <a:cubicBezTo>
+                  <a:pt x="6961459" y="-24719"/>
+                  <a:pt x="7228293" y="32959"/>
+                  <a:pt x="7461504" y="0"/>
+                </a:cubicBezTo>
+                <a:cubicBezTo>
+                  <a:pt x="7694715" y="-32959"/>
+                  <a:pt x="7990029" y="-3422"/>
+                  <a:pt x="8229600" y="0"/>
+                </a:cubicBezTo>
+                <a:cubicBezTo>
+                  <a:pt x="8229169" y="6566"/>
+                  <a:pt x="8229218" y="9895"/>
+                  <a:pt x="8229600" y="13716"/>
+                </a:cubicBezTo>
+                <a:cubicBezTo>
+                  <a:pt x="7940706" y="-13865"/>
+                  <a:pt x="7792584" y="-20581"/>
+                  <a:pt x="7461504" y="13716"/>
+                </a:cubicBezTo>
+                <a:cubicBezTo>
+                  <a:pt x="7130424" y="48013"/>
+                  <a:pt x="7080072" y="39273"/>
+                  <a:pt x="6940296" y="13716"/>
+                </a:cubicBezTo>
+                <a:cubicBezTo>
+                  <a:pt x="6800520" y="-11841"/>
+                  <a:pt x="6672872" y="22099"/>
+                  <a:pt x="6419088" y="13716"/>
+                </a:cubicBezTo>
+                <a:cubicBezTo>
+                  <a:pt x="6165304" y="5333"/>
+                  <a:pt x="5869721" y="415"/>
+                  <a:pt x="5650992" y="13716"/>
+                </a:cubicBezTo>
+                <a:cubicBezTo>
+                  <a:pt x="5432263" y="27017"/>
+                  <a:pt x="5308310" y="-1549"/>
+                  <a:pt x="5129784" y="13716"/>
+                </a:cubicBezTo>
+                <a:cubicBezTo>
+                  <a:pt x="4951258" y="28981"/>
+                  <a:pt x="4799696" y="10785"/>
+                  <a:pt x="4690872" y="13716"/>
+                </a:cubicBezTo>
+                <a:cubicBezTo>
+                  <a:pt x="4582048" y="16647"/>
+                  <a:pt x="4311124" y="-12408"/>
+                  <a:pt x="4087368" y="13716"/>
+                </a:cubicBezTo>
+                <a:cubicBezTo>
+                  <a:pt x="3863612" y="39840"/>
+                  <a:pt x="3730288" y="8802"/>
+                  <a:pt x="3401568" y="13716"/>
+                </a:cubicBezTo>
+                <a:cubicBezTo>
+                  <a:pt x="3072848" y="18630"/>
+                  <a:pt x="3020684" y="27853"/>
+                  <a:pt x="2798064" y="13716"/>
+                </a:cubicBezTo>
+                <a:cubicBezTo>
+                  <a:pt x="2575444" y="-421"/>
+                  <a:pt x="2440915" y="-11924"/>
+                  <a:pt x="2276856" y="13716"/>
+                </a:cubicBezTo>
+                <a:cubicBezTo>
+                  <a:pt x="2112797" y="39356"/>
+                  <a:pt x="1726502" y="-14132"/>
+                  <a:pt x="1426464" y="13716"/>
+                </a:cubicBezTo>
+                <a:cubicBezTo>
+                  <a:pt x="1126426" y="41564"/>
+                  <a:pt x="992925" y="16444"/>
+                  <a:pt x="740664" y="13716"/>
+                </a:cubicBezTo>
+                <a:cubicBezTo>
+                  <a:pt x="488403" y="10988"/>
+                  <a:pt x="195650" y="-20633"/>
+                  <a:pt x="0" y="13716"/>
+                </a:cubicBezTo>
+                <a:cubicBezTo>
+                  <a:pt x="120" y="8944"/>
+                  <a:pt x="-32" y="6034"/>
+                  <a:pt x="0" y="0"/>
+                </a:cubicBezTo>
+                <a:close/>
+              </a:path>
+              <a:path w="8229600" h="13716" stroke="0" extrusionOk="0">
+                <a:moveTo>
+                  <a:pt x="0" y="0"/>
+                </a:moveTo>
+                <a:cubicBezTo>
+                  <a:pt x="259263" y="-9445"/>
+                  <a:pt x="404731" y="4427"/>
+                  <a:pt x="521208" y="0"/>
+                </a:cubicBezTo>
+                <a:cubicBezTo>
+                  <a:pt x="637685" y="-4427"/>
+                  <a:pt x="839187" y="564"/>
+                  <a:pt x="960120" y="0"/>
+                </a:cubicBezTo>
+                <a:cubicBezTo>
+                  <a:pt x="1081053" y="-564"/>
+                  <a:pt x="1313469" y="-16481"/>
+                  <a:pt x="1481328" y="0"/>
+                </a:cubicBezTo>
+                <a:cubicBezTo>
+                  <a:pt x="1649187" y="16481"/>
+                  <a:pt x="1885247" y="26161"/>
+                  <a:pt x="2167128" y="0"/>
+                </a:cubicBezTo>
+                <a:cubicBezTo>
+                  <a:pt x="2449009" y="-26161"/>
+                  <a:pt x="2761875" y="-22202"/>
+                  <a:pt x="2935224" y="0"/>
+                </a:cubicBezTo>
+                <a:cubicBezTo>
+                  <a:pt x="3108573" y="22202"/>
+                  <a:pt x="3540687" y="-2863"/>
+                  <a:pt x="3785616" y="0"/>
+                </a:cubicBezTo>
+                <a:cubicBezTo>
+                  <a:pt x="4030545" y="2863"/>
+                  <a:pt x="4280774" y="-12442"/>
+                  <a:pt x="4636008" y="0"/>
+                </a:cubicBezTo>
+                <a:cubicBezTo>
+                  <a:pt x="4991242" y="12442"/>
+                  <a:pt x="5025483" y="16914"/>
+                  <a:pt x="5239512" y="0"/>
+                </a:cubicBezTo>
+                <a:cubicBezTo>
+                  <a:pt x="5453541" y="-16914"/>
+                  <a:pt x="5754008" y="16592"/>
+                  <a:pt x="6007608" y="0"/>
+                </a:cubicBezTo>
+                <a:cubicBezTo>
+                  <a:pt x="6261208" y="-16592"/>
+                  <a:pt x="6407957" y="-11909"/>
+                  <a:pt x="6693408" y="0"/>
+                </a:cubicBezTo>
+                <a:cubicBezTo>
+                  <a:pt x="6978859" y="11909"/>
+                  <a:pt x="7015437" y="-20890"/>
+                  <a:pt x="7296912" y="0"/>
+                </a:cubicBezTo>
+                <a:cubicBezTo>
+                  <a:pt x="7578387" y="20890"/>
+                  <a:pt x="7859622" y="46406"/>
+                  <a:pt x="8229600" y="0"/>
+                </a:cubicBezTo>
+                <a:cubicBezTo>
+                  <a:pt x="8229365" y="6754"/>
+                  <a:pt x="8229865" y="9234"/>
+                  <a:pt x="8229600" y="13716"/>
+                </a:cubicBezTo>
+                <a:cubicBezTo>
+                  <a:pt x="8075287" y="30482"/>
+                  <a:pt x="7821366" y="17278"/>
+                  <a:pt x="7626096" y="13716"/>
+                </a:cubicBezTo>
+                <a:cubicBezTo>
+                  <a:pt x="7430826" y="10154"/>
+                  <a:pt x="7320004" y="-14241"/>
+                  <a:pt x="7022592" y="13716"/>
+                </a:cubicBezTo>
+                <a:cubicBezTo>
+                  <a:pt x="6725180" y="41673"/>
+                  <a:pt x="6348804" y="-18597"/>
+                  <a:pt x="6172200" y="13716"/>
+                </a:cubicBezTo>
+                <a:cubicBezTo>
+                  <a:pt x="5995596" y="46029"/>
+                  <a:pt x="5788102" y="18318"/>
+                  <a:pt x="5650992" y="13716"/>
+                </a:cubicBezTo>
+                <a:cubicBezTo>
+                  <a:pt x="5513882" y="9114"/>
+                  <a:pt x="5198399" y="24549"/>
+                  <a:pt x="4882896" y="13716"/>
+                </a:cubicBezTo>
+                <a:cubicBezTo>
+                  <a:pt x="4567393" y="2883"/>
+                  <a:pt x="4557008" y="22393"/>
+                  <a:pt x="4443984" y="13716"/>
+                </a:cubicBezTo>
+                <a:cubicBezTo>
+                  <a:pt x="4330960" y="5039"/>
+                  <a:pt x="4061674" y="24319"/>
+                  <a:pt x="3758184" y="13716"/>
+                </a:cubicBezTo>
+                <a:cubicBezTo>
+                  <a:pt x="3454694" y="3113"/>
+                  <a:pt x="3380392" y="14547"/>
+                  <a:pt x="3236976" y="13716"/>
+                </a:cubicBezTo>
+                <a:cubicBezTo>
+                  <a:pt x="3093560" y="12885"/>
+                  <a:pt x="2632116" y="33035"/>
+                  <a:pt x="2386584" y="13716"/>
+                </a:cubicBezTo>
+                <a:cubicBezTo>
+                  <a:pt x="2141052" y="-5603"/>
+                  <a:pt x="2110884" y="24205"/>
+                  <a:pt x="1947672" y="13716"/>
+                </a:cubicBezTo>
+                <a:cubicBezTo>
+                  <a:pt x="1784460" y="3227"/>
+                  <a:pt x="1535467" y="-4111"/>
+                  <a:pt x="1261872" y="13716"/>
+                </a:cubicBezTo>
+                <a:cubicBezTo>
+                  <a:pt x="988277" y="31543"/>
+                  <a:pt x="1021096" y="5803"/>
+                  <a:pt x="822960" y="13716"/>
+                </a:cubicBezTo>
+                <a:cubicBezTo>
+                  <a:pt x="624824" y="21629"/>
+                  <a:pt x="298309" y="-3289"/>
+                  <a:pt x="0" y="13716"/>
+                </a:cubicBezTo>
+                <a:cubicBezTo>
+                  <a:pt x="52" y="10594"/>
+                  <a:pt x="386" y="5364"/>
+                  <a:pt x="0" y="0"/>
+                </a:cubicBezTo>
+                <a:close/>
+              </a:path>
+            </a:pathLst>
+          </a:custGeom>
+          <a:solidFill>
+            <a:schemeClr val="accent2">
+              <a:alpha val="75000"/>
+            </a:schemeClr>
+          </a:solidFill>
+          <a:ln w="44450" cap="rnd">
+            <a:solidFill>
+              <a:schemeClr val="accent2">
+                <a:alpha val="75000"/>
+              </a:schemeClr>
+            </a:solidFill>
+            <a:round/>
+            <a:extLst>
+              <a:ext uri="{C807C97D-BFC1-408E-A445-0C87EB9F89A2}">
+                <ask:lineSketchStyleProps xmlns:ask="http://schemas.microsoft.com/office/drawing/2018/sketchyshapes" sd="2727557108">
+                  <a:prstGeom prst="rect">
+                    <a:avLst/>
+                  </a:prstGeom>
+                  <ask:type>
+                    <ask:lineSketchFreehand/>
+                  </ask:type>
+                </ask:lineSketchStyleProps>
+              </a:ext>
+            </a:extLst>
+          </a:ln>
+        </p:spPr>
+        <p:style>
+          <a:lnRef idx="2">
+            <a:schemeClr val="accent1">
+              <a:shade val="50000"/>
+            </a:schemeClr>
+          </a:lnRef>
+          <a:fillRef idx="1">
+            <a:schemeClr val="accent1"/>
+          </a:fillRef>
+          <a:effectRef idx="0">
+            <a:schemeClr val="accent1"/>
+          </a:effectRef>
+          <a:fontRef idx="minor">
+            <a:schemeClr val="lt1"/>
+          </a:fontRef>
+        </p:style>
+        <p:txBody>
+          <a:bodyPr rtlCol="0" anchor="ctr"/>
+          <a:lstStyle/>
+          <a:p>
+            <a:pPr algn="ctr"/>
+            <a:endParaRPr lang="en-US"/>
+          </a:p>
+        </p:txBody>
+      </p:sp>
+      <p:sp>
+        <p:nvSpPr>
+          <p:cNvPr id="3" name="Content Placeholder 2">
+            <a:extLst>
+              <a:ext uri="{FF2B5EF4-FFF2-40B4-BE49-F238E27FC236}">
+                <a16:creationId xmlns:a16="http://schemas.microsoft.com/office/drawing/2014/main" id="{85CABD98-B951-87C6-98E7-B02D8D3881F4}"/>
+              </a:ext>
+            </a:extLst>
+          </p:cNvPr>
+          <p:cNvSpPr>
+            <a:spLocks noGrp="1"/>
+          </p:cNvSpPr>
+          <p:nvPr>
+            <p:ph sz="half" idx="1"/>
+          </p:nvPr>
+        </p:nvSpPr>
+        <p:spPr>
+          <a:xfrm>
+            <a:off x="429369" y="1553487"/>
+            <a:ext cx="5035164" cy="3089379"/>
+          </a:xfrm>
+        </p:spPr>
+        <p:txBody>
+          <a:bodyPr vert="horz" lIns="91440" tIns="45720" rIns="91440" bIns="45720" rtlCol="0" anchor="t">
+            <a:normAutofit/>
+          </a:bodyPr>
+          <a:lstStyle/>
+          <a:p>
+            <a:pPr marL="0" indent="-228600" defTabSz="914400">
+              <a:lnSpc>
+                <a:spcPct val="90000"/>
+              </a:lnSpc>
+              <a:buFont typeface="Arial" panose="020B0604020202020204" pitchFamily="34" charset="0"/>
+              <a:buChar char="•"/>
+            </a:pPr>
+            <a:r>
+              <a:rPr lang="en-US" sz="1700" dirty="0">
+                <a:hlinkClick r:id="rId2"/>
+              </a:rPr>
+              <a:t>https://github.com/</a:t>
+            </a:r>
+            <a:endParaRPr lang="en-US" sz="1700" dirty="0"/>
+          </a:p>
+          <a:p>
+            <a:pPr marL="0" indent="-228600" defTabSz="914400">
+              <a:lnSpc>
+                <a:spcPct val="90000"/>
+              </a:lnSpc>
+              <a:buFont typeface="Arial" panose="020B0604020202020204" pitchFamily="34" charset="0"/>
+              <a:buChar char="•"/>
+            </a:pPr>
+            <a:r>
+              <a:rPr lang="en-US" sz="1700" dirty="0"/>
+              <a:t>Sign up for an account</a:t>
+            </a:r>
+          </a:p>
+          <a:p>
+            <a:pPr marL="0" indent="-228600" defTabSz="914400">
+              <a:lnSpc>
+                <a:spcPct val="90000"/>
+              </a:lnSpc>
+              <a:buFont typeface="Arial" panose="020B0604020202020204" pitchFamily="34" charset="0"/>
+              <a:buChar char="•"/>
+            </a:pPr>
+            <a:endParaRPr lang="en-US" sz="1700" dirty="0"/>
+          </a:p>
+          <a:p>
+            <a:pPr marL="0" indent="-228600" defTabSz="914400">
+              <a:lnSpc>
+                <a:spcPct val="90000"/>
+              </a:lnSpc>
+              <a:buFont typeface="Arial" panose="020B0604020202020204" pitchFamily="34" charset="0"/>
+              <a:buChar char="•"/>
+            </a:pPr>
+            <a:endParaRPr lang="en-US" sz="1700" dirty="0"/>
+          </a:p>
+          <a:p>
+            <a:pPr marL="0" indent="-228600" defTabSz="914400">
+              <a:lnSpc>
+                <a:spcPct val="90000"/>
+              </a:lnSpc>
+              <a:buFont typeface="Arial" panose="020B0604020202020204" pitchFamily="34" charset="0"/>
+              <a:buChar char="•"/>
+            </a:pPr>
+            <a:r>
+              <a:rPr lang="en-US" sz="1700" dirty="0"/>
+              <a:t>Fork on this repository</a:t>
+            </a:r>
+          </a:p>
+          <a:p>
+            <a:pPr marL="0" indent="-228600" defTabSz="914400">
+              <a:lnSpc>
+                <a:spcPct val="90000"/>
+              </a:lnSpc>
+              <a:buFont typeface="Arial" panose="020B0604020202020204" pitchFamily="34" charset="0"/>
+              <a:buChar char="•"/>
+            </a:pPr>
+            <a:r>
+              <a:rPr lang="en-US" sz="1700" dirty="0"/>
+              <a:t>Clone the fork to GitHub Desktop</a:t>
+            </a:r>
+          </a:p>
+          <a:p>
+            <a:pPr marL="0" indent="-228600" defTabSz="914400">
+              <a:lnSpc>
+                <a:spcPct val="90000"/>
+              </a:lnSpc>
+              <a:buFont typeface="Arial" panose="020B0604020202020204" pitchFamily="34" charset="0"/>
+              <a:buChar char="•"/>
+            </a:pPr>
+            <a:r>
+              <a:rPr lang="en-US" sz="1700" dirty="0"/>
+              <a:t>Work </a:t>
+            </a:r>
+          </a:p>
+          <a:p>
+            <a:pPr marL="0" indent="-228600" defTabSz="914400">
+              <a:lnSpc>
+                <a:spcPct val="90000"/>
+              </a:lnSpc>
+              <a:buFont typeface="Arial" panose="020B0604020202020204" pitchFamily="34" charset="0"/>
+              <a:buChar char="•"/>
+            </a:pPr>
+            <a:r>
+              <a:rPr lang="en-US" sz="1700" dirty="0"/>
+              <a:t>Commit and Push</a:t>
+            </a:r>
+          </a:p>
+        </p:txBody>
+      </p:sp>
+      <p:pic>
+        <p:nvPicPr>
+          <p:cNvPr id="10" name="Content Placeholder 9">
+            <a:extLst>
+              <a:ext uri="{FF2B5EF4-FFF2-40B4-BE49-F238E27FC236}">
+                <a16:creationId xmlns:a16="http://schemas.microsoft.com/office/drawing/2014/main" id="{84065BAC-4F68-E62D-8185-D108F3842589}"/>
+              </a:ext>
+            </a:extLst>
+          </p:cNvPr>
+          <p:cNvPicPr>
+            <a:picLocks noGrp="1" noChangeAspect="1"/>
+          </p:cNvPicPr>
+          <p:nvPr>
+            <p:ph sz="half" idx="2"/>
+          </p:nvPr>
+        </p:nvPicPr>
+        <p:blipFill>
+          <a:blip r:embed="rId3"/>
+          <a:srcRect l="570" r="3225" b="1"/>
+          <a:stretch>
+            <a:fillRect/>
+          </a:stretch>
+        </p:blipFill>
+        <p:spPr>
+          <a:xfrm>
+            <a:off x="5756743" y="1570482"/>
+            <a:ext cx="2955798" cy="3072384"/>
+          </a:xfrm>
+          <a:prstGeom prst="rect">
+            <a:avLst/>
+          </a:prstGeom>
+        </p:spPr>
+      </p:pic>
+    </p:spTree>
+    <p:extLst>
+      <p:ext uri="{BB962C8B-B14F-4D97-AF65-F5344CB8AC3E}">
+        <p14:creationId xmlns:p14="http://schemas.microsoft.com/office/powerpoint/2010/main" val="1516917188"/>
+      </p:ext>
+    </p:extLst>
+  </p:cSld>
+  <p:clrMapOvr>
+    <a:masterClrMapping/>
+  </p:clrMapOvr>
+</p:sld>
+</file>
+
+<file path=ppt/slides/slide8.xml><?xml version="1.0" encoding="utf-8"?>
+<p:sld xmlns:a="http://schemas.openxmlformats.org/drawingml/2006/main" xmlns:r="http://schemas.openxmlformats.org/officeDocument/2006/relationships" xmlns:p="http://schemas.openxmlformats.org/presentationml/2006/main">
+  <p:cSld>
+    <p:bg>
+      <p:bgPr>
+        <a:solidFill>
+          <a:schemeClr val="bg1"/>
+        </a:solidFill>
+        <a:effectLst/>
+      </p:bgPr>
+    </p:bg>
+    <p:spTree>
+      <p:nvGrpSpPr>
         <p:cNvPr id="1" name="">
           <a:extLst>
             <a:ext uri="{FF2B5EF4-FFF2-40B4-BE49-F238E27FC236}">
@@ -43892,7 +44812,7 @@
 </p:sld>
 </file>
 
-<file path=ppt/slides/slide8.xml><?xml version="1.0" encoding="utf-8"?>
+<file path=ppt/slides/slide9.xml><?xml version="1.0" encoding="utf-8"?>
 <p:sld xmlns:a="http://schemas.openxmlformats.org/drawingml/2006/main" xmlns:r="http://schemas.openxmlformats.org/officeDocument/2006/relationships" xmlns:p="http://schemas.openxmlformats.org/presentationml/2006/main">
   <p:cSld>
     <p:bg>
@@ -44534,708 +45454,6 @@
             <a:r>
               <a:rPr lang="en-US" sz="1700"/>
               <a:t>R is a programming language and free software environment primarily used for statistical computing and graphics. It is widely utilized among statisticians, data scientists, and researchers for developing statistical software and data analysis.</a:t>
-            </a:r>
-          </a:p>
-        </p:txBody>
-      </p:sp>
-    </p:spTree>
-  </p:cSld>
-  <p:clrMapOvr>
-    <a:masterClrMapping/>
-  </p:clrMapOvr>
-</p:sld>
-</file>
-
-<file path=ppt/slides/slide9.xml><?xml version="1.0" encoding="utf-8"?>
-<p:sld xmlns:a="http://schemas.openxmlformats.org/drawingml/2006/main" xmlns:r="http://schemas.openxmlformats.org/officeDocument/2006/relationships" xmlns:p="http://schemas.openxmlformats.org/presentationml/2006/main">
-  <p:cSld>
-    <p:bg>
-      <p:bgPr>
-        <a:solidFill>
-          <a:schemeClr val="bg1"/>
-        </a:solidFill>
-        <a:effectLst/>
-      </p:bgPr>
-    </p:bg>
-    <p:spTree>
-      <p:nvGrpSpPr>
-        <p:cNvPr id="1" name=""/>
-        <p:cNvGrpSpPr/>
-        <p:nvPr/>
-      </p:nvGrpSpPr>
-      <p:grpSpPr>
-        <a:xfrm>
-          <a:off x="0" y="0"/>
-          <a:ext cx="0" cy="0"/>
-          <a:chOff x="0" y="0"/>
-          <a:chExt cx="0" cy="0"/>
-        </a:xfrm>
-      </p:grpSpPr>
-      <p:sp useBgFill="1">
-        <p:nvSpPr>
-          <p:cNvPr id="8" name="Rectangle 7">
-            <a:extLst>
-              <a:ext uri="{FF2B5EF4-FFF2-40B4-BE49-F238E27FC236}">
-                <a16:creationId xmlns:a16="http://schemas.microsoft.com/office/drawing/2014/main" id="{100EDD19-6802-4EC3-95CE-CFFAB042CFD6}"/>
-              </a:ext>
-              <a:ext uri="{C183D7F6-B498-43B3-948B-1728B52AA6E4}">
-                <adec:decorative xmlns:adec="http://schemas.microsoft.com/office/drawing/2017/decorative" val="1"/>
-              </a:ext>
-            </a:extLst>
-          </p:cNvPr>
-          <p:cNvSpPr>
-            <a:spLocks noGrp="1" noRot="1" noChangeAspect="1" noMove="1" noResize="1" noEditPoints="1" noAdjustHandles="1" noChangeArrowheads="1" noChangeShapeType="1" noTextEdit="1"/>
-          </p:cNvSpPr>
-          <p:nvPr>
-            <p:extLst>
-              <p:ext uri="{386F3935-93C4-4BCD-93E2-E3B085C9AB24}">
-                <p16:designElem xmlns:p16="http://schemas.microsoft.com/office/powerpoint/2015/main" val="1"/>
-              </p:ext>
-            </p:extLst>
-          </p:nvPr>
-        </p:nvSpPr>
-        <p:spPr>
-          <a:xfrm>
-            <a:off x="0" y="0"/>
-            <a:ext cx="9141714" cy="5143500"/>
-          </a:xfrm>
-          <a:prstGeom prst="rect">
-            <a:avLst/>
-          </a:prstGeom>
-          <a:ln>
-            <a:noFill/>
-          </a:ln>
-        </p:spPr>
-        <p:style>
-          <a:lnRef idx="2">
-            <a:schemeClr val="accent1">
-              <a:shade val="50000"/>
-            </a:schemeClr>
-          </a:lnRef>
-          <a:fillRef idx="1">
-            <a:schemeClr val="accent1"/>
-          </a:fillRef>
-          <a:effectRef idx="0">
-            <a:schemeClr val="accent1"/>
-          </a:effectRef>
-          <a:fontRef idx="minor">
-            <a:schemeClr val="lt1"/>
-          </a:fontRef>
-        </p:style>
-        <p:txBody>
-          <a:bodyPr rtlCol="0" anchor="ctr"/>
-          <a:lstStyle/>
-          <a:p>
-            <a:pPr algn="ctr"/>
-            <a:endParaRPr lang="en-US"/>
-          </a:p>
-        </p:txBody>
-      </p:sp>
-      <p:sp>
-        <p:nvSpPr>
-          <p:cNvPr id="2" name="Title 1"/>
-          <p:cNvSpPr>
-            <a:spLocks noGrp="1"/>
-          </p:cNvSpPr>
-          <p:nvPr>
-            <p:ph type="title"/>
-          </p:nvPr>
-        </p:nvSpPr>
-        <p:spPr>
-          <a:xfrm>
-            <a:off x="628650" y="273843"/>
-            <a:ext cx="7886700" cy="994173"/>
-          </a:xfrm>
-        </p:spPr>
-        <p:txBody>
-          <a:bodyPr>
-            <a:normAutofit/>
-          </a:bodyPr>
-          <a:lstStyle/>
-          <a:p>
-            <a:pPr marL="0" lvl="0" indent="0">
-              <a:buNone/>
-            </a:pPr>
-            <a:r>
-              <a:rPr lang="en-US" sz="4100"/>
-              <a:t>Key Features of R:</a:t>
-            </a:r>
-          </a:p>
-        </p:txBody>
-      </p:sp>
-      <p:sp>
-        <p:nvSpPr>
-          <p:cNvPr id="10" name="sketch line">
-            <a:extLst>
-              <a:ext uri="{FF2B5EF4-FFF2-40B4-BE49-F238E27FC236}">
-                <a16:creationId xmlns:a16="http://schemas.microsoft.com/office/drawing/2014/main" id="{DB17E863-922E-4C26-BD64-E8FD41D28661}"/>
-              </a:ext>
-              <a:ext uri="{C183D7F6-B498-43B3-948B-1728B52AA6E4}">
-                <adec:decorative xmlns:adec="http://schemas.microsoft.com/office/drawing/2017/decorative" val="1"/>
-              </a:ext>
-            </a:extLst>
-          </p:cNvPr>
-          <p:cNvSpPr>
-            <a:spLocks noGrp="1" noRot="1" noChangeAspect="1" noMove="1" noResize="1" noEditPoints="1" noAdjustHandles="1" noChangeArrowheads="1" noChangeShapeType="1" noTextEdit="1"/>
-          </p:cNvSpPr>
-          <p:nvPr>
-            <p:extLst>
-              <p:ext uri="{386F3935-93C4-4BCD-93E2-E3B085C9AB24}">
-                <p16:designElem xmlns:p16="http://schemas.microsoft.com/office/powerpoint/2015/main" val="1"/>
-              </p:ext>
-            </p:extLst>
-          </p:nvPr>
-        </p:nvSpPr>
-        <p:spPr>
-          <a:xfrm>
-            <a:off x="501777" y="1258029"/>
-            <a:ext cx="8140446" cy="13716"/>
-          </a:xfrm>
-          <a:custGeom>
-            <a:avLst/>
-            <a:gdLst>
-              <a:gd name="csX0" fmla="*/ 0 w 8140446"/>
-              <a:gd name="csY0" fmla="*/ 0 h 13716"/>
-              <a:gd name="csX1" fmla="*/ 434157 w 8140446"/>
-              <a:gd name="csY1" fmla="*/ 0 h 13716"/>
-              <a:gd name="csX2" fmla="*/ 1193932 w 8140446"/>
-              <a:gd name="csY2" fmla="*/ 0 h 13716"/>
-              <a:gd name="csX3" fmla="*/ 1628089 w 8140446"/>
-              <a:gd name="csY3" fmla="*/ 0 h 13716"/>
-              <a:gd name="csX4" fmla="*/ 2225055 w 8140446"/>
-              <a:gd name="csY4" fmla="*/ 0 h 13716"/>
-              <a:gd name="csX5" fmla="*/ 3066235 w 8140446"/>
-              <a:gd name="csY5" fmla="*/ 0 h 13716"/>
-              <a:gd name="csX6" fmla="*/ 3744605 w 8140446"/>
-              <a:gd name="csY6" fmla="*/ 0 h 13716"/>
-              <a:gd name="csX7" fmla="*/ 4504380 w 8140446"/>
-              <a:gd name="csY7" fmla="*/ 0 h 13716"/>
-              <a:gd name="csX8" fmla="*/ 5101346 w 8140446"/>
-              <a:gd name="csY8" fmla="*/ 0 h 13716"/>
-              <a:gd name="csX9" fmla="*/ 5779717 w 8140446"/>
-              <a:gd name="csY9" fmla="*/ 0 h 13716"/>
-              <a:gd name="csX10" fmla="*/ 6620896 w 8140446"/>
-              <a:gd name="csY10" fmla="*/ 0 h 13716"/>
-              <a:gd name="csX11" fmla="*/ 7136458 w 8140446"/>
-              <a:gd name="csY11" fmla="*/ 0 h 13716"/>
-              <a:gd name="csX12" fmla="*/ 8140446 w 8140446"/>
-              <a:gd name="csY12" fmla="*/ 0 h 13716"/>
-              <a:gd name="csX13" fmla="*/ 8140446 w 8140446"/>
-              <a:gd name="csY13" fmla="*/ 13716 h 13716"/>
-              <a:gd name="csX14" fmla="*/ 7543480 w 8140446"/>
-              <a:gd name="csY14" fmla="*/ 13716 h 13716"/>
-              <a:gd name="csX15" fmla="*/ 7109323 w 8140446"/>
-              <a:gd name="csY15" fmla="*/ 13716 h 13716"/>
-              <a:gd name="csX16" fmla="*/ 6430952 w 8140446"/>
-              <a:gd name="csY16" fmla="*/ 13716 h 13716"/>
-              <a:gd name="csX17" fmla="*/ 5915391 w 8140446"/>
-              <a:gd name="csY17" fmla="*/ 13716 h 13716"/>
-              <a:gd name="csX18" fmla="*/ 5237020 w 8140446"/>
-              <a:gd name="csY18" fmla="*/ 13716 h 13716"/>
-              <a:gd name="csX19" fmla="*/ 4558650 w 8140446"/>
-              <a:gd name="csY19" fmla="*/ 13716 h 13716"/>
-              <a:gd name="csX20" fmla="*/ 3880279 w 8140446"/>
-              <a:gd name="csY20" fmla="*/ 13716 h 13716"/>
-              <a:gd name="csX21" fmla="*/ 3201909 w 8140446"/>
-              <a:gd name="csY21" fmla="*/ 13716 h 13716"/>
-              <a:gd name="csX22" fmla="*/ 2604943 w 8140446"/>
-              <a:gd name="csY22" fmla="*/ 13716 h 13716"/>
-              <a:gd name="csX23" fmla="*/ 1845168 w 8140446"/>
-              <a:gd name="csY23" fmla="*/ 13716 h 13716"/>
-              <a:gd name="csX24" fmla="*/ 1166797 w 8140446"/>
-              <a:gd name="csY24" fmla="*/ 13716 h 13716"/>
-              <a:gd name="csX25" fmla="*/ 0 w 8140446"/>
-              <a:gd name="csY25" fmla="*/ 13716 h 13716"/>
-              <a:gd name="csX26" fmla="*/ 0 w 8140446"/>
-              <a:gd name="csY26" fmla="*/ 0 h 13716"/>
-            </a:gdLst>
-            <a:ahLst/>
-            <a:cxnLst>
-              <a:cxn ang="0">
-                <a:pos x="csX0" y="csY0"/>
-              </a:cxn>
-              <a:cxn ang="0">
-                <a:pos x="csX1" y="csY1"/>
-              </a:cxn>
-              <a:cxn ang="0">
-                <a:pos x="csX2" y="csY2"/>
-              </a:cxn>
-              <a:cxn ang="0">
-                <a:pos x="csX3" y="csY3"/>
-              </a:cxn>
-              <a:cxn ang="0">
-                <a:pos x="csX4" y="csY4"/>
-              </a:cxn>
-              <a:cxn ang="0">
-                <a:pos x="csX5" y="csY5"/>
-              </a:cxn>
-              <a:cxn ang="0">
-                <a:pos x="csX6" y="csY6"/>
-              </a:cxn>
-              <a:cxn ang="0">
-                <a:pos x="csX7" y="csY7"/>
-              </a:cxn>
-              <a:cxn ang="0">
-                <a:pos x="csX8" y="csY8"/>
-              </a:cxn>
-              <a:cxn ang="0">
-                <a:pos x="csX9" y="csY9"/>
-              </a:cxn>
-              <a:cxn ang="0">
-                <a:pos x="csX10" y="csY10"/>
-              </a:cxn>
-              <a:cxn ang="0">
-                <a:pos x="csX11" y="csY11"/>
-              </a:cxn>
-              <a:cxn ang="0">
-                <a:pos x="csX12" y="csY12"/>
-              </a:cxn>
-              <a:cxn ang="0">
-                <a:pos x="csX13" y="csY13"/>
-              </a:cxn>
-              <a:cxn ang="0">
-                <a:pos x="csX14" y="csY14"/>
-              </a:cxn>
-              <a:cxn ang="0">
-                <a:pos x="csX15" y="csY15"/>
-              </a:cxn>
-              <a:cxn ang="0">
-                <a:pos x="csX16" y="csY16"/>
-              </a:cxn>
-              <a:cxn ang="0">
-                <a:pos x="csX17" y="csY17"/>
-              </a:cxn>
-              <a:cxn ang="0">
-                <a:pos x="csX18" y="csY18"/>
-              </a:cxn>
-              <a:cxn ang="0">
-                <a:pos x="csX19" y="csY19"/>
-              </a:cxn>
-              <a:cxn ang="0">
-                <a:pos x="csX20" y="csY20"/>
-              </a:cxn>
-              <a:cxn ang="0">
-                <a:pos x="csX21" y="csY21"/>
-              </a:cxn>
-              <a:cxn ang="0">
-                <a:pos x="csX22" y="csY22"/>
-              </a:cxn>
-              <a:cxn ang="0">
-                <a:pos x="csX23" y="csY23"/>
-              </a:cxn>
-              <a:cxn ang="0">
-                <a:pos x="csX24" y="csY24"/>
-              </a:cxn>
-              <a:cxn ang="0">
-                <a:pos x="csX25" y="csY25"/>
-              </a:cxn>
-              <a:cxn ang="0">
-                <a:pos x="csX26" y="csY26"/>
-              </a:cxn>
-            </a:cxnLst>
-            <a:rect l="l" t="t" r="r" b="b"/>
-            <a:pathLst>
-              <a:path w="8140446" h="13716" fill="none" extrusionOk="0">
-                <a:moveTo>
-                  <a:pt x="0" y="0"/>
-                </a:moveTo>
-                <a:cubicBezTo>
-                  <a:pt x="94920" y="9103"/>
-                  <a:pt x="287892" y="-4966"/>
-                  <a:pt x="434157" y="0"/>
-                </a:cubicBezTo>
-                <a:cubicBezTo>
-                  <a:pt x="580422" y="4966"/>
-                  <a:pt x="943595" y="-14182"/>
-                  <a:pt x="1193932" y="0"/>
-                </a:cubicBezTo>
-                <a:cubicBezTo>
-                  <a:pt x="1444270" y="14182"/>
-                  <a:pt x="1472129" y="5523"/>
-                  <a:pt x="1628089" y="0"/>
-                </a:cubicBezTo>
-                <a:cubicBezTo>
-                  <a:pt x="1784049" y="-5523"/>
-                  <a:pt x="1962419" y="-17322"/>
-                  <a:pt x="2225055" y="0"/>
-                </a:cubicBezTo>
-                <a:cubicBezTo>
-                  <a:pt x="2487691" y="17322"/>
-                  <a:pt x="2700681" y="1311"/>
-                  <a:pt x="3066235" y="0"/>
-                </a:cubicBezTo>
-                <a:cubicBezTo>
-                  <a:pt x="3431789" y="-1311"/>
-                  <a:pt x="3405662" y="25081"/>
-                  <a:pt x="3744605" y="0"/>
-                </a:cubicBezTo>
-                <a:cubicBezTo>
-                  <a:pt x="4083548" y="-25081"/>
-                  <a:pt x="4265111" y="-11945"/>
-                  <a:pt x="4504380" y="0"/>
-                </a:cubicBezTo>
-                <a:cubicBezTo>
-                  <a:pt x="4743649" y="11945"/>
-                  <a:pt x="4860394" y="-2832"/>
-                  <a:pt x="5101346" y="0"/>
-                </a:cubicBezTo>
-                <a:cubicBezTo>
-                  <a:pt x="5342298" y="2832"/>
-                  <a:pt x="5456387" y="23676"/>
-                  <a:pt x="5779717" y="0"/>
-                </a:cubicBezTo>
-                <a:cubicBezTo>
-                  <a:pt x="6103047" y="-23676"/>
-                  <a:pt x="6270379" y="-37291"/>
-                  <a:pt x="6620896" y="0"/>
-                </a:cubicBezTo>
-                <a:cubicBezTo>
-                  <a:pt x="6971413" y="37291"/>
-                  <a:pt x="6989068" y="24674"/>
-                  <a:pt x="7136458" y="0"/>
-                </a:cubicBezTo>
-                <a:cubicBezTo>
-                  <a:pt x="7283848" y="-24674"/>
-                  <a:pt x="7752532" y="-22436"/>
-                  <a:pt x="8140446" y="0"/>
-                </a:cubicBezTo>
-                <a:cubicBezTo>
-                  <a:pt x="8140543" y="2784"/>
-                  <a:pt x="8140462" y="9558"/>
-                  <a:pt x="8140446" y="13716"/>
-                </a:cubicBezTo>
-                <a:cubicBezTo>
-                  <a:pt x="7906329" y="-7615"/>
-                  <a:pt x="7681180" y="22893"/>
-                  <a:pt x="7543480" y="13716"/>
-                </a:cubicBezTo>
-                <a:cubicBezTo>
-                  <a:pt x="7405780" y="4539"/>
-                  <a:pt x="7216607" y="-912"/>
-                  <a:pt x="7109323" y="13716"/>
-                </a:cubicBezTo>
-                <a:cubicBezTo>
-                  <a:pt x="7002039" y="28344"/>
-                  <a:pt x="6576231" y="38120"/>
-                  <a:pt x="6430952" y="13716"/>
-                </a:cubicBezTo>
-                <a:cubicBezTo>
-                  <a:pt x="6285673" y="-10688"/>
-                  <a:pt x="6138840" y="29949"/>
-                  <a:pt x="5915391" y="13716"/>
-                </a:cubicBezTo>
-                <a:cubicBezTo>
-                  <a:pt x="5691942" y="-2517"/>
-                  <a:pt x="5459460" y="47094"/>
-                  <a:pt x="5237020" y="13716"/>
-                </a:cubicBezTo>
-                <a:cubicBezTo>
-                  <a:pt x="5014580" y="-19662"/>
-                  <a:pt x="4747677" y="35877"/>
-                  <a:pt x="4558650" y="13716"/>
-                </a:cubicBezTo>
-                <a:cubicBezTo>
-                  <a:pt x="4369623" y="-8445"/>
-                  <a:pt x="4146061" y="7996"/>
-                  <a:pt x="3880279" y="13716"/>
-                </a:cubicBezTo>
-                <a:cubicBezTo>
-                  <a:pt x="3614497" y="19436"/>
-                  <a:pt x="3473808" y="-17480"/>
-                  <a:pt x="3201909" y="13716"/>
-                </a:cubicBezTo>
-                <a:cubicBezTo>
-                  <a:pt x="2930010" y="44912"/>
-                  <a:pt x="2728175" y="-8002"/>
-                  <a:pt x="2604943" y="13716"/>
-                </a:cubicBezTo>
-                <a:cubicBezTo>
-                  <a:pt x="2481711" y="35434"/>
-                  <a:pt x="2004334" y="22380"/>
-                  <a:pt x="1845168" y="13716"/>
-                </a:cubicBezTo>
-                <a:cubicBezTo>
-                  <a:pt x="1686003" y="5052"/>
-                  <a:pt x="1375070" y="33008"/>
-                  <a:pt x="1166797" y="13716"/>
-                </a:cubicBezTo>
-                <a:cubicBezTo>
-                  <a:pt x="958524" y="-5576"/>
-                  <a:pt x="342846" y="4308"/>
-                  <a:pt x="0" y="13716"/>
-                </a:cubicBezTo>
-                <a:cubicBezTo>
-                  <a:pt x="-100" y="9589"/>
-                  <a:pt x="468" y="2983"/>
-                  <a:pt x="0" y="0"/>
-                </a:cubicBezTo>
-                <a:close/>
-              </a:path>
-              <a:path w="8140446" h="13716" stroke="0" extrusionOk="0">
-                <a:moveTo>
-                  <a:pt x="0" y="0"/>
-                </a:moveTo>
-                <a:cubicBezTo>
-                  <a:pt x="142435" y="-24533"/>
-                  <a:pt x="380026" y="17447"/>
-                  <a:pt x="596966" y="0"/>
-                </a:cubicBezTo>
-                <a:cubicBezTo>
-                  <a:pt x="813906" y="-17447"/>
-                  <a:pt x="830530" y="13462"/>
-                  <a:pt x="1031123" y="0"/>
-                </a:cubicBezTo>
-                <a:cubicBezTo>
-                  <a:pt x="1231716" y="-13462"/>
-                  <a:pt x="1634038" y="0"/>
-                  <a:pt x="1872303" y="0"/>
-                </a:cubicBezTo>
-                <a:cubicBezTo>
-                  <a:pt x="2110568" y="0"/>
-                  <a:pt x="2261934" y="-25727"/>
-                  <a:pt x="2469269" y="0"/>
-                </a:cubicBezTo>
-                <a:cubicBezTo>
-                  <a:pt x="2676604" y="25727"/>
-                  <a:pt x="2790440" y="16284"/>
-                  <a:pt x="3066235" y="0"/>
-                </a:cubicBezTo>
-                <a:cubicBezTo>
-                  <a:pt x="3342030" y="-16284"/>
-                  <a:pt x="3685603" y="41976"/>
-                  <a:pt x="3907414" y="0"/>
-                </a:cubicBezTo>
-                <a:cubicBezTo>
-                  <a:pt x="4129225" y="-41976"/>
-                  <a:pt x="4177416" y="-7598"/>
-                  <a:pt x="4422976" y="0"/>
-                </a:cubicBezTo>
-                <a:cubicBezTo>
-                  <a:pt x="4668536" y="7598"/>
-                  <a:pt x="5023499" y="-28058"/>
-                  <a:pt x="5264155" y="0"/>
-                </a:cubicBezTo>
-                <a:cubicBezTo>
-                  <a:pt x="5504811" y="28058"/>
-                  <a:pt x="5703675" y="13288"/>
-                  <a:pt x="6105335" y="0"/>
-                </a:cubicBezTo>
-                <a:cubicBezTo>
-                  <a:pt x="6506995" y="-13288"/>
-                  <a:pt x="6455516" y="-5124"/>
-                  <a:pt x="6783705" y="0"/>
-                </a:cubicBezTo>
-                <a:cubicBezTo>
-                  <a:pt x="7111894" y="5124"/>
-                  <a:pt x="7512856" y="10604"/>
-                  <a:pt x="8140446" y="0"/>
-                </a:cubicBezTo>
-                <a:cubicBezTo>
-                  <a:pt x="8139772" y="5682"/>
-                  <a:pt x="8139843" y="9439"/>
-                  <a:pt x="8140446" y="13716"/>
-                </a:cubicBezTo>
-                <a:cubicBezTo>
-                  <a:pt x="7959314" y="-1227"/>
-                  <a:pt x="7870113" y="5865"/>
-                  <a:pt x="7706289" y="13716"/>
-                </a:cubicBezTo>
-                <a:cubicBezTo>
-                  <a:pt x="7542465" y="21567"/>
-                  <a:pt x="7157940" y="12910"/>
-                  <a:pt x="6865109" y="13716"/>
-                </a:cubicBezTo>
-                <a:cubicBezTo>
-                  <a:pt x="6572278" y="14522"/>
-                  <a:pt x="6524256" y="33479"/>
-                  <a:pt x="6349548" y="13716"/>
-                </a:cubicBezTo>
-                <a:cubicBezTo>
-                  <a:pt x="6174840" y="-6047"/>
-                  <a:pt x="5951624" y="-4398"/>
-                  <a:pt x="5671177" y="13716"/>
-                </a:cubicBezTo>
-                <a:cubicBezTo>
-                  <a:pt x="5390730" y="31830"/>
-                  <a:pt x="5222992" y="55486"/>
-                  <a:pt x="4829998" y="13716"/>
-                </a:cubicBezTo>
-                <a:cubicBezTo>
-                  <a:pt x="4437004" y="-28054"/>
-                  <a:pt x="4344181" y="34515"/>
-                  <a:pt x="4151627" y="13716"/>
-                </a:cubicBezTo>
-                <a:cubicBezTo>
-                  <a:pt x="3959073" y="-7083"/>
-                  <a:pt x="3886970" y="28303"/>
-                  <a:pt x="3717470" y="13716"/>
-                </a:cubicBezTo>
-                <a:cubicBezTo>
-                  <a:pt x="3547970" y="-871"/>
-                  <a:pt x="3451521" y="27300"/>
-                  <a:pt x="3201909" y="13716"/>
-                </a:cubicBezTo>
-                <a:cubicBezTo>
-                  <a:pt x="2952297" y="132"/>
-                  <a:pt x="2543413" y="1457"/>
-                  <a:pt x="2360729" y="13716"/>
-                </a:cubicBezTo>
-                <a:cubicBezTo>
-                  <a:pt x="2178045" y="25975"/>
-                  <a:pt x="1906056" y="21275"/>
-                  <a:pt x="1682359" y="13716"/>
-                </a:cubicBezTo>
-                <a:cubicBezTo>
-                  <a:pt x="1458662" y="6158"/>
-                  <a:pt x="1330405" y="3474"/>
-                  <a:pt x="1166797" y="13716"/>
-                </a:cubicBezTo>
-                <a:cubicBezTo>
-                  <a:pt x="1003189" y="23958"/>
-                  <a:pt x="278098" y="14961"/>
-                  <a:pt x="0" y="13716"/>
-                </a:cubicBezTo>
-                <a:cubicBezTo>
-                  <a:pt x="303" y="7982"/>
-                  <a:pt x="182" y="5202"/>
-                  <a:pt x="0" y="0"/>
-                </a:cubicBezTo>
-                <a:close/>
-              </a:path>
-            </a:pathLst>
-          </a:custGeom>
-          <a:solidFill>
-            <a:schemeClr val="accent2"/>
-          </a:solidFill>
-          <a:ln w="41275" cap="rnd">
-            <a:solidFill>
-              <a:schemeClr val="accent2"/>
-            </a:solidFill>
-            <a:round/>
-            <a:extLst>
-              <a:ext uri="{C807C97D-BFC1-408E-A445-0C87EB9F89A2}">
-                <ask:lineSketchStyleProps xmlns:ask="http://schemas.microsoft.com/office/drawing/2018/sketchyshapes" sd="1219033472">
-                  <a:prstGeom prst="rect">
-                    <a:avLst/>
-                  </a:prstGeom>
-                  <ask:type>
-                    <ask:lineSketchFreehand/>
-                  </ask:type>
-                </ask:lineSketchStyleProps>
-              </a:ext>
-            </a:extLst>
-          </a:ln>
-        </p:spPr>
-        <p:style>
-          <a:lnRef idx="2">
-            <a:schemeClr val="accent1">
-              <a:shade val="50000"/>
-            </a:schemeClr>
-          </a:lnRef>
-          <a:fillRef idx="1">
-            <a:schemeClr val="accent1"/>
-          </a:fillRef>
-          <a:effectRef idx="0">
-            <a:schemeClr val="accent1"/>
-          </a:effectRef>
-          <a:fontRef idx="minor">
-            <a:schemeClr val="lt1"/>
-          </a:fontRef>
-        </p:style>
-        <p:txBody>
-          <a:bodyPr rtlCol="0" anchor="ctr"/>
-          <a:lstStyle/>
-          <a:p>
-            <a:pPr algn="ctr"/>
-            <a:endParaRPr lang="en-US"/>
-          </a:p>
-        </p:txBody>
-      </p:sp>
-      <p:sp>
-        <p:nvSpPr>
-          <p:cNvPr id="3" name="Content Placeholder 2"/>
-          <p:cNvSpPr>
-            <a:spLocks noGrp="1"/>
-          </p:cNvSpPr>
-          <p:nvPr>
-            <p:ph idx="1"/>
-          </p:nvPr>
-        </p:nvSpPr>
-        <p:spPr>
-          <a:xfrm>
-            <a:off x="628650" y="1447038"/>
-            <a:ext cx="7886700" cy="3188970"/>
-          </a:xfrm>
-        </p:spPr>
-        <p:txBody>
-          <a:bodyPr>
-            <a:normAutofit/>
-          </a:bodyPr>
-          <a:lstStyle/>
-          <a:p>
-            <a:pPr lvl="0"/>
-            <a:r>
-              <a:rPr lang="en-US" sz="1700" b="1"/>
-              <a:t>Built-in Statistics Functions</a:t>
-            </a:r>
-          </a:p>
-          <a:p>
-            <a:pPr lvl="1"/>
-            <a:r>
-              <a:rPr lang="en-US" sz="1700"/>
-              <a:t>Provides a variety of statistical tests, such as t-tests, ANOVA, etc.</a:t>
-            </a:r>
-          </a:p>
-          <a:p>
-            <a:pPr lvl="0"/>
-            <a:r>
-              <a:rPr lang="en-US" sz="1700" b="1"/>
-              <a:t>Visualization Capabilities</a:t>
-            </a:r>
-          </a:p>
-          <a:p>
-            <a:pPr lvl="1"/>
-            <a:r>
-              <a:rPr lang="en-US" sz="1700"/>
-              <a:t>Tools like </a:t>
-            </a:r>
-            <a:r>
-              <a:rPr lang="en-US" sz="1700">
-                <a:latin typeface="Courier"/>
-              </a:rPr>
-              <a:t>ggplot2</a:t>
-            </a:r>
-            <a:r>
-              <a:rPr lang="en-US" sz="1700"/>
-              <a:t> facilitate high-quality visualizations.</a:t>
-            </a:r>
-          </a:p>
-          <a:p>
-            <a:pPr lvl="0"/>
-            <a:r>
-              <a:rPr lang="en-US" sz="1700" b="1"/>
-              <a:t>Expanded Capabilities through Added Libraries</a:t>
-            </a:r>
-          </a:p>
-          <a:p>
-            <a:pPr lvl="1"/>
-            <a:r>
-              <a:rPr lang="en-US" sz="1700"/>
-              <a:t>Thousands of packages are available on CRAN.</a:t>
-            </a:r>
-          </a:p>
-          <a:p>
-            <a:pPr lvl="0"/>
-            <a:r>
-              <a:rPr lang="en-US" sz="1700" b="1"/>
-              <a:t>Integration with Other Tools, such as SQL</a:t>
-            </a:r>
-          </a:p>
-          <a:p>
-            <a:pPr lvl="1"/>
-            <a:r>
-              <a:rPr lang="en-US" sz="1700"/>
-              <a:t>Connects with databases for efficient data manipulation.</a:t>
             </a:r>
           </a:p>
         </p:txBody>
